--- a/Java_Week4.pptx
+++ b/Java_Week4.pptx
@@ -1268,7 +1268,7 @@
             </a:extLst>
           </p:cNvPr>
           <p:cNvSpPr>
-            <a:spLocks noRot="1" noChangeAspect="1" noChangeArrowheads="1" noTextEdit="1"/>
+            <a:spLocks noGrp="1" noRot="1" noChangeAspect="1" noChangeArrowheads="1" noTextEdit="1"/>
           </p:cNvSpPr>
           <p:nvPr>
             <p:ph type="sldImg"/>
@@ -1433,7 +1433,7 @@
             </a:extLst>
           </p:cNvPr>
           <p:cNvSpPr>
-            <a:spLocks noRot="1" noChangeAspect="1" noChangeArrowheads="1" noTextEdit="1"/>
+            <a:spLocks noGrp="1" noRot="1" noChangeAspect="1" noChangeArrowheads="1" noTextEdit="1"/>
           </p:cNvSpPr>
           <p:nvPr>
             <p:ph type="sldImg"/>
@@ -1704,7 +1704,7 @@
             </a:extLst>
           </p:cNvPr>
           <p:cNvSpPr>
-            <a:spLocks noRot="1" noChangeAspect="1" noChangeArrowheads="1" noTextEdit="1"/>
+            <a:spLocks noGrp="1" noRot="1" noChangeAspect="1" noChangeArrowheads="1" noTextEdit="1"/>
           </p:cNvSpPr>
           <p:nvPr>
             <p:ph type="sldImg"/>
@@ -1932,7 +1932,7 @@
             </a:extLst>
           </p:cNvPr>
           <p:cNvSpPr>
-            <a:spLocks noRot="1" noChangeAspect="1" noChangeArrowheads="1" noTextEdit="1"/>
+            <a:spLocks noGrp="1" noRot="1" noChangeAspect="1" noChangeArrowheads="1" noTextEdit="1"/>
           </p:cNvSpPr>
           <p:nvPr>
             <p:ph type="sldImg"/>
@@ -2091,7 +2091,7 @@
             </a:extLst>
           </p:cNvPr>
           <p:cNvSpPr>
-            <a:spLocks noRot="1" noChangeAspect="1" noChangeArrowheads="1" noTextEdit="1"/>
+            <a:spLocks noGrp="1" noRot="1" noChangeAspect="1" noChangeArrowheads="1" noTextEdit="1"/>
           </p:cNvSpPr>
           <p:nvPr>
             <p:ph type="sldImg"/>
@@ -2400,7 +2400,7 @@
             </a:extLst>
           </p:cNvPr>
           <p:cNvSpPr>
-            <a:spLocks noRot="1" noChangeAspect="1" noChangeArrowheads="1" noTextEdit="1"/>
+            <a:spLocks noGrp="1" noRot="1" noChangeAspect="1" noChangeArrowheads="1" noTextEdit="1"/>
           </p:cNvSpPr>
           <p:nvPr>
             <p:ph type="sldImg"/>
@@ -4547,7 +4547,7 @@
             </a:extLst>
           </p:cNvPr>
           <p:cNvSpPr>
-            <a:spLocks noRot="1" noChangeAspect="1" noChangeArrowheads="1" noTextEdit="1"/>
+            <a:spLocks noGrp="1" noRot="1" noChangeAspect="1" noChangeArrowheads="1" noTextEdit="1"/>
           </p:cNvSpPr>
           <p:nvPr>
             <p:ph type="sldImg"/>
@@ -4845,7 +4845,7 @@
             </a:extLst>
           </p:cNvPr>
           <p:cNvSpPr>
-            <a:spLocks noRot="1" noChangeAspect="1" noChangeArrowheads="1" noTextEdit="1"/>
+            <a:spLocks noGrp="1" noRot="1" noChangeAspect="1" noChangeArrowheads="1" noTextEdit="1"/>
           </p:cNvSpPr>
           <p:nvPr>
             <p:ph type="sldImg"/>
@@ -5557,7 +5557,7 @@
             </a:extLst>
           </p:cNvPr>
           <p:cNvSpPr>
-            <a:spLocks noRot="1" noChangeAspect="1" noChangeArrowheads="1" noTextEdit="1"/>
+            <a:spLocks noGrp="1" noRot="1" noChangeAspect="1" noChangeArrowheads="1" noTextEdit="1"/>
           </p:cNvSpPr>
           <p:nvPr>
             <p:ph type="sldImg"/>
@@ -5723,7 +5723,7 @@
             </a:extLst>
           </p:cNvPr>
           <p:cNvSpPr>
-            <a:spLocks noRot="1" noChangeAspect="1" noChangeArrowheads="1" noTextEdit="1"/>
+            <a:spLocks noGrp="1" noRot="1" noChangeAspect="1" noChangeArrowheads="1" noTextEdit="1"/>
           </p:cNvSpPr>
           <p:nvPr>
             <p:ph type="sldImg"/>
@@ -5904,7 +5904,7 @@
             </a:extLst>
           </p:cNvPr>
           <p:cNvSpPr>
-            <a:spLocks noRot="1" noChangeAspect="1" noChangeArrowheads="1" noTextEdit="1"/>
+            <a:spLocks noGrp="1" noRot="1" noChangeAspect="1" noChangeArrowheads="1" noTextEdit="1"/>
           </p:cNvSpPr>
           <p:nvPr>
             <p:ph type="sldImg"/>
@@ -6060,7 +6060,7 @@
             </a:extLst>
           </p:cNvPr>
           <p:cNvSpPr>
-            <a:spLocks noRot="1" noChangeAspect="1" noChangeArrowheads="1" noTextEdit="1"/>
+            <a:spLocks noGrp="1" noRot="1" noChangeAspect="1" noChangeArrowheads="1" noTextEdit="1"/>
           </p:cNvSpPr>
           <p:nvPr>
             <p:ph type="sldImg"/>
@@ -7810,7 +7810,7 @@
           <a:p>
             <a:fld id="{A1E4D65A-0EC1-4CBC-8539-F9FD2B92F981}" type="datetimeFigureOut">
               <a:rPr kumimoji="1" lang="ja-JP" altLang="en-US" smtClean="0"/>
-              <a:t>2026/8/7</a:t>
+              <a:t>2026/8/12</a:t>
             </a:fld>
             <a:endParaRPr kumimoji="1" lang="ja-JP" altLang="en-US"/>
           </a:p>
@@ -10173,7 +10173,7 @@
           <a:p>
             <a:fld id="{A1E4D65A-0EC1-4CBC-8539-F9FD2B92F981}" type="datetimeFigureOut">
               <a:rPr kumimoji="1" lang="ja-JP" altLang="en-US" smtClean="0"/>
-              <a:t>2026/8/7</a:t>
+              <a:t>2026/8/12</a:t>
             </a:fld>
             <a:endParaRPr kumimoji="1" lang="ja-JP" altLang="en-US"/>
           </a:p>

--- a/Java_Week4.pptx
+++ b/Java_Week4.pptx
@@ -6,26 +6,25 @@
     <p:sldMasterId id="2147483796" r:id="rId2"/>
   </p:sldMasterIdLst>
   <p:notesMasterIdLst>
-    <p:notesMasterId r:id="rId17"/>
+    <p:notesMasterId r:id="rId16"/>
   </p:notesMasterIdLst>
   <p:handoutMasterIdLst>
-    <p:handoutMasterId r:id="rId18"/>
+    <p:handoutMasterId r:id="rId17"/>
   </p:handoutMasterIdLst>
   <p:sldIdLst>
-    <p:sldId id="689" r:id="rId3"/>
-    <p:sldId id="334" r:id="rId4"/>
-    <p:sldId id="366" r:id="rId5"/>
-    <p:sldId id="371" r:id="rId6"/>
-    <p:sldId id="367" r:id="rId7"/>
-    <p:sldId id="373" r:id="rId8"/>
-    <p:sldId id="393" r:id="rId9"/>
-    <p:sldId id="394" r:id="rId10"/>
-    <p:sldId id="385" r:id="rId11"/>
-    <p:sldId id="386" r:id="rId12"/>
-    <p:sldId id="395" r:id="rId13"/>
-    <p:sldId id="396" r:id="rId14"/>
-    <p:sldId id="379" r:id="rId15"/>
-    <p:sldId id="380" r:id="rId16"/>
+    <p:sldId id="334" r:id="rId3"/>
+    <p:sldId id="366" r:id="rId4"/>
+    <p:sldId id="371" r:id="rId5"/>
+    <p:sldId id="367" r:id="rId6"/>
+    <p:sldId id="373" r:id="rId7"/>
+    <p:sldId id="393" r:id="rId8"/>
+    <p:sldId id="394" r:id="rId9"/>
+    <p:sldId id="385" r:id="rId10"/>
+    <p:sldId id="386" r:id="rId11"/>
+    <p:sldId id="395" r:id="rId12"/>
+    <p:sldId id="396" r:id="rId13"/>
+    <p:sldId id="379" r:id="rId14"/>
+    <p:sldId id="380" r:id="rId15"/>
   </p:sldIdLst>
   <p:sldSz cx="9906000" cy="6858000" type="A4"/>
   <p:notesSz cx="7104063" cy="10234613"/>
@@ -7810,7 +7809,7 @@
           <a:p>
             <a:fld id="{A1E4D65A-0EC1-4CBC-8539-F9FD2B92F981}" type="datetimeFigureOut">
               <a:rPr kumimoji="1" lang="ja-JP" altLang="en-US" smtClean="0"/>
-              <a:t>2026/8/12</a:t>
+              <a:t>2026/8/14</a:t>
             </a:fld>
             <a:endParaRPr kumimoji="1" lang="ja-JP" altLang="en-US"/>
           </a:p>
@@ -10173,7 +10172,7 @@
           <a:p>
             <a:fld id="{A1E4D65A-0EC1-4CBC-8539-F9FD2B92F981}" type="datetimeFigureOut">
               <a:rPr kumimoji="1" lang="ja-JP" altLang="en-US" smtClean="0"/>
-              <a:t>2026/8/12</a:t>
+              <a:t>2026/8/14</a:t>
             </a:fld>
             <a:endParaRPr kumimoji="1" lang="ja-JP" altLang="en-US"/>
           </a:p>
@@ -10582,199 +10581,10 @@
       </p:grpSpPr>
       <p:sp>
         <p:nvSpPr>
-          <p:cNvPr id="2" name="Title 1">
+          <p:cNvPr id="2" name="Slide Number Placeholder 1">
             <a:extLst>
               <a:ext uri="{FF2B5EF4-FFF2-40B4-BE49-F238E27FC236}">
-                <a16:creationId xmlns:a16="http://schemas.microsoft.com/office/drawing/2014/main" id="{11BC61E3-7210-D801-C73E-18DF39FE6C40}"/>
-              </a:ext>
-            </a:extLst>
-          </p:cNvPr>
-          <p:cNvSpPr>
-            <a:spLocks noGrp="1"/>
-          </p:cNvSpPr>
-          <p:nvPr>
-            <p:ph type="ctrTitle"/>
-          </p:nvPr>
-        </p:nvSpPr>
-        <p:spPr>
-          <a:xfrm>
-            <a:off x="742950" y="2130425"/>
-            <a:ext cx="7486650" cy="1470025"/>
-          </a:xfrm>
-        </p:spPr>
-        <p:txBody>
-          <a:bodyPr>
-            <a:noAutofit/>
-          </a:bodyPr>
-          <a:lstStyle/>
-          <a:p>
-            <a:pPr algn="ctr" eaLnBrk="0" hangingPunct="0"/>
-            <a:r>
-              <a:rPr lang="en-US" altLang="ja-JP" dirty="0">
-                <a:latin typeface="+mj-lt"/>
-              </a:rPr>
-              <a:t>Java Programming</a:t>
-            </a:r>
-            <a:br>
-              <a:rPr lang="en-US" altLang="ja-JP" dirty="0">
-                <a:latin typeface="+mj-lt"/>
-              </a:rPr>
-            </a:br>
-            <a:br>
-              <a:rPr lang="vi-VN" altLang="ja-JP" kern="1200" dirty="0">
-                <a:latin typeface="+mj-lt"/>
-              </a:rPr>
-            </a:br>
-            <a:endParaRPr kumimoji="1" lang="ja-JP" altLang="en-US" dirty="0">
-              <a:latin typeface="+mj-lt"/>
-              <a:cs typeface="Times New Roman" panose="02020603050405020304" pitchFamily="18" charset="0"/>
-            </a:endParaRPr>
-          </a:p>
-        </p:txBody>
-      </p:sp>
-      <p:sp>
-        <p:nvSpPr>
-          <p:cNvPr id="3" name="Subtitle 2">
-            <a:extLst>
-              <a:ext uri="{FF2B5EF4-FFF2-40B4-BE49-F238E27FC236}">
-                <a16:creationId xmlns:a16="http://schemas.microsoft.com/office/drawing/2014/main" id="{708F8EF2-D090-2D87-3C30-91D44315D1EC}"/>
-              </a:ext>
-            </a:extLst>
-          </p:cNvPr>
-          <p:cNvSpPr>
-            <a:spLocks noGrp="1"/>
-          </p:cNvSpPr>
-          <p:nvPr>
-            <p:ph type="subTitle" idx="1"/>
-          </p:nvPr>
-        </p:nvSpPr>
-        <p:spPr>
-          <a:xfrm>
-            <a:off x="2231027" y="4419600"/>
-            <a:ext cx="6934200" cy="1752600"/>
-          </a:xfrm>
-        </p:spPr>
-        <p:txBody>
-          <a:bodyPr>
-            <a:normAutofit/>
-          </a:bodyPr>
-          <a:lstStyle/>
-          <a:p>
-            <a:pPr algn="r"/>
-            <a:endParaRPr kumimoji="1" lang="en-US" altLang="ja-JP" sz="2800" dirty="0">
-              <a:latin typeface="+mj-lt"/>
-            </a:endParaRPr>
-          </a:p>
-          <a:p>
-            <a:pPr algn="r"/>
-            <a:r>
-              <a:rPr lang="en-US" altLang="ja-JP" sz="2800" dirty="0">
-                <a:latin typeface="+mj-lt"/>
-              </a:rPr>
-              <a:t>Mai Ngọc </a:t>
-            </a:r>
-            <a:r>
-              <a:rPr lang="en-US" altLang="ja-JP" sz="2800" dirty="0" err="1">
-                <a:latin typeface="+mj-lt"/>
-              </a:rPr>
-              <a:t>Khương</a:t>
-            </a:r>
-            <a:endParaRPr lang="en-US" altLang="ja-JP" sz="2800" dirty="0">
-              <a:latin typeface="+mj-lt"/>
-            </a:endParaRPr>
-          </a:p>
-          <a:p>
-            <a:pPr algn="r"/>
-            <a:r>
-              <a:rPr kumimoji="1" lang="en-US" altLang="ja-JP" sz="2800" dirty="0">
-                <a:latin typeface="+mj-lt"/>
-              </a:rPr>
-              <a:t>H</a:t>
-            </a:r>
-            <a:r>
-              <a:rPr lang="en-US" altLang="ja-JP" sz="2800" dirty="0">
-                <a:latin typeface="+mj-lt"/>
-              </a:rPr>
-              <a:t>à </a:t>
-            </a:r>
-            <a:r>
-              <a:rPr lang="en-US" altLang="ja-JP" sz="2800" dirty="0" err="1">
-                <a:latin typeface="+mj-lt"/>
-              </a:rPr>
-              <a:t>nội</a:t>
-            </a:r>
-            <a:r>
-              <a:rPr lang="en-US" altLang="ja-JP" sz="2800" dirty="0">
-                <a:latin typeface="+mj-lt"/>
-              </a:rPr>
-              <a:t>, </a:t>
-            </a:r>
-            <a:r>
-              <a:rPr lang="en-US" altLang="ja-JP" sz="2800" dirty="0" err="1">
-                <a:latin typeface="+mj-lt"/>
-              </a:rPr>
-              <a:t>tháng</a:t>
-            </a:r>
-            <a:r>
-              <a:rPr lang="en-US" altLang="ja-JP" sz="2800" dirty="0">
-                <a:latin typeface="+mj-lt"/>
-              </a:rPr>
-              <a:t> 8 </a:t>
-            </a:r>
-            <a:r>
-              <a:rPr lang="en-US" altLang="ja-JP" sz="2800" dirty="0" err="1">
-                <a:latin typeface="+mj-lt"/>
-              </a:rPr>
-              <a:t>năm</a:t>
-            </a:r>
-            <a:r>
-              <a:rPr lang="en-US" altLang="ja-JP" sz="2800" dirty="0">
-                <a:latin typeface="+mj-lt"/>
-              </a:rPr>
-              <a:t> 2026</a:t>
-            </a:r>
-            <a:endParaRPr kumimoji="1" lang="ja-JP" altLang="en-US" sz="2800" dirty="0">
-              <a:latin typeface="+mj-lt"/>
-            </a:endParaRPr>
-          </a:p>
-        </p:txBody>
-      </p:sp>
-    </p:spTree>
-    <p:extLst>
-      <p:ext uri="{BB962C8B-B14F-4D97-AF65-F5344CB8AC3E}">
-        <p14:creationId xmlns:p14="http://schemas.microsoft.com/office/powerpoint/2010/main" val="4232930616"/>
-      </p:ext>
-    </p:extLst>
-  </p:cSld>
-  <p:clrMapOvr>
-    <a:masterClrMapping/>
-  </p:clrMapOvr>
-</p:sld>
-</file>
-
-<file path=ppt/slides/slide10.xml><?xml version="1.0" encoding="utf-8"?>
-<p:sld xmlns:a="http://schemas.openxmlformats.org/drawingml/2006/main" xmlns:r="http://schemas.openxmlformats.org/officeDocument/2006/relationships" xmlns:p="http://schemas.openxmlformats.org/presentationml/2006/main">
-  <p:cSld>
-    <p:spTree>
-      <p:nvGrpSpPr>
-        <p:cNvPr id="1" name=""/>
-        <p:cNvGrpSpPr/>
-        <p:nvPr/>
-      </p:nvGrpSpPr>
-      <p:grpSpPr>
-        <a:xfrm>
-          <a:off x="0" y="0"/>
-          <a:ext cx="0" cy="0"/>
-          <a:chOff x="0" y="0"/>
-          <a:chExt cx="0" cy="0"/>
-        </a:xfrm>
-      </p:grpSpPr>
-      <p:sp>
-        <p:nvSpPr>
-          <p:cNvPr id="2" name="Slide Number Placeholder 4">
-            <a:extLst>
-              <a:ext uri="{FF2B5EF4-FFF2-40B4-BE49-F238E27FC236}">
-                <a16:creationId xmlns:a16="http://schemas.microsoft.com/office/drawing/2014/main" id="{0AEDBFFC-2F70-EE7C-B23E-1CA4F60DDC77}"/>
+                <a16:creationId xmlns:a16="http://schemas.microsoft.com/office/drawing/2014/main" id="{D4DDB92D-1849-2485-3BE9-2219BAA8C89C}"/>
               </a:ext>
             </a:extLst>
           </p:cNvPr>
@@ -10785,263 +10595,10 @@
             <p:ph type="sldNum" sz="quarter" idx="10"/>
           </p:nvPr>
         </p:nvSpPr>
-        <p:spPr/>
-        <p:txBody>
-          <a:bodyPr/>
-          <a:lstStyle/>
-          <a:p>
-            <a:fld id="{8AD9CD99-F4B0-478A-A37C-6C89EFA4C990}" type="slidenum">
-              <a:rPr lang="en-US" altLang="ja-JP"/>
-              <a:pPr/>
-              <a:t>10</a:t>
-            </a:fld>
-            <a:endParaRPr lang="en-US" altLang="ja-JP"/>
-          </a:p>
-        </p:txBody>
-      </p:sp>
-      <p:sp>
-        <p:nvSpPr>
-          <p:cNvPr id="410644" name="Rectangle 20">
-            <a:extLst>
-              <a:ext uri="{FF2B5EF4-FFF2-40B4-BE49-F238E27FC236}">
-                <a16:creationId xmlns:a16="http://schemas.microsoft.com/office/drawing/2014/main" id="{F4EB0D99-9C45-3D4C-679F-FF7D799872D6}"/>
-              </a:ext>
-            </a:extLst>
-          </p:cNvPr>
-          <p:cNvSpPr>
-            <a:spLocks noChangeArrowheads="1"/>
-          </p:cNvSpPr>
-          <p:nvPr/>
-        </p:nvSpPr>
         <p:spPr bwMode="auto">
           <a:xfrm>
-            <a:off x="344488" y="2127250"/>
-            <a:ext cx="9091612" cy="4130675"/>
-          </a:xfrm>
-          <a:prstGeom prst="rect">
-            <a:avLst/>
-          </a:prstGeom>
-          <a:solidFill>
-            <a:srgbClr val="DDDDDD">
-              <a:alpha val="25000"/>
-            </a:srgbClr>
-          </a:solidFill>
-          <a:ln w="9525" algn="ctr">
-            <a:solidFill>
-              <a:schemeClr val="tx1"/>
-            </a:solidFill>
-            <a:miter lim="800000"/>
-            <a:headEnd/>
-            <a:tailEnd/>
-          </a:ln>
-          <a:effectLst/>
-          <a:extLst>
-            <a:ext uri="{AF507438-7753-43E0-B8FC-AC1667EBCBE1}">
-              <a14:hiddenEffects xmlns:a14="http://schemas.microsoft.com/office/drawing/2010/main">
-                <a:effectLst>
-                  <a:outerShdw dist="35921" dir="2700000" algn="ctr" rotWithShape="0">
-                    <a:schemeClr val="bg2"/>
-                  </a:outerShdw>
-                </a:effectLst>
-              </a14:hiddenEffects>
-            </a:ext>
-          </a:extLst>
-        </p:spPr>
-        <p:txBody>
-          <a:bodyPr wrap="none" anchor="ctr"/>
-          <a:lstStyle/>
-          <a:p>
-            <a:endParaRPr lang="ja-JP" altLang="en-US"/>
-          </a:p>
-        </p:txBody>
-      </p:sp>
-      <p:sp>
-        <p:nvSpPr>
-          <p:cNvPr id="410626" name="Rectangle 2">
-            <a:extLst>
-              <a:ext uri="{FF2B5EF4-FFF2-40B4-BE49-F238E27FC236}">
-                <a16:creationId xmlns:a16="http://schemas.microsoft.com/office/drawing/2014/main" id="{30A45C1E-470F-3D27-7517-1FA3A36ED0FA}"/>
-              </a:ext>
-            </a:extLst>
-          </p:cNvPr>
-          <p:cNvSpPr>
-            <a:spLocks noGrp="1" noChangeArrowheads="1"/>
-          </p:cNvSpPr>
-          <p:nvPr>
-            <p:ph type="title"/>
-          </p:nvPr>
-        </p:nvSpPr>
-        <p:spPr>
-          <a:xfrm>
-            <a:off x="355600" y="284956"/>
-            <a:ext cx="9217025" cy="490537"/>
-          </a:xfrm>
-        </p:spPr>
-        <p:txBody>
-          <a:bodyPr>
-            <a:normAutofit fontScale="90000"/>
-          </a:bodyPr>
-          <a:lstStyle/>
-          <a:p>
-            <a:r>
-              <a:rPr lang="en-US" altLang="ja-JP" dirty="0" err="1">
-                <a:latin typeface="Arial" panose="020B0604020202020204" pitchFamily="34" charset="0"/>
-                <a:ea typeface="MS UI Gothic" panose="020B0600070205080204" pitchFamily="50" charset="-128"/>
-              </a:rPr>
-              <a:t>Đóng</a:t>
-            </a:r>
-            <a:r>
-              <a:rPr lang="en-US" altLang="ja-JP" dirty="0">
-                <a:latin typeface="Arial" panose="020B0604020202020204" pitchFamily="34" charset="0"/>
-                <a:ea typeface="MS UI Gothic" panose="020B0600070205080204" pitchFamily="50" charset="-128"/>
-              </a:rPr>
-              <a:t> </a:t>
-            </a:r>
-            <a:r>
-              <a:rPr lang="en-US" altLang="ja-JP" dirty="0" err="1">
-                <a:latin typeface="Arial" panose="020B0604020202020204" pitchFamily="34" charset="0"/>
-                <a:ea typeface="MS UI Gothic" panose="020B0600070205080204" pitchFamily="50" charset="-128"/>
-              </a:rPr>
-              <a:t>gói</a:t>
-            </a:r>
-            <a:r>
-              <a:rPr lang="en-US" altLang="ja-JP" dirty="0">
-                <a:latin typeface="Arial" panose="020B0604020202020204" pitchFamily="34" charset="0"/>
-                <a:ea typeface="MS UI Gothic" panose="020B0600070205080204" pitchFamily="50" charset="-128"/>
-              </a:rPr>
-              <a:t>, </a:t>
-            </a:r>
-            <a:r>
-              <a:rPr lang="en-US" altLang="ja-JP" dirty="0" err="1">
-                <a:latin typeface="Arial" panose="020B0604020202020204" pitchFamily="34" charset="0"/>
-                <a:ea typeface="MS UI Gothic" panose="020B0600070205080204" pitchFamily="50" charset="-128"/>
-              </a:rPr>
-              <a:t>giấu</a:t>
-            </a:r>
-            <a:r>
-              <a:rPr lang="en-US" altLang="ja-JP" dirty="0">
-                <a:latin typeface="Arial" panose="020B0604020202020204" pitchFamily="34" charset="0"/>
-                <a:ea typeface="MS UI Gothic" panose="020B0600070205080204" pitchFamily="50" charset="-128"/>
-              </a:rPr>
-              <a:t> </a:t>
-            </a:r>
-            <a:r>
-              <a:rPr lang="en-US" altLang="ja-JP" dirty="0" err="1">
-                <a:latin typeface="Arial" panose="020B0604020202020204" pitchFamily="34" charset="0"/>
-                <a:ea typeface="MS UI Gothic" panose="020B0600070205080204" pitchFamily="50" charset="-128"/>
-              </a:rPr>
-              <a:t>thông</a:t>
-            </a:r>
-            <a:r>
-              <a:rPr lang="en-US" altLang="ja-JP" dirty="0">
-                <a:latin typeface="Arial" panose="020B0604020202020204" pitchFamily="34" charset="0"/>
-                <a:ea typeface="MS UI Gothic" panose="020B0600070205080204" pitchFamily="50" charset="-128"/>
-              </a:rPr>
-              <a:t> tin, </a:t>
-            </a:r>
-            <a:r>
-              <a:rPr lang="en-US" altLang="ja-JP" dirty="0" err="1">
-                <a:latin typeface="Arial" panose="020B0604020202020204" pitchFamily="34" charset="0"/>
-                <a:ea typeface="MS UI Gothic" panose="020B0600070205080204" pitchFamily="50" charset="-128"/>
-              </a:rPr>
-              <a:t>gửi</a:t>
-            </a:r>
-            <a:r>
-              <a:rPr lang="en-US" altLang="ja-JP" dirty="0">
-                <a:latin typeface="Arial" panose="020B0604020202020204" pitchFamily="34" charset="0"/>
-                <a:ea typeface="MS UI Gothic" panose="020B0600070205080204" pitchFamily="50" charset="-128"/>
-              </a:rPr>
-              <a:t> message (2)</a:t>
-            </a:r>
-          </a:p>
-        </p:txBody>
-      </p:sp>
-      <p:sp>
-        <p:nvSpPr>
-          <p:cNvPr id="410627" name="Rectangle 3">
-            <a:extLst>
-              <a:ext uri="{FF2B5EF4-FFF2-40B4-BE49-F238E27FC236}">
-                <a16:creationId xmlns:a16="http://schemas.microsoft.com/office/drawing/2014/main" id="{808FBBA6-99D7-C691-1231-C9E234AEEE4F}"/>
-              </a:ext>
-            </a:extLst>
-          </p:cNvPr>
-          <p:cNvSpPr>
-            <a:spLocks noChangeArrowheads="1"/>
-          </p:cNvSpPr>
-          <p:nvPr/>
-        </p:nvSpPr>
-        <p:spPr bwMode="auto">
-          <a:xfrm>
-            <a:off x="-979488" y="2136775"/>
-            <a:ext cx="9906001" cy="0"/>
-          </a:xfrm>
-          <a:prstGeom prst="rect">
-            <a:avLst/>
-          </a:prstGeom>
-          <a:noFill/>
-          <a:ln>
-            <a:noFill/>
-          </a:ln>
-          <a:effectLst/>
-          <a:extLst>
-            <a:ext uri="{909E8E84-426E-40DD-AFC4-6F175D3DCCD1}">
-              <a14:hiddenFill xmlns:a14="http://schemas.microsoft.com/office/drawing/2010/main">
-                <a:solidFill>
-                  <a:srgbClr val="99CCFF">
-                    <a:alpha val="50000"/>
-                  </a:srgbClr>
-                </a:solidFill>
-              </a14:hiddenFill>
-            </a:ext>
-            <a:ext uri="{91240B29-F687-4F45-9708-019B960494DF}">
-              <a14:hiddenLine xmlns:a14="http://schemas.microsoft.com/office/drawing/2010/main" w="9525" algn="ctr">
-                <a:solidFill>
-                  <a:schemeClr val="tx1"/>
-                </a:solidFill>
-                <a:miter lim="800000"/>
-                <a:headEnd/>
-                <a:tailEnd/>
-              </a14:hiddenLine>
-            </a:ext>
-            <a:ext uri="{AF507438-7753-43E0-B8FC-AC1667EBCBE1}">
-              <a14:hiddenEffects xmlns:a14="http://schemas.microsoft.com/office/drawing/2010/main">
-                <a:effectLst>
-                  <a:outerShdw dist="35921" dir="2700000" algn="ctr" rotWithShape="0">
-                    <a:schemeClr val="bg2"/>
-                  </a:outerShdw>
-                </a:effectLst>
-              </a14:hiddenEffects>
-            </a:ext>
-          </a:extLst>
-        </p:spPr>
-        <p:txBody>
-          <a:bodyPr wrap="none" anchor="ctr">
-            <a:spAutoFit/>
-          </a:bodyPr>
-          <a:lstStyle/>
-          <a:p>
-            <a:endParaRPr lang="ja-JP" altLang="en-US"/>
-          </a:p>
-        </p:txBody>
-      </p:sp>
-      <p:sp>
-        <p:nvSpPr>
-          <p:cNvPr id="410630" name="Rectangle 6">
-            <a:extLst>
-              <a:ext uri="{FF2B5EF4-FFF2-40B4-BE49-F238E27FC236}">
-                <a16:creationId xmlns:a16="http://schemas.microsoft.com/office/drawing/2014/main" id="{DCE07477-D132-3181-70E6-3930FE3F7F9F}"/>
-              </a:ext>
-            </a:extLst>
-          </p:cNvPr>
-          <p:cNvSpPr>
-            <a:spLocks noChangeArrowheads="1"/>
-          </p:cNvSpPr>
-          <p:nvPr/>
-        </p:nvSpPr>
-        <p:spPr bwMode="auto">
-          <a:xfrm>
-            <a:off x="344488" y="717550"/>
-            <a:ext cx="8899525" cy="585788"/>
+            <a:off x="7616825" y="6381750"/>
+            <a:ext cx="2133600" cy="476250"/>
           </a:xfrm>
           <a:prstGeom prst="rect">
             <a:avLst/>
@@ -11081,1101 +10638,164 @@
           </a:extLst>
         </p:spPr>
         <p:txBody>
-          <a:bodyPr/>
+          <a:bodyPr vert="horz" wrap="square" lIns="91440" tIns="45720" rIns="91440" bIns="45720" numCol="1" anchor="t" anchorCtr="0" compatLnSpc="1">
+            <a:prstTxWarp prst="textNoShape">
+              <a:avLst/>
+            </a:prstTxWarp>
+          </a:bodyPr>
           <a:lstStyle>
-            <a:lvl1pPr marL="269875" indent="-269875">
+            <a:defPPr>
+              <a:defRPr lang="ja-JP"/>
+            </a:defPPr>
+            <a:lvl1pPr algn="r" rtl="0" fontAlgn="base">
               <a:spcBef>
-                <a:spcPct val="10000"/>
-              </a:spcBef>
-              <a:buFont typeface="Wingdings" panose="05000000000000000000" pitchFamily="2" charset="2"/>
-              <a:buChar char="n"/>
-              <a:defRPr kumimoji="1">
-                <a:solidFill>
-                  <a:schemeClr val="tx1"/>
-                </a:solidFill>
-                <a:latin typeface="MS UI Gothic" panose="020B0600070205080204" pitchFamily="50" charset="-128"/>
-                <a:ea typeface="MS UI Gothic" panose="020B0600070205080204" pitchFamily="50" charset="-128"/>
-              </a:defRPr>
-            </a:lvl1pPr>
-            <a:lvl2pPr marL="449263">
-              <a:spcBef>
-                <a:spcPct val="10000"/>
-              </a:spcBef>
-              <a:buFont typeface="Wingdings" panose="05000000000000000000" pitchFamily="2" charset="2"/>
-              <a:defRPr kumimoji="1">
-                <a:solidFill>
-                  <a:schemeClr val="tx1"/>
-                </a:solidFill>
-                <a:latin typeface="MS UI Gothic" panose="020B0600070205080204" pitchFamily="50" charset="-128"/>
-                <a:ea typeface="MS UI Gothic" panose="020B0600070205080204" pitchFamily="50" charset="-128"/>
-              </a:defRPr>
-            </a:lvl2pPr>
-            <a:lvl3pPr marL="893763">
-              <a:spcBef>
-                <a:spcPct val="10000"/>
-              </a:spcBef>
-              <a:defRPr kumimoji="1">
-                <a:solidFill>
-                  <a:schemeClr val="tx1"/>
-                </a:solidFill>
-                <a:latin typeface="MS UI Gothic" panose="020B0600070205080204" pitchFamily="50" charset="-128"/>
-                <a:ea typeface="MS UI Gothic" panose="020B0600070205080204" pitchFamily="50" charset="-128"/>
-              </a:defRPr>
-            </a:lvl3pPr>
-            <a:lvl4pPr marL="1339850">
-              <a:spcBef>
-                <a:spcPct val="10000"/>
-              </a:spcBef>
-              <a:buFont typeface="Wingdings" panose="05000000000000000000" pitchFamily="2" charset="2"/>
-              <a:defRPr kumimoji="1">
-                <a:solidFill>
-                  <a:schemeClr val="tx1"/>
-                </a:solidFill>
-                <a:latin typeface="MS UI Gothic" panose="020B0600070205080204" pitchFamily="50" charset="-128"/>
-                <a:ea typeface="MS UI Gothic" panose="020B0600070205080204" pitchFamily="50" charset="-128"/>
-              </a:defRPr>
-            </a:lvl4pPr>
-            <a:lvl5pPr marL="1747838">
-              <a:spcBef>
-                <a:spcPct val="10000"/>
-              </a:spcBef>
-              <a:defRPr kumimoji="1">
-                <a:solidFill>
-                  <a:schemeClr val="tx1"/>
-                </a:solidFill>
-                <a:latin typeface="MS UI Gothic" panose="020B0600070205080204" pitchFamily="50" charset="-128"/>
-                <a:ea typeface="MS UI Gothic" panose="020B0600070205080204" pitchFamily="50" charset="-128"/>
-              </a:defRPr>
-            </a:lvl5pPr>
-            <a:lvl6pPr marL="2205038" fontAlgn="base">
-              <a:spcBef>
-                <a:spcPct val="10000"/>
+                <a:spcPct val="0"/>
               </a:spcBef>
               <a:spcAft>
                 <a:spcPct val="0"/>
               </a:spcAft>
-              <a:defRPr kumimoji="1">
+              <a:defRPr kumimoji="1" sz="1400" b="0" kern="1200">
                 <a:solidFill>
                   <a:schemeClr val="tx1"/>
                 </a:solidFill>
-                <a:latin typeface="MS UI Gothic" panose="020B0600070205080204" pitchFamily="50" charset="-128"/>
-                <a:ea typeface="MS UI Gothic" panose="020B0600070205080204" pitchFamily="50" charset="-128"/>
+                <a:latin typeface="Arial" panose="020B0604020202020204" pitchFamily="34" charset="0"/>
+                <a:ea typeface="+mj-ea"/>
+                <a:cs typeface="+mn-cs"/>
               </a:defRPr>
-            </a:lvl6pPr>
-            <a:lvl7pPr marL="2662238" fontAlgn="base">
+            </a:lvl1pPr>
+            <a:lvl2pPr marL="457200" algn="l" rtl="0" fontAlgn="base">
               <a:spcBef>
-                <a:spcPct val="10000"/>
+                <a:spcPct val="0"/>
               </a:spcBef>
               <a:spcAft>
                 <a:spcPct val="0"/>
               </a:spcAft>
-              <a:defRPr kumimoji="1">
+              <a:defRPr kumimoji="1" sz="1000" b="1" kern="1200">
                 <a:solidFill>
                   <a:schemeClr val="tx1"/>
                 </a:solidFill>
-                <a:latin typeface="MS UI Gothic" panose="020B0600070205080204" pitchFamily="50" charset="-128"/>
+                <a:latin typeface="Arial" panose="020B0604020202020204" pitchFamily="34" charset="0"/>
                 <a:ea typeface="MS UI Gothic" panose="020B0600070205080204" pitchFamily="50" charset="-128"/>
+                <a:cs typeface="+mn-cs"/>
               </a:defRPr>
-            </a:lvl7pPr>
-            <a:lvl8pPr marL="3119438" fontAlgn="base">
+            </a:lvl2pPr>
+            <a:lvl3pPr marL="914400" algn="l" rtl="0" fontAlgn="base">
               <a:spcBef>
-                <a:spcPct val="10000"/>
+                <a:spcPct val="0"/>
               </a:spcBef>
               <a:spcAft>
                 <a:spcPct val="0"/>
               </a:spcAft>
-              <a:defRPr kumimoji="1">
+              <a:defRPr kumimoji="1" sz="1000" b="1" kern="1200">
                 <a:solidFill>
                   <a:schemeClr val="tx1"/>
                 </a:solidFill>
-                <a:latin typeface="MS UI Gothic" panose="020B0600070205080204" pitchFamily="50" charset="-128"/>
+                <a:latin typeface="Arial" panose="020B0604020202020204" pitchFamily="34" charset="0"/>
                 <a:ea typeface="MS UI Gothic" panose="020B0600070205080204" pitchFamily="50" charset="-128"/>
+                <a:cs typeface="+mn-cs"/>
               </a:defRPr>
-            </a:lvl8pPr>
-            <a:lvl9pPr marL="3576638" fontAlgn="base">
+            </a:lvl3pPr>
+            <a:lvl4pPr marL="1371600" algn="l" rtl="0" fontAlgn="base">
               <a:spcBef>
-                <a:spcPct val="10000"/>
+                <a:spcPct val="0"/>
               </a:spcBef>
               <a:spcAft>
                 <a:spcPct val="0"/>
               </a:spcAft>
-              <a:defRPr kumimoji="1">
+              <a:defRPr kumimoji="1" sz="1000" b="1" kern="1200">
                 <a:solidFill>
                   <a:schemeClr val="tx1"/>
                 </a:solidFill>
-                <a:latin typeface="MS UI Gothic" panose="020B0600070205080204" pitchFamily="50" charset="-128"/>
+                <a:latin typeface="Arial" panose="020B0604020202020204" pitchFamily="34" charset="0"/>
                 <a:ea typeface="MS UI Gothic" panose="020B0600070205080204" pitchFamily="50" charset="-128"/>
+                <a:cs typeface="+mn-cs"/>
+              </a:defRPr>
+            </a:lvl4pPr>
+            <a:lvl5pPr marL="1828800" algn="l" rtl="0" fontAlgn="base">
+              <a:spcBef>
+                <a:spcPct val="0"/>
+              </a:spcBef>
+              <a:spcAft>
+                <a:spcPct val="0"/>
+              </a:spcAft>
+              <a:defRPr kumimoji="1" sz="1000" b="1" kern="1200">
+                <a:solidFill>
+                  <a:schemeClr val="tx1"/>
+                </a:solidFill>
+                <a:latin typeface="Arial" panose="020B0604020202020204" pitchFamily="34" charset="0"/>
+                <a:ea typeface="MS UI Gothic" panose="020B0600070205080204" pitchFamily="50" charset="-128"/>
+                <a:cs typeface="+mn-cs"/>
+              </a:defRPr>
+            </a:lvl5pPr>
+            <a:lvl6pPr marL="2286000" algn="l" defTabSz="914400" rtl="0" eaLnBrk="1" latinLnBrk="0" hangingPunct="1">
+              <a:defRPr kumimoji="1" sz="1000" b="1" kern="1200">
+                <a:solidFill>
+                  <a:schemeClr val="tx1"/>
+                </a:solidFill>
+                <a:latin typeface="Arial" panose="020B0604020202020204" pitchFamily="34" charset="0"/>
+                <a:ea typeface="MS UI Gothic" panose="020B0600070205080204" pitchFamily="50" charset="-128"/>
+                <a:cs typeface="+mn-cs"/>
+              </a:defRPr>
+            </a:lvl6pPr>
+            <a:lvl7pPr marL="2743200" algn="l" defTabSz="914400" rtl="0" eaLnBrk="1" latinLnBrk="0" hangingPunct="1">
+              <a:defRPr kumimoji="1" sz="1000" b="1" kern="1200">
+                <a:solidFill>
+                  <a:schemeClr val="tx1"/>
+                </a:solidFill>
+                <a:latin typeface="Arial" panose="020B0604020202020204" pitchFamily="34" charset="0"/>
+                <a:ea typeface="MS UI Gothic" panose="020B0600070205080204" pitchFamily="50" charset="-128"/>
+                <a:cs typeface="+mn-cs"/>
+              </a:defRPr>
+            </a:lvl7pPr>
+            <a:lvl8pPr marL="3200400" algn="l" defTabSz="914400" rtl="0" eaLnBrk="1" latinLnBrk="0" hangingPunct="1">
+              <a:defRPr kumimoji="1" sz="1000" b="1" kern="1200">
+                <a:solidFill>
+                  <a:schemeClr val="tx1"/>
+                </a:solidFill>
+                <a:latin typeface="Arial" panose="020B0604020202020204" pitchFamily="34" charset="0"/>
+                <a:ea typeface="MS UI Gothic" panose="020B0600070205080204" pitchFamily="50" charset="-128"/>
+                <a:cs typeface="+mn-cs"/>
+              </a:defRPr>
+            </a:lvl8pPr>
+            <a:lvl9pPr marL="3657600" algn="l" defTabSz="914400" rtl="0" eaLnBrk="1" latinLnBrk="0" hangingPunct="1">
+              <a:defRPr kumimoji="1" sz="1000" b="1" kern="1200">
+                <a:solidFill>
+                  <a:schemeClr val="tx1"/>
+                </a:solidFill>
+                <a:latin typeface="Arial" panose="020B0604020202020204" pitchFamily="34" charset="0"/>
+                <a:ea typeface="MS UI Gothic" panose="020B0600070205080204" pitchFamily="50" charset="-128"/>
+                <a:cs typeface="+mn-cs"/>
               </a:defRPr>
             </a:lvl9pPr>
           </a:lstStyle>
           <a:p>
-            <a:r>
-              <a:rPr lang="en-US" altLang="ja-JP" sz="2400" b="0">
-                <a:latin typeface="Arial" panose="020B0604020202020204" pitchFamily="34" charset="0"/>
-              </a:rPr>
-              <a:t>Giấu thông tin</a:t>
-            </a:r>
-          </a:p>
-          <a:p>
-            <a:pPr lvl="1"/>
-            <a:endParaRPr lang="en-US" altLang="ja-JP" sz="2400" b="0">
-              <a:latin typeface="Arial" panose="020B0604020202020204" pitchFamily="34" charset="0"/>
-            </a:endParaRPr>
-          </a:p>
-          <a:p>
-            <a:pPr lvl="1"/>
-            <a:endParaRPr lang="en-US" altLang="ja-JP" sz="2400" b="0">
-              <a:latin typeface="Arial" panose="020B0604020202020204" pitchFamily="34" charset="0"/>
-            </a:endParaRPr>
+            <a:fld id="{684E9161-E0E9-488C-B6B9-5BDC7F1BCDEC}" type="slidenum">
+              <a:rPr lang="en-US" altLang="ja-JP" smtClean="0"/>
+              <a:pPr/>
+              <a:t>1</a:t>
+            </a:fld>
+            <a:endParaRPr lang="en-US" altLang="ja-JP"/>
           </a:p>
         </p:txBody>
       </p:sp>
       <p:sp>
         <p:nvSpPr>
-          <p:cNvPr id="410631" name="Rectangle 7">
+          <p:cNvPr id="256003" name="Text Box 3">
             <a:extLst>
               <a:ext uri="{FF2B5EF4-FFF2-40B4-BE49-F238E27FC236}">
-                <a16:creationId xmlns:a16="http://schemas.microsoft.com/office/drawing/2014/main" id="{F19F0CC8-1D37-8702-FF06-32DC5A1A2021}"/>
+                <a16:creationId xmlns:a16="http://schemas.microsoft.com/office/drawing/2014/main" id="{CC2A8A9C-E656-031F-58F5-5F6CB8C6BE7E}"/>
               </a:ext>
             </a:extLst>
           </p:cNvPr>
-          <p:cNvSpPr>
+          <p:cNvSpPr txBox="1">
             <a:spLocks noChangeArrowheads="1"/>
           </p:cNvSpPr>
           <p:nvPr/>
         </p:nvSpPr>
         <p:spPr bwMode="auto">
           <a:xfrm>
-            <a:off x="355600" y="1260475"/>
-            <a:ext cx="9099550" cy="581025"/>
-          </a:xfrm>
-          <a:prstGeom prst="rect">
-            <a:avLst/>
-          </a:prstGeom>
-          <a:solidFill>
-            <a:srgbClr val="FFFFCC"/>
-          </a:solidFill>
-          <a:ln w="12700">
-            <a:solidFill>
-              <a:schemeClr val="tx1"/>
-            </a:solidFill>
-            <a:miter lim="800000"/>
-            <a:headEnd/>
-            <a:tailEnd/>
-          </a:ln>
-          <a:effectLst/>
-          <a:extLst>
-            <a:ext uri="{AF507438-7753-43E0-B8FC-AC1667EBCBE1}">
-              <a14:hiddenEffects xmlns:a14="http://schemas.microsoft.com/office/drawing/2010/main">
-                <a:effectLst>
-                  <a:outerShdw dist="35921" dir="2700000" algn="ctr" rotWithShape="0">
-                    <a:schemeClr val="bg2"/>
-                  </a:outerShdw>
-                </a:effectLst>
-              </a14:hiddenEffects>
-            </a:ext>
-          </a:extLst>
-        </p:spPr>
-        <p:txBody>
-          <a:bodyPr/>
-          <a:lstStyle>
-            <a:lvl1pPr marL="269875" indent="-269875">
-              <a:spcBef>
-                <a:spcPct val="10000"/>
-              </a:spcBef>
-              <a:buFont typeface="Wingdings" panose="05000000000000000000" pitchFamily="2" charset="2"/>
-              <a:buChar char="n"/>
-              <a:defRPr kumimoji="1">
-                <a:solidFill>
-                  <a:schemeClr val="tx1"/>
-                </a:solidFill>
-                <a:latin typeface="MS UI Gothic" panose="020B0600070205080204" pitchFamily="50" charset="-128"/>
-                <a:ea typeface="MS UI Gothic" panose="020B0600070205080204" pitchFamily="50" charset="-128"/>
-              </a:defRPr>
-            </a:lvl1pPr>
-            <a:lvl2pPr marL="449263">
-              <a:spcBef>
-                <a:spcPct val="10000"/>
-              </a:spcBef>
-              <a:buFont typeface="Wingdings" panose="05000000000000000000" pitchFamily="2" charset="2"/>
-              <a:defRPr kumimoji="1">
-                <a:solidFill>
-                  <a:schemeClr val="tx1"/>
-                </a:solidFill>
-                <a:latin typeface="MS UI Gothic" panose="020B0600070205080204" pitchFamily="50" charset="-128"/>
-                <a:ea typeface="MS UI Gothic" panose="020B0600070205080204" pitchFamily="50" charset="-128"/>
-              </a:defRPr>
-            </a:lvl2pPr>
-            <a:lvl3pPr marL="893763">
-              <a:spcBef>
-                <a:spcPct val="10000"/>
-              </a:spcBef>
-              <a:defRPr kumimoji="1">
-                <a:solidFill>
-                  <a:schemeClr val="tx1"/>
-                </a:solidFill>
-                <a:latin typeface="MS UI Gothic" panose="020B0600070205080204" pitchFamily="50" charset="-128"/>
-                <a:ea typeface="MS UI Gothic" panose="020B0600070205080204" pitchFamily="50" charset="-128"/>
-              </a:defRPr>
-            </a:lvl3pPr>
-            <a:lvl4pPr marL="1339850">
-              <a:spcBef>
-                <a:spcPct val="10000"/>
-              </a:spcBef>
-              <a:buFont typeface="Wingdings" panose="05000000000000000000" pitchFamily="2" charset="2"/>
-              <a:defRPr kumimoji="1">
-                <a:solidFill>
-                  <a:schemeClr val="tx1"/>
-                </a:solidFill>
-                <a:latin typeface="MS UI Gothic" panose="020B0600070205080204" pitchFamily="50" charset="-128"/>
-                <a:ea typeface="MS UI Gothic" panose="020B0600070205080204" pitchFamily="50" charset="-128"/>
-              </a:defRPr>
-            </a:lvl4pPr>
-            <a:lvl5pPr marL="1747838">
-              <a:spcBef>
-                <a:spcPct val="10000"/>
-              </a:spcBef>
-              <a:defRPr kumimoji="1">
-                <a:solidFill>
-                  <a:schemeClr val="tx1"/>
-                </a:solidFill>
-                <a:latin typeface="MS UI Gothic" panose="020B0600070205080204" pitchFamily="50" charset="-128"/>
-                <a:ea typeface="MS UI Gothic" panose="020B0600070205080204" pitchFamily="50" charset="-128"/>
-              </a:defRPr>
-            </a:lvl5pPr>
-            <a:lvl6pPr marL="2205038" fontAlgn="base">
-              <a:spcBef>
-                <a:spcPct val="10000"/>
-              </a:spcBef>
-              <a:spcAft>
-                <a:spcPct val="0"/>
-              </a:spcAft>
-              <a:defRPr kumimoji="1">
-                <a:solidFill>
-                  <a:schemeClr val="tx1"/>
-                </a:solidFill>
-                <a:latin typeface="MS UI Gothic" panose="020B0600070205080204" pitchFamily="50" charset="-128"/>
-                <a:ea typeface="MS UI Gothic" panose="020B0600070205080204" pitchFamily="50" charset="-128"/>
-              </a:defRPr>
-            </a:lvl6pPr>
-            <a:lvl7pPr marL="2662238" fontAlgn="base">
-              <a:spcBef>
-                <a:spcPct val="10000"/>
-              </a:spcBef>
-              <a:spcAft>
-                <a:spcPct val="0"/>
-              </a:spcAft>
-              <a:defRPr kumimoji="1">
-                <a:solidFill>
-                  <a:schemeClr val="tx1"/>
-                </a:solidFill>
-                <a:latin typeface="MS UI Gothic" panose="020B0600070205080204" pitchFamily="50" charset="-128"/>
-                <a:ea typeface="MS UI Gothic" panose="020B0600070205080204" pitchFamily="50" charset="-128"/>
-              </a:defRPr>
-            </a:lvl7pPr>
-            <a:lvl8pPr marL="3119438" fontAlgn="base">
-              <a:spcBef>
-                <a:spcPct val="10000"/>
-              </a:spcBef>
-              <a:spcAft>
-                <a:spcPct val="0"/>
-              </a:spcAft>
-              <a:defRPr kumimoji="1">
-                <a:solidFill>
-                  <a:schemeClr val="tx1"/>
-                </a:solidFill>
-                <a:latin typeface="MS UI Gothic" panose="020B0600070205080204" pitchFamily="50" charset="-128"/>
-                <a:ea typeface="MS UI Gothic" panose="020B0600070205080204" pitchFamily="50" charset="-128"/>
-              </a:defRPr>
-            </a:lvl8pPr>
-            <a:lvl9pPr marL="3576638" fontAlgn="base">
-              <a:spcBef>
-                <a:spcPct val="10000"/>
-              </a:spcBef>
-              <a:spcAft>
-                <a:spcPct val="0"/>
-              </a:spcAft>
-              <a:defRPr kumimoji="1">
-                <a:solidFill>
-                  <a:schemeClr val="tx1"/>
-                </a:solidFill>
-                <a:latin typeface="MS UI Gothic" panose="020B0600070205080204" pitchFamily="50" charset="-128"/>
-                <a:ea typeface="MS UI Gothic" panose="020B0600070205080204" pitchFamily="50" charset="-128"/>
-              </a:defRPr>
-            </a:lvl9pPr>
-          </a:lstStyle>
-          <a:p>
-            <a:pPr>
-              <a:buFont typeface="Wingdings" panose="05000000000000000000" pitchFamily="2" charset="2"/>
-              <a:buNone/>
-            </a:pPr>
-            <a:r>
-              <a:rPr lang="en-US" altLang="ja-JP" sz="1700">
-                <a:latin typeface="Arial" panose="020B0604020202020204" pitchFamily="34" charset="0"/>
-              </a:rPr>
-              <a:t>Là việc giấu từ bên ngoài những thông tin chi tiết của đối tượng (cấu tạo và trạng thái bên trong) .</a:t>
-            </a:r>
-          </a:p>
-        </p:txBody>
-      </p:sp>
-      <p:sp>
-        <p:nvSpPr>
-          <p:cNvPr id="410637" name="AutoShape 13">
-            <a:extLst>
-              <a:ext uri="{FF2B5EF4-FFF2-40B4-BE49-F238E27FC236}">
-                <a16:creationId xmlns:a16="http://schemas.microsoft.com/office/drawing/2014/main" id="{AB145755-0227-7DDD-18A7-A5F0819C9C96}"/>
-              </a:ext>
-            </a:extLst>
-          </p:cNvPr>
-          <p:cNvSpPr>
-            <a:spLocks noChangeArrowheads="1"/>
-          </p:cNvSpPr>
-          <p:nvPr/>
-        </p:nvSpPr>
-        <p:spPr bwMode="auto">
-          <a:xfrm>
-            <a:off x="4864100" y="3079750"/>
-            <a:ext cx="4313238" cy="2476500"/>
-          </a:xfrm>
-          <a:prstGeom prst="wedgeRoundRectCallout">
-            <a:avLst>
-              <a:gd name="adj1" fmla="val -70870"/>
-              <a:gd name="adj2" fmla="val 3333"/>
-              <a:gd name="adj3" fmla="val 16667"/>
-            </a:avLst>
-          </a:prstGeom>
-          <a:solidFill>
-            <a:srgbClr val="CCFFFF"/>
-          </a:solidFill>
-          <a:ln w="12700">
-            <a:solidFill>
-              <a:schemeClr val="tx1"/>
-            </a:solidFill>
-            <a:miter lim="800000"/>
-            <a:headEnd/>
-            <a:tailEnd/>
-          </a:ln>
-          <a:effectLst/>
-          <a:extLst>
-            <a:ext uri="{AF507438-7753-43E0-B8FC-AC1667EBCBE1}">
-              <a14:hiddenEffects xmlns:a14="http://schemas.microsoft.com/office/drawing/2010/main">
-                <a:effectLst>
-                  <a:outerShdw dist="57238" dir="2021404" algn="ctr" rotWithShape="0">
-                    <a:srgbClr val="000000"/>
-                  </a:outerShdw>
-                </a:effectLst>
-              </a14:hiddenEffects>
-            </a:ext>
-          </a:extLst>
-        </p:spPr>
-        <p:txBody>
-          <a:bodyPr lIns="9525" tIns="19050" rIns="9525" bIns="18000" anchor="ctr"/>
-          <a:lstStyle/>
-          <a:p>
-            <a:r>
-              <a:rPr lang="en-US" altLang="ja-JP" sz="1600" b="0" dirty="0">
-                <a:latin typeface="+mj-lt"/>
-                <a:cs typeface="Times New Roman" panose="02020603050405020304" pitchFamily="18" charset="0"/>
-              </a:rPr>
-              <a:t>●</a:t>
-            </a:r>
-            <a:r>
-              <a:rPr lang="en-US" altLang="ja-JP" sz="1600" b="0" dirty="0" err="1">
-                <a:latin typeface="+mj-lt"/>
-                <a:cs typeface="Times New Roman" panose="02020603050405020304" pitchFamily="18" charset="0"/>
-              </a:rPr>
-              <a:t>Giấu</a:t>
-            </a:r>
-            <a:r>
-              <a:rPr lang="en-US" altLang="ja-JP" sz="1600" b="0" dirty="0">
-                <a:latin typeface="+mj-lt"/>
-                <a:cs typeface="Times New Roman" panose="02020603050405020304" pitchFamily="18" charset="0"/>
-              </a:rPr>
-              <a:t> </a:t>
-            </a:r>
-            <a:r>
-              <a:rPr lang="en-US" altLang="ja-JP" sz="1600" b="0" dirty="0" err="1">
-                <a:latin typeface="+mj-lt"/>
-                <a:cs typeface="Times New Roman" panose="02020603050405020304" pitchFamily="18" charset="0"/>
-              </a:rPr>
-              <a:t>thông</a:t>
-            </a:r>
-            <a:r>
-              <a:rPr lang="en-US" altLang="ja-JP" sz="1600" b="0" dirty="0">
-                <a:latin typeface="+mj-lt"/>
-                <a:cs typeface="Times New Roman" panose="02020603050405020304" pitchFamily="18" charset="0"/>
-              </a:rPr>
-              <a:t> tin </a:t>
-            </a:r>
-            <a:r>
-              <a:rPr lang="en-US" altLang="ja-JP" sz="1600" b="0" dirty="0" err="1">
-                <a:latin typeface="+mj-lt"/>
-                <a:cs typeface="Times New Roman" panose="02020603050405020304" pitchFamily="18" charset="0"/>
-              </a:rPr>
-              <a:t>và</a:t>
-            </a:r>
-            <a:r>
-              <a:rPr lang="en-US" altLang="ja-JP" sz="1600" b="0" dirty="0">
-                <a:latin typeface="+mj-lt"/>
-                <a:cs typeface="Times New Roman" panose="02020603050405020304" pitchFamily="18" charset="0"/>
-              </a:rPr>
-              <a:t> </a:t>
-            </a:r>
-            <a:r>
-              <a:rPr lang="en-US" altLang="ja-JP" sz="1600" b="0" dirty="0" err="1">
-                <a:latin typeface="+mj-lt"/>
-                <a:cs typeface="Times New Roman" panose="02020603050405020304" pitchFamily="18" charset="0"/>
-              </a:rPr>
-              <a:t>thao</a:t>
-            </a:r>
-            <a:r>
-              <a:rPr lang="en-US" altLang="ja-JP" sz="1600" b="0" dirty="0">
-                <a:latin typeface="+mj-lt"/>
-                <a:cs typeface="Times New Roman" panose="02020603050405020304" pitchFamily="18" charset="0"/>
-              </a:rPr>
-              <a:t> </a:t>
-            </a:r>
-            <a:r>
-              <a:rPr lang="en-US" altLang="ja-JP" sz="1600" b="0" dirty="0" err="1">
-                <a:latin typeface="+mj-lt"/>
-                <a:cs typeface="Times New Roman" panose="02020603050405020304" pitchFamily="18" charset="0"/>
-              </a:rPr>
-              <a:t>tác</a:t>
-            </a:r>
-            <a:r>
-              <a:rPr lang="en-US" altLang="ja-JP" sz="1600" b="0" dirty="0">
-                <a:latin typeface="+mj-lt"/>
-                <a:cs typeface="Times New Roman" panose="02020603050405020304" pitchFamily="18" charset="0"/>
-              </a:rPr>
-              <a:t>/</a:t>
-            </a:r>
-            <a:r>
-              <a:rPr lang="en-US" altLang="ja-JP" sz="1600" b="0" dirty="0" err="1">
-                <a:latin typeface="+mj-lt"/>
-                <a:cs typeface="Times New Roman" panose="02020603050405020304" pitchFamily="18" charset="0"/>
-              </a:rPr>
-              <a:t>thuộc</a:t>
-            </a:r>
-            <a:r>
-              <a:rPr lang="en-US" altLang="ja-JP" sz="1600" b="0" dirty="0">
-                <a:latin typeface="+mj-lt"/>
-                <a:cs typeface="Times New Roman" panose="02020603050405020304" pitchFamily="18" charset="0"/>
-              </a:rPr>
-              <a:t> </a:t>
-            </a:r>
-            <a:r>
-              <a:rPr lang="en-US" altLang="ja-JP" sz="1600" b="0" dirty="0" err="1">
-                <a:latin typeface="+mj-lt"/>
-                <a:cs typeface="Times New Roman" panose="02020603050405020304" pitchFamily="18" charset="0"/>
-              </a:rPr>
-              <a:t>tính</a:t>
-            </a:r>
-            <a:endParaRPr lang="en-US" altLang="ja-JP" sz="1600" b="0" dirty="0">
-              <a:latin typeface="+mj-lt"/>
-              <a:cs typeface="Times New Roman" panose="02020603050405020304" pitchFamily="18" charset="0"/>
-            </a:endParaRPr>
-          </a:p>
-          <a:p>
-            <a:endParaRPr lang="en-US" altLang="ja-JP" sz="1600" b="0" dirty="0">
-              <a:latin typeface="+mj-lt"/>
-              <a:cs typeface="Times New Roman" panose="02020603050405020304" pitchFamily="18" charset="0"/>
-            </a:endParaRPr>
-          </a:p>
-          <a:p>
-            <a:r>
-              <a:rPr lang="ja-JP" altLang="en-US" sz="1600" b="0" dirty="0">
-                <a:latin typeface="+mj-lt"/>
-                <a:cs typeface="Times New Roman" panose="02020603050405020304" pitchFamily="18" charset="0"/>
-              </a:rPr>
-              <a:t>・「</a:t>
-            </a:r>
-            <a:r>
-              <a:rPr lang="en-US" altLang="ja-JP" sz="1600" b="0" dirty="0" err="1">
-                <a:latin typeface="+mj-lt"/>
-                <a:cs typeface="Times New Roman" panose="02020603050405020304" pitchFamily="18" charset="0"/>
-              </a:rPr>
-              <a:t>Thuộc</a:t>
-            </a:r>
-            <a:r>
-              <a:rPr lang="en-US" altLang="ja-JP" sz="1600" b="0" dirty="0">
-                <a:latin typeface="+mj-lt"/>
-                <a:cs typeface="Times New Roman" panose="02020603050405020304" pitchFamily="18" charset="0"/>
-              </a:rPr>
-              <a:t> </a:t>
-            </a:r>
-            <a:r>
-              <a:rPr lang="en-US" altLang="ja-JP" sz="1600" b="0" dirty="0" err="1">
-                <a:latin typeface="+mj-lt"/>
-                <a:cs typeface="Times New Roman" panose="02020603050405020304" pitchFamily="18" charset="0"/>
-              </a:rPr>
-              <a:t>tính</a:t>
-            </a:r>
-            <a:r>
-              <a:rPr lang="ja-JP" altLang="en-US" sz="1600" b="0" dirty="0">
-                <a:latin typeface="+mj-lt"/>
-                <a:cs typeface="Times New Roman" panose="02020603050405020304" pitchFamily="18" charset="0"/>
-              </a:rPr>
-              <a:t>」：</a:t>
-            </a:r>
-            <a:r>
-              <a:rPr lang="en-US" altLang="ja-JP" sz="1600" b="0" dirty="0" err="1">
-                <a:latin typeface="+mj-lt"/>
-                <a:cs typeface="Times New Roman" panose="02020603050405020304" pitchFamily="18" charset="0"/>
-              </a:rPr>
-              <a:t>Không</a:t>
-            </a:r>
-            <a:r>
-              <a:rPr lang="en-US" altLang="ja-JP" sz="1600" b="0" dirty="0">
-                <a:latin typeface="+mj-lt"/>
-                <a:cs typeface="Times New Roman" panose="02020603050405020304" pitchFamily="18" charset="0"/>
-              </a:rPr>
-              <a:t> </a:t>
-            </a:r>
-            <a:r>
-              <a:rPr lang="en-US" altLang="ja-JP" sz="1600" b="0" dirty="0" err="1">
-                <a:latin typeface="+mj-lt"/>
-                <a:cs typeface="Times New Roman" panose="02020603050405020304" pitchFamily="18" charset="0"/>
-              </a:rPr>
-              <a:t>công</a:t>
-            </a:r>
-            <a:r>
-              <a:rPr lang="en-US" altLang="ja-JP" sz="1600" b="0" dirty="0">
-                <a:latin typeface="+mj-lt"/>
-                <a:cs typeface="Times New Roman" panose="02020603050405020304" pitchFamily="18" charset="0"/>
-              </a:rPr>
-              <a:t> </a:t>
-            </a:r>
-            <a:r>
-              <a:rPr lang="en-US" altLang="ja-JP" sz="1600" b="0" dirty="0" err="1">
-                <a:latin typeface="+mj-lt"/>
-                <a:cs typeface="Times New Roman" panose="02020603050405020304" pitchFamily="18" charset="0"/>
-              </a:rPr>
-              <a:t>khai</a:t>
-            </a:r>
-            <a:r>
-              <a:rPr lang="en-US" altLang="ja-JP" sz="1600" b="0" dirty="0">
-                <a:latin typeface="+mj-lt"/>
-                <a:cs typeface="Times New Roman" panose="02020603050405020304" pitchFamily="18" charset="0"/>
-              </a:rPr>
-              <a:t> </a:t>
-            </a:r>
-            <a:r>
-              <a:rPr lang="en-US" altLang="ja-JP" sz="1600" b="0" dirty="0" err="1">
-                <a:latin typeface="+mj-lt"/>
-                <a:cs typeface="Times New Roman" panose="02020603050405020304" pitchFamily="18" charset="0"/>
-              </a:rPr>
-              <a:t>ra</a:t>
-            </a:r>
-            <a:r>
-              <a:rPr lang="en-US" altLang="ja-JP" sz="1600" b="0" dirty="0">
-                <a:latin typeface="+mj-lt"/>
-                <a:cs typeface="Times New Roman" panose="02020603050405020304" pitchFamily="18" charset="0"/>
-              </a:rPr>
-              <a:t> </a:t>
-            </a:r>
-            <a:r>
-              <a:rPr lang="en-US" altLang="ja-JP" sz="1600" b="0" dirty="0" err="1">
-                <a:latin typeface="+mj-lt"/>
-                <a:cs typeface="Times New Roman" panose="02020603050405020304" pitchFamily="18" charset="0"/>
-              </a:rPr>
-              <a:t>ngoài</a:t>
-            </a:r>
-            <a:endParaRPr lang="en-US" altLang="ja-JP" sz="1600" b="0" dirty="0">
-              <a:latin typeface="+mj-lt"/>
-              <a:cs typeface="Times New Roman" panose="02020603050405020304" pitchFamily="18" charset="0"/>
-            </a:endParaRPr>
-          </a:p>
-          <a:p>
-            <a:r>
-              <a:rPr lang="ja-JP" altLang="en-US" sz="1600" b="0" dirty="0">
-                <a:latin typeface="+mj-lt"/>
-                <a:cs typeface="Times New Roman" panose="02020603050405020304" pitchFamily="18" charset="0"/>
-              </a:rPr>
-              <a:t>　（</a:t>
-            </a:r>
-            <a:r>
-              <a:rPr lang="en-US" altLang="ja-JP" sz="1600" b="0" dirty="0" err="1">
-                <a:latin typeface="+mj-lt"/>
-                <a:cs typeface="Times New Roman" panose="02020603050405020304" pitchFamily="18" charset="0"/>
-              </a:rPr>
-              <a:t>không</a:t>
-            </a:r>
-            <a:r>
-              <a:rPr lang="en-US" altLang="ja-JP" sz="1600" b="0" dirty="0">
-                <a:latin typeface="+mj-lt"/>
-                <a:cs typeface="Times New Roman" panose="02020603050405020304" pitchFamily="18" charset="0"/>
-              </a:rPr>
-              <a:t> </a:t>
-            </a:r>
-            <a:r>
-              <a:rPr lang="en-US" altLang="ja-JP" sz="1600" b="0" dirty="0" err="1">
-                <a:latin typeface="+mj-lt"/>
-                <a:cs typeface="Times New Roman" panose="02020603050405020304" pitchFamily="18" charset="0"/>
-              </a:rPr>
-              <a:t>thể</a:t>
-            </a:r>
-            <a:r>
-              <a:rPr lang="en-US" altLang="ja-JP" sz="1600" b="0" dirty="0">
-                <a:latin typeface="+mj-lt"/>
-                <a:cs typeface="Times New Roman" panose="02020603050405020304" pitchFamily="18" charset="0"/>
-              </a:rPr>
-              <a:t> </a:t>
-            </a:r>
-            <a:r>
-              <a:rPr lang="en-US" altLang="ja-JP" sz="1600" b="0" dirty="0" err="1">
-                <a:latin typeface="+mj-lt"/>
-                <a:cs typeface="Times New Roman" panose="02020603050405020304" pitchFamily="18" charset="0"/>
-              </a:rPr>
-              <a:t>sử</a:t>
-            </a:r>
-            <a:r>
-              <a:rPr lang="en-US" altLang="ja-JP" sz="1600" b="0" dirty="0">
-                <a:latin typeface="+mj-lt"/>
-                <a:cs typeface="Times New Roman" panose="02020603050405020304" pitchFamily="18" charset="0"/>
-              </a:rPr>
-              <a:t> </a:t>
-            </a:r>
-            <a:r>
-              <a:rPr lang="en-US" altLang="ja-JP" sz="1600" b="0" dirty="0" err="1">
-                <a:latin typeface="+mj-lt"/>
-                <a:cs typeface="Times New Roman" panose="02020603050405020304" pitchFamily="18" charset="0"/>
-              </a:rPr>
-              <a:t>dụng</a:t>
-            </a:r>
-            <a:r>
-              <a:rPr lang="en-US" altLang="ja-JP" sz="1600" b="0" dirty="0">
-                <a:latin typeface="+mj-lt"/>
-                <a:cs typeface="Times New Roman" panose="02020603050405020304" pitchFamily="18" charset="0"/>
-              </a:rPr>
-              <a:t> </a:t>
-            </a:r>
-            <a:r>
-              <a:rPr lang="en-US" altLang="ja-JP" sz="1600" b="0" dirty="0" err="1">
-                <a:latin typeface="+mj-lt"/>
-                <a:cs typeface="Times New Roman" panose="02020603050405020304" pitchFamily="18" charset="0"/>
-              </a:rPr>
-              <a:t>trực</a:t>
-            </a:r>
-            <a:r>
-              <a:rPr lang="en-US" altLang="ja-JP" sz="1600" b="0" dirty="0">
-                <a:latin typeface="+mj-lt"/>
-                <a:cs typeface="Times New Roman" panose="02020603050405020304" pitchFamily="18" charset="0"/>
-              </a:rPr>
-              <a:t> </a:t>
-            </a:r>
-            <a:r>
-              <a:rPr lang="en-US" altLang="ja-JP" sz="1600" b="0" dirty="0" err="1">
-                <a:latin typeface="+mj-lt"/>
-                <a:cs typeface="Times New Roman" panose="02020603050405020304" pitchFamily="18" charset="0"/>
-              </a:rPr>
-              <a:t>tiếp</a:t>
-            </a:r>
-            <a:r>
-              <a:rPr lang="en-US" altLang="ja-JP" sz="1600" b="0" dirty="0">
-                <a:latin typeface="+mj-lt"/>
-                <a:cs typeface="Times New Roman" panose="02020603050405020304" pitchFamily="18" charset="0"/>
-              </a:rPr>
-              <a:t> </a:t>
-            </a:r>
-            <a:r>
-              <a:rPr lang="en-US" altLang="ja-JP" sz="1600" b="0" dirty="0" err="1">
-                <a:latin typeface="+mj-lt"/>
-                <a:cs typeface="Times New Roman" panose="02020603050405020304" pitchFamily="18" charset="0"/>
-              </a:rPr>
-              <a:t>từ</a:t>
-            </a:r>
-            <a:r>
-              <a:rPr lang="en-US" altLang="ja-JP" sz="1600" b="0" dirty="0">
-                <a:latin typeface="+mj-lt"/>
-                <a:cs typeface="Times New Roman" panose="02020603050405020304" pitchFamily="18" charset="0"/>
-              </a:rPr>
-              <a:t> </a:t>
-            </a:r>
-            <a:r>
-              <a:rPr lang="en-US" altLang="ja-JP" sz="1600" b="0" dirty="0" err="1">
-                <a:latin typeface="+mj-lt"/>
-                <a:cs typeface="Times New Roman" panose="02020603050405020304" pitchFamily="18" charset="0"/>
-              </a:rPr>
-              <a:t>bên</a:t>
-            </a:r>
-            <a:r>
-              <a:rPr lang="en-US" altLang="ja-JP" sz="1600" b="0" dirty="0">
-                <a:latin typeface="+mj-lt"/>
-                <a:cs typeface="Times New Roman" panose="02020603050405020304" pitchFamily="18" charset="0"/>
-              </a:rPr>
-              <a:t> </a:t>
-            </a:r>
-            <a:r>
-              <a:rPr lang="en-US" altLang="ja-JP" sz="1600" b="0" dirty="0" err="1">
-                <a:latin typeface="+mj-lt"/>
-                <a:cs typeface="Times New Roman" panose="02020603050405020304" pitchFamily="18" charset="0"/>
-              </a:rPr>
-              <a:t>ngoài</a:t>
-            </a:r>
-            <a:r>
-              <a:rPr lang="ja-JP" altLang="en-US" sz="1600" b="0" dirty="0">
-                <a:latin typeface="+mj-lt"/>
-                <a:cs typeface="Times New Roman" panose="02020603050405020304" pitchFamily="18" charset="0"/>
-              </a:rPr>
-              <a:t>）</a:t>
-            </a:r>
-          </a:p>
-          <a:p>
-            <a:endParaRPr lang="ja-JP" altLang="en-US" sz="1600" b="0" dirty="0">
-              <a:latin typeface="+mj-lt"/>
-              <a:cs typeface="Times New Roman" panose="02020603050405020304" pitchFamily="18" charset="0"/>
-            </a:endParaRPr>
-          </a:p>
-          <a:p>
-            <a:r>
-              <a:rPr lang="ja-JP" altLang="en-US" sz="1600" b="0" dirty="0">
-                <a:latin typeface="+mj-lt"/>
-                <a:cs typeface="Times New Roman" panose="02020603050405020304" pitchFamily="18" charset="0"/>
-              </a:rPr>
-              <a:t>・「</a:t>
-            </a:r>
-            <a:r>
-              <a:rPr lang="en-US" altLang="ja-JP" sz="1600" b="0" dirty="0">
-                <a:latin typeface="+mj-lt"/>
-                <a:cs typeface="Times New Roman" panose="02020603050405020304" pitchFamily="18" charset="0"/>
-              </a:rPr>
-              <a:t>Thao </a:t>
-            </a:r>
-            <a:r>
-              <a:rPr lang="en-US" altLang="ja-JP" sz="1600" b="0" dirty="0" err="1">
-                <a:latin typeface="+mj-lt"/>
-                <a:cs typeface="Times New Roman" panose="02020603050405020304" pitchFamily="18" charset="0"/>
-              </a:rPr>
-              <a:t>tác</a:t>
-            </a:r>
-            <a:r>
-              <a:rPr lang="ja-JP" altLang="en-US" sz="1600" b="0" dirty="0">
-                <a:latin typeface="+mj-lt"/>
-                <a:cs typeface="Times New Roman" panose="02020603050405020304" pitchFamily="18" charset="0"/>
-              </a:rPr>
-              <a:t>」：</a:t>
-            </a:r>
-            <a:r>
-              <a:rPr lang="en-US" altLang="ja-JP" sz="1600" b="0" dirty="0">
-                <a:latin typeface="+mj-lt"/>
-                <a:cs typeface="Times New Roman" panose="02020603050405020304" pitchFamily="18" charset="0"/>
-              </a:rPr>
-              <a:t>Công </a:t>
-            </a:r>
-            <a:r>
-              <a:rPr lang="en-US" altLang="ja-JP" sz="1600" b="0" dirty="0" err="1">
-                <a:latin typeface="+mj-lt"/>
-                <a:cs typeface="Times New Roman" panose="02020603050405020304" pitchFamily="18" charset="0"/>
-              </a:rPr>
-              <a:t>khai</a:t>
-            </a:r>
-            <a:r>
-              <a:rPr lang="en-US" altLang="ja-JP" sz="1600" b="0" dirty="0">
-                <a:latin typeface="+mj-lt"/>
-                <a:cs typeface="Times New Roman" panose="02020603050405020304" pitchFamily="18" charset="0"/>
-              </a:rPr>
-              <a:t> </a:t>
-            </a:r>
-            <a:r>
-              <a:rPr lang="en-US" altLang="ja-JP" sz="1600" b="0" dirty="0" err="1">
-                <a:latin typeface="+mj-lt"/>
-                <a:cs typeface="Times New Roman" panose="02020603050405020304" pitchFamily="18" charset="0"/>
-              </a:rPr>
-              <a:t>ra</a:t>
-            </a:r>
-            <a:r>
-              <a:rPr lang="en-US" altLang="ja-JP" sz="1600" b="0" dirty="0">
-                <a:latin typeface="+mj-lt"/>
-                <a:cs typeface="Times New Roman" panose="02020603050405020304" pitchFamily="18" charset="0"/>
-              </a:rPr>
-              <a:t> </a:t>
-            </a:r>
-            <a:r>
-              <a:rPr lang="en-US" altLang="ja-JP" sz="1600" b="0" dirty="0" err="1">
-                <a:latin typeface="+mj-lt"/>
-                <a:cs typeface="Times New Roman" panose="02020603050405020304" pitchFamily="18" charset="0"/>
-              </a:rPr>
-              <a:t>bên</a:t>
-            </a:r>
-            <a:r>
-              <a:rPr lang="en-US" altLang="ja-JP" sz="1600" b="0" dirty="0">
-                <a:latin typeface="+mj-lt"/>
-                <a:cs typeface="Times New Roman" panose="02020603050405020304" pitchFamily="18" charset="0"/>
-              </a:rPr>
-              <a:t> </a:t>
-            </a:r>
-            <a:r>
-              <a:rPr lang="en-US" altLang="ja-JP" sz="1600" b="0" dirty="0" err="1">
-                <a:latin typeface="+mj-lt"/>
-                <a:cs typeface="Times New Roman" panose="02020603050405020304" pitchFamily="18" charset="0"/>
-              </a:rPr>
-              <a:t>ngoài</a:t>
-            </a:r>
-            <a:endParaRPr lang="en-US" altLang="ja-JP" sz="1600" b="0" dirty="0">
-              <a:latin typeface="+mj-lt"/>
-              <a:cs typeface="Times New Roman" panose="02020603050405020304" pitchFamily="18" charset="0"/>
-            </a:endParaRPr>
-          </a:p>
-          <a:p>
-            <a:r>
-              <a:rPr lang="ja-JP" altLang="en-US" sz="900" b="0" dirty="0">
-                <a:latin typeface="+mj-lt"/>
-                <a:cs typeface="Times New Roman" panose="02020603050405020304" pitchFamily="18" charset="0"/>
-              </a:rPr>
-              <a:t>　</a:t>
-            </a:r>
-            <a:r>
-              <a:rPr lang="ja-JP" altLang="en-US" sz="1600" b="0" dirty="0">
-                <a:latin typeface="+mj-lt"/>
-                <a:cs typeface="Times New Roman" panose="02020603050405020304" pitchFamily="18" charset="0"/>
-              </a:rPr>
-              <a:t>（</a:t>
-            </a:r>
-            <a:r>
-              <a:rPr lang="en-US" altLang="ja-JP" sz="1600" b="0" dirty="0" err="1">
-                <a:latin typeface="+mj-lt"/>
-                <a:cs typeface="Times New Roman" panose="02020603050405020304" pitchFamily="18" charset="0"/>
-              </a:rPr>
-              <a:t>Tạo</a:t>
-            </a:r>
-            <a:r>
-              <a:rPr lang="en-US" altLang="ja-JP" sz="1600" b="0" dirty="0">
-                <a:latin typeface="+mj-lt"/>
-                <a:cs typeface="Times New Roman" panose="02020603050405020304" pitchFamily="18" charset="0"/>
-              </a:rPr>
-              <a:t> </a:t>
-            </a:r>
-            <a:r>
-              <a:rPr lang="en-US" altLang="ja-JP" sz="1600" b="0" dirty="0" err="1">
-                <a:latin typeface="+mj-lt"/>
-                <a:cs typeface="Times New Roman" panose="02020603050405020304" pitchFamily="18" charset="0"/>
-              </a:rPr>
-              <a:t>các</a:t>
-            </a:r>
-            <a:r>
-              <a:rPr lang="en-US" altLang="ja-JP" sz="1600" b="0" dirty="0">
-                <a:latin typeface="+mj-lt"/>
-                <a:cs typeface="Times New Roman" panose="02020603050405020304" pitchFamily="18" charset="0"/>
-              </a:rPr>
-              <a:t> </a:t>
-            </a:r>
-            <a:r>
-              <a:rPr lang="en-US" altLang="ja-JP" sz="1600" b="0" dirty="0" err="1">
-                <a:latin typeface="+mj-lt"/>
-                <a:cs typeface="Times New Roman" panose="02020603050405020304" pitchFamily="18" charset="0"/>
-              </a:rPr>
-              <a:t>thao</a:t>
-            </a:r>
-            <a:r>
-              <a:rPr lang="en-US" altLang="ja-JP" sz="1600" b="0" dirty="0">
-                <a:latin typeface="+mj-lt"/>
-                <a:cs typeface="Times New Roman" panose="02020603050405020304" pitchFamily="18" charset="0"/>
-              </a:rPr>
-              <a:t> </a:t>
-            </a:r>
-            <a:r>
-              <a:rPr lang="en-US" altLang="ja-JP" sz="1600" b="0" dirty="0" err="1">
-                <a:latin typeface="+mj-lt"/>
-                <a:cs typeface="Times New Roman" panose="02020603050405020304" pitchFamily="18" charset="0"/>
-              </a:rPr>
-              <a:t>tác</a:t>
-            </a:r>
-            <a:r>
-              <a:rPr lang="en-US" altLang="ja-JP" sz="1600" b="0" dirty="0">
-                <a:latin typeface="+mj-lt"/>
-                <a:cs typeface="Times New Roman" panose="02020603050405020304" pitchFamily="18" charset="0"/>
-              </a:rPr>
-              <a:t> </a:t>
-            </a:r>
-            <a:r>
-              <a:rPr lang="en-US" altLang="ja-JP" sz="1600" b="0" dirty="0" err="1">
-                <a:latin typeface="+mj-lt"/>
-                <a:cs typeface="Times New Roman" panose="02020603050405020304" pitchFamily="18" charset="0"/>
-              </a:rPr>
-              <a:t>để</a:t>
-            </a:r>
-            <a:r>
-              <a:rPr lang="en-US" altLang="ja-JP" sz="1600" b="0" dirty="0">
-                <a:latin typeface="+mj-lt"/>
-                <a:cs typeface="Times New Roman" panose="02020603050405020304" pitchFamily="18" charset="0"/>
-              </a:rPr>
-              <a:t> get/set </a:t>
-            </a:r>
-            <a:r>
-              <a:rPr lang="en-US" altLang="ja-JP" sz="1600" b="0" dirty="0" err="1">
-                <a:latin typeface="+mj-lt"/>
-                <a:cs typeface="Times New Roman" panose="02020603050405020304" pitchFamily="18" charset="0"/>
-              </a:rPr>
-              <a:t>giá</a:t>
-            </a:r>
-            <a:r>
-              <a:rPr lang="en-US" altLang="ja-JP" sz="1600" b="0" dirty="0">
-                <a:latin typeface="+mj-lt"/>
-                <a:cs typeface="Times New Roman" panose="02020603050405020304" pitchFamily="18" charset="0"/>
-              </a:rPr>
-              <a:t> </a:t>
-            </a:r>
-            <a:r>
-              <a:rPr lang="en-US" altLang="ja-JP" sz="1600" b="0" dirty="0" err="1">
-                <a:latin typeface="+mj-lt"/>
-                <a:cs typeface="Times New Roman" panose="02020603050405020304" pitchFamily="18" charset="0"/>
-              </a:rPr>
-              <a:t>trị</a:t>
-            </a:r>
-            <a:r>
-              <a:rPr lang="en-US" altLang="ja-JP" sz="1600" b="0" dirty="0">
-                <a:latin typeface="+mj-lt"/>
-                <a:cs typeface="Times New Roman" panose="02020603050405020304" pitchFamily="18" charset="0"/>
-              </a:rPr>
-              <a:t> </a:t>
-            </a:r>
-            <a:r>
-              <a:rPr lang="en-US" altLang="ja-JP" sz="1600" b="0" dirty="0" err="1">
-                <a:latin typeface="+mj-lt"/>
-                <a:cs typeface="Times New Roman" panose="02020603050405020304" pitchFamily="18" charset="0"/>
-              </a:rPr>
-              <a:t>thuộc</a:t>
-            </a:r>
-            <a:r>
-              <a:rPr lang="en-US" altLang="ja-JP" sz="1600" b="0" dirty="0">
-                <a:latin typeface="+mj-lt"/>
-                <a:cs typeface="Times New Roman" panose="02020603050405020304" pitchFamily="18" charset="0"/>
-              </a:rPr>
-              <a:t> </a:t>
-            </a:r>
-            <a:r>
-              <a:rPr lang="en-US" altLang="ja-JP" sz="1600" b="0" dirty="0" err="1">
-                <a:latin typeface="+mj-lt"/>
-                <a:cs typeface="Times New Roman" panose="02020603050405020304" pitchFamily="18" charset="0"/>
-              </a:rPr>
-              <a:t>tính</a:t>
-            </a:r>
-            <a:r>
-              <a:rPr lang="en-US" altLang="ja-JP" sz="1600" b="0" dirty="0">
-                <a:latin typeface="+mj-lt"/>
-                <a:cs typeface="Times New Roman" panose="02020603050405020304" pitchFamily="18" charset="0"/>
-              </a:rPr>
-              <a:t>, </a:t>
-            </a:r>
-            <a:r>
-              <a:rPr lang="en-US" altLang="ja-JP" sz="1600" b="0" dirty="0" err="1">
-                <a:latin typeface="+mj-lt"/>
-                <a:cs typeface="Times New Roman" panose="02020603050405020304" pitchFamily="18" charset="0"/>
-              </a:rPr>
-              <a:t>công</a:t>
-            </a:r>
-            <a:r>
-              <a:rPr lang="en-US" altLang="ja-JP" sz="1600" b="0" dirty="0">
-                <a:latin typeface="+mj-lt"/>
-                <a:cs typeface="Times New Roman" panose="02020603050405020304" pitchFamily="18" charset="0"/>
-              </a:rPr>
-              <a:t> </a:t>
-            </a:r>
-            <a:r>
-              <a:rPr lang="en-US" altLang="ja-JP" sz="1600" b="0" dirty="0" err="1">
-                <a:latin typeface="+mj-lt"/>
-                <a:cs typeface="Times New Roman" panose="02020603050405020304" pitchFamily="18" charset="0"/>
-              </a:rPr>
-              <a:t>khai</a:t>
-            </a:r>
-            <a:r>
-              <a:rPr lang="en-US" altLang="ja-JP" sz="1600" b="0" dirty="0">
-                <a:latin typeface="+mj-lt"/>
-                <a:cs typeface="Times New Roman" panose="02020603050405020304" pitchFamily="18" charset="0"/>
-              </a:rPr>
-              <a:t> </a:t>
-            </a:r>
-            <a:r>
-              <a:rPr lang="en-US" altLang="ja-JP" sz="1600" b="0" dirty="0" err="1">
-                <a:latin typeface="+mj-lt"/>
-                <a:cs typeface="Times New Roman" panose="02020603050405020304" pitchFamily="18" charset="0"/>
-              </a:rPr>
-              <a:t>ra</a:t>
-            </a:r>
-            <a:r>
-              <a:rPr lang="en-US" altLang="ja-JP" sz="1600" b="0" dirty="0">
-                <a:latin typeface="+mj-lt"/>
-                <a:cs typeface="Times New Roman" panose="02020603050405020304" pitchFamily="18" charset="0"/>
-              </a:rPr>
-              <a:t> </a:t>
-            </a:r>
-            <a:r>
-              <a:rPr lang="en-US" altLang="ja-JP" sz="1600" b="0" dirty="0" err="1">
-                <a:latin typeface="+mj-lt"/>
-                <a:cs typeface="Times New Roman" panose="02020603050405020304" pitchFamily="18" charset="0"/>
-              </a:rPr>
-              <a:t>bên</a:t>
-            </a:r>
-            <a:r>
-              <a:rPr lang="en-US" altLang="ja-JP" sz="1600" b="0" dirty="0">
-                <a:latin typeface="+mj-lt"/>
-                <a:cs typeface="Times New Roman" panose="02020603050405020304" pitchFamily="18" charset="0"/>
-              </a:rPr>
-              <a:t> </a:t>
-            </a:r>
-            <a:r>
-              <a:rPr lang="en-US" altLang="ja-JP" sz="1600" b="0" dirty="0" err="1">
-                <a:latin typeface="+mj-lt"/>
-                <a:cs typeface="Times New Roman" panose="02020603050405020304" pitchFamily="18" charset="0"/>
-              </a:rPr>
-              <a:t>ngoài</a:t>
-            </a:r>
-            <a:r>
-              <a:rPr lang="en-US" altLang="ja-JP" sz="1600" b="0" dirty="0">
-                <a:latin typeface="+mj-lt"/>
-                <a:cs typeface="Times New Roman" panose="02020603050405020304" pitchFamily="18" charset="0"/>
-              </a:rPr>
-              <a:t> </a:t>
-            </a:r>
-            <a:r>
-              <a:rPr lang="en-US" altLang="ja-JP" sz="1600" b="0" dirty="0" err="1">
-                <a:latin typeface="+mj-lt"/>
-                <a:cs typeface="Times New Roman" panose="02020603050405020304" pitchFamily="18" charset="0"/>
-              </a:rPr>
-              <a:t>nếu</a:t>
-            </a:r>
-            <a:r>
-              <a:rPr lang="en-US" altLang="ja-JP" sz="1600" b="0" dirty="0">
-                <a:latin typeface="+mj-lt"/>
-                <a:cs typeface="Times New Roman" panose="02020603050405020304" pitchFamily="18" charset="0"/>
-              </a:rPr>
-              <a:t> </a:t>
-            </a:r>
-            <a:r>
-              <a:rPr lang="en-US" altLang="ja-JP" sz="1600" b="0" dirty="0" err="1">
-                <a:latin typeface="+mj-lt"/>
-                <a:cs typeface="Times New Roman" panose="02020603050405020304" pitchFamily="18" charset="0"/>
-              </a:rPr>
-              <a:t>cần</a:t>
-            </a:r>
-            <a:r>
-              <a:rPr lang="ja-JP" altLang="en-US" sz="1600" b="0" dirty="0">
-                <a:latin typeface="+mj-lt"/>
-                <a:cs typeface="Times New Roman" panose="02020603050405020304" pitchFamily="18" charset="0"/>
-              </a:rPr>
-              <a:t>）</a:t>
-            </a:r>
-          </a:p>
-        </p:txBody>
-      </p:sp>
-      <p:sp>
-        <p:nvSpPr>
-          <p:cNvPr id="410645" name="Rectangle 21">
-            <a:extLst>
-              <a:ext uri="{FF2B5EF4-FFF2-40B4-BE49-F238E27FC236}">
-                <a16:creationId xmlns:a16="http://schemas.microsoft.com/office/drawing/2014/main" id="{DC091EFD-C64A-C2AA-AFF6-520A3FFBB74A}"/>
-              </a:ext>
-            </a:extLst>
-          </p:cNvPr>
-          <p:cNvSpPr>
-            <a:spLocks noChangeArrowheads="1"/>
-          </p:cNvSpPr>
-          <p:nvPr/>
-        </p:nvSpPr>
-        <p:spPr bwMode="auto">
-          <a:xfrm>
-            <a:off x="1212850" y="2468563"/>
-            <a:ext cx="2246313" cy="400752"/>
+            <a:off x="228600" y="2209800"/>
+            <a:ext cx="9758941" cy="790852"/>
           </a:xfrm>
           <a:prstGeom prst="rect">
             <a:avLst/>
@@ -12194,7 +10814,7 @@
               </a14:hiddenFill>
             </a:ext>
             <a:ext uri="{91240B29-F687-4F45-9708-019B960494DF}">
-              <a14:hiddenLine xmlns:a14="http://schemas.microsoft.com/office/drawing/2010/main" w="9525">
+              <a14:hiddenLine xmlns:a14="http://schemas.microsoft.com/office/drawing/2010/main" w="25400">
                 <a:solidFill>
                   <a:schemeClr val="tx1"/>
                 </a:solidFill>
@@ -12215,574 +10835,210 @@
           </a:extLst>
         </p:spPr>
         <p:txBody>
-          <a:bodyPr lIns="92075" tIns="46038" rIns="92075" bIns="46038">
+          <a:bodyPr wrap="none" lIns="112643" tIns="56322" rIns="112643" bIns="56322">
             <a:spAutoFit/>
           </a:bodyPr>
-          <a:lstStyle/>
-          <a:p>
-            <a:pPr algn="ctr" eaLnBrk="0" hangingPunct="0"/>
-            <a:r>
-              <a:rPr lang="en-US" altLang="ja-JP" sz="2000" dirty="0">
-                <a:latin typeface="+mj-lt"/>
-              </a:rPr>
-              <a:t>【Class </a:t>
-            </a:r>
-            <a:r>
-              <a:rPr lang="en-US" altLang="ja-JP" sz="2000" dirty="0" err="1">
-                <a:latin typeface="+mj-lt"/>
-              </a:rPr>
-              <a:t>người</a:t>
-            </a:r>
-            <a:r>
-              <a:rPr lang="en-US" altLang="ja-JP" sz="2000" dirty="0">
-                <a:latin typeface="+mj-lt"/>
-              </a:rPr>
-              <a:t>】</a:t>
-            </a:r>
-          </a:p>
-        </p:txBody>
-      </p:sp>
-      <p:grpSp>
-        <p:nvGrpSpPr>
-          <p:cNvPr id="410646" name="Group 22">
-            <a:extLst>
-              <a:ext uri="{FF2B5EF4-FFF2-40B4-BE49-F238E27FC236}">
-                <a16:creationId xmlns:a16="http://schemas.microsoft.com/office/drawing/2014/main" id="{22135AD0-DF71-6E57-4F34-29A7B785E093}"/>
-              </a:ext>
-            </a:extLst>
-          </p:cNvPr>
-          <p:cNvGrpSpPr>
-            <a:grpSpLocks/>
-          </p:cNvGrpSpPr>
-          <p:nvPr/>
-        </p:nvGrpSpPr>
-        <p:grpSpPr bwMode="auto">
-          <a:xfrm>
-            <a:off x="838200" y="3130550"/>
-            <a:ext cx="2874963" cy="2409825"/>
-            <a:chOff x="640" y="4949"/>
-            <a:chExt cx="859" cy="879"/>
-          </a:xfrm>
-        </p:grpSpPr>
-        <p:sp>
-          <p:nvSpPr>
-            <p:cNvPr id="410647" name="Rectangle 23">
-              <a:extLst>
-                <a:ext uri="{FF2B5EF4-FFF2-40B4-BE49-F238E27FC236}">
-                  <a16:creationId xmlns:a16="http://schemas.microsoft.com/office/drawing/2014/main" id="{FD0B2AF3-D6D3-1535-AD11-B1F2DC774141}"/>
-                </a:ext>
-              </a:extLst>
-            </p:cNvPr>
-            <p:cNvSpPr>
-              <a:spLocks noChangeArrowheads="1"/>
-            </p:cNvSpPr>
-            <p:nvPr/>
-          </p:nvSpPr>
-          <p:spPr bwMode="auto">
-            <a:xfrm>
-              <a:off x="640" y="4949"/>
-              <a:ext cx="859" cy="164"/>
-            </a:xfrm>
-            <a:prstGeom prst="rect">
-              <a:avLst/>
-            </a:prstGeom>
-            <a:solidFill>
-              <a:srgbClr val="FFFFCC"/>
-            </a:solidFill>
-            <a:ln w="9525">
-              <a:solidFill>
-                <a:schemeClr val="tx1"/>
-              </a:solidFill>
-              <a:miter lim="800000"/>
-              <a:headEnd/>
-              <a:tailEnd/>
-            </a:ln>
-            <a:effectLst/>
-            <a:extLst>
-              <a:ext uri="{AF507438-7753-43E0-B8FC-AC1667EBCBE1}">
-                <a14:hiddenEffects xmlns:a14="http://schemas.microsoft.com/office/drawing/2010/main">
-                  <a:effectLst>
-                    <a:outerShdw dist="35921" dir="2700000" algn="ctr" rotWithShape="0">
-                      <a:schemeClr val="bg2"/>
-                    </a:outerShdw>
-                  </a:effectLst>
-                </a14:hiddenEffects>
-              </a:ext>
-            </a:extLst>
-          </p:spPr>
-          <p:txBody>
-            <a:bodyPr wrap="none" anchor="ctr"/>
-            <a:lstStyle/>
-            <a:p>
-              <a:pPr algn="ctr"/>
-              <a:r>
-                <a:rPr lang="en-US" altLang="ja-JP" sz="1800"/>
-                <a:t>Người</a:t>
-              </a:r>
-            </a:p>
-          </p:txBody>
-        </p:sp>
-        <p:sp>
-          <p:nvSpPr>
-            <p:cNvPr id="410648" name="Rectangle 24">
-              <a:extLst>
-                <a:ext uri="{FF2B5EF4-FFF2-40B4-BE49-F238E27FC236}">
-                  <a16:creationId xmlns:a16="http://schemas.microsoft.com/office/drawing/2014/main" id="{7AB04A0B-03D6-4A15-D1FE-BD3CFC9F22DC}"/>
-                </a:ext>
-              </a:extLst>
-            </p:cNvPr>
-            <p:cNvSpPr>
-              <a:spLocks noChangeArrowheads="1"/>
-            </p:cNvSpPr>
-            <p:nvPr/>
-          </p:nvSpPr>
-          <p:spPr bwMode="auto">
-            <a:xfrm>
-              <a:off x="640" y="5113"/>
-              <a:ext cx="859" cy="306"/>
-            </a:xfrm>
-            <a:prstGeom prst="rect">
-              <a:avLst/>
-            </a:prstGeom>
-            <a:solidFill>
-              <a:srgbClr val="FFFFCC"/>
-            </a:solidFill>
-            <a:ln w="9525">
-              <a:solidFill>
-                <a:schemeClr val="tx1"/>
-              </a:solidFill>
-              <a:miter lim="800000"/>
-              <a:headEnd/>
-              <a:tailEnd/>
-            </a:ln>
-            <a:effectLst/>
-            <a:extLst>
-              <a:ext uri="{AF507438-7753-43E0-B8FC-AC1667EBCBE1}">
-                <a14:hiddenEffects xmlns:a14="http://schemas.microsoft.com/office/drawing/2010/main">
-                  <a:effectLst>
-                    <a:outerShdw dist="35921" dir="2700000" algn="ctr" rotWithShape="0">
-                      <a:schemeClr val="bg2"/>
-                    </a:outerShdw>
-                  </a:effectLst>
-                </a14:hiddenEffects>
-              </a:ext>
-            </a:extLst>
-          </p:spPr>
-          <p:txBody>
-            <a:bodyPr wrap="none" anchor="ctr"/>
-            <a:lstStyle/>
-            <a:p>
-              <a:r>
-                <a:rPr lang="en-US" altLang="ja-JP" sz="1800" b="0" dirty="0" err="1">
-                  <a:latin typeface="+mj-lt"/>
-                </a:rPr>
-                <a:t>Tên</a:t>
-              </a:r>
-              <a:endParaRPr lang="en-US" altLang="ja-JP" sz="1800" b="0" dirty="0">
-                <a:latin typeface="+mj-lt"/>
-              </a:endParaRPr>
-            </a:p>
-            <a:p>
-              <a:r>
-                <a:rPr lang="en-US" altLang="ja-JP" sz="1800" b="0" dirty="0" err="1">
-                  <a:latin typeface="+mj-lt"/>
-                </a:rPr>
-                <a:t>Tuổi</a:t>
-              </a:r>
-              <a:endParaRPr lang="en-US" altLang="ja-JP" sz="1800" b="0" dirty="0">
-                <a:latin typeface="+mj-lt"/>
-              </a:endParaRPr>
-            </a:p>
-          </p:txBody>
-        </p:sp>
-        <p:sp>
-          <p:nvSpPr>
-            <p:cNvPr id="410649" name="Rectangle 25">
-              <a:extLst>
-                <a:ext uri="{FF2B5EF4-FFF2-40B4-BE49-F238E27FC236}">
-                  <a16:creationId xmlns:a16="http://schemas.microsoft.com/office/drawing/2014/main" id="{40ECCB98-4A16-DF4A-D8DC-713B7945B7A6}"/>
-                </a:ext>
-              </a:extLst>
-            </p:cNvPr>
-            <p:cNvSpPr>
-              <a:spLocks noChangeArrowheads="1"/>
-            </p:cNvSpPr>
-            <p:nvPr/>
-          </p:nvSpPr>
-          <p:spPr bwMode="auto">
-            <a:xfrm>
-              <a:off x="640" y="5421"/>
-              <a:ext cx="859" cy="407"/>
-            </a:xfrm>
-            <a:prstGeom prst="rect">
-              <a:avLst/>
-            </a:prstGeom>
-            <a:solidFill>
-              <a:srgbClr val="FFFFCC"/>
-            </a:solidFill>
-            <a:ln w="9525">
-              <a:solidFill>
-                <a:schemeClr val="tx1"/>
-              </a:solidFill>
-              <a:miter lim="800000"/>
-              <a:headEnd/>
-              <a:tailEnd/>
-            </a:ln>
-            <a:effectLst/>
-            <a:extLst>
-              <a:ext uri="{AF507438-7753-43E0-B8FC-AC1667EBCBE1}">
-                <a14:hiddenEffects xmlns:a14="http://schemas.microsoft.com/office/drawing/2010/main">
-                  <a:effectLst>
-                    <a:outerShdw dist="35921" dir="2700000" algn="ctr" rotWithShape="0">
-                      <a:schemeClr val="bg2"/>
-                    </a:outerShdw>
-                  </a:effectLst>
-                </a14:hiddenEffects>
-              </a:ext>
-            </a:extLst>
-          </p:spPr>
-          <p:txBody>
-            <a:bodyPr wrap="none" anchor="ctr"/>
-            <a:lstStyle/>
-            <a:p>
-              <a:r>
-                <a:rPr lang="en-US" altLang="ja-JP" sz="1800" b="0" dirty="0" err="1">
-                  <a:latin typeface="+mj-lt"/>
-                </a:rPr>
-                <a:t>Lấy</a:t>
-              </a:r>
-              <a:r>
-                <a:rPr lang="en-US" altLang="ja-JP" sz="1800" b="0" dirty="0">
-                  <a:latin typeface="+mj-lt"/>
-                </a:rPr>
-                <a:t> </a:t>
-              </a:r>
-              <a:r>
-                <a:rPr lang="en-US" altLang="ja-JP" sz="1800" b="0" dirty="0" err="1">
-                  <a:latin typeface="+mj-lt"/>
-                </a:rPr>
-                <a:t>tên</a:t>
-              </a:r>
-              <a:endParaRPr lang="en-US" altLang="ja-JP" sz="1800" b="0" dirty="0">
-                <a:latin typeface="+mj-lt"/>
-              </a:endParaRPr>
-            </a:p>
-            <a:p>
-              <a:r>
-                <a:rPr lang="en-US" altLang="ja-JP" sz="1800" b="0" dirty="0" err="1">
-                  <a:latin typeface="+mj-lt"/>
-                </a:rPr>
-                <a:t>Lấy</a:t>
-              </a:r>
-              <a:r>
-                <a:rPr lang="en-US" altLang="ja-JP" sz="1800" b="0" dirty="0">
-                  <a:latin typeface="+mj-lt"/>
-                </a:rPr>
-                <a:t> </a:t>
-              </a:r>
-              <a:r>
-                <a:rPr lang="en-US" altLang="ja-JP" sz="1800" b="0" dirty="0" err="1">
-                  <a:latin typeface="+mj-lt"/>
-                </a:rPr>
-                <a:t>tuổi</a:t>
-              </a:r>
-              <a:endParaRPr lang="en-US" altLang="ja-JP" sz="1800" b="0" dirty="0">
-                <a:latin typeface="+mj-lt"/>
-              </a:endParaRPr>
-            </a:p>
-            <a:p>
-              <a:r>
-                <a:rPr lang="en-US" altLang="ja-JP" sz="1800" b="0" dirty="0">
-                  <a:latin typeface="+mj-lt"/>
-                </a:rPr>
-                <a:t>Set </a:t>
-              </a:r>
-              <a:r>
-                <a:rPr lang="en-US" altLang="ja-JP" sz="1800" b="0" dirty="0" err="1">
-                  <a:latin typeface="+mj-lt"/>
-                </a:rPr>
-                <a:t>tuổi</a:t>
-              </a:r>
-              <a:endParaRPr lang="en-US" altLang="ja-JP" sz="1800" b="0" dirty="0">
-                <a:latin typeface="+mj-lt"/>
-              </a:endParaRPr>
-            </a:p>
-          </p:txBody>
-        </p:sp>
-      </p:grpSp>
-      <p:sp>
-        <p:nvSpPr>
-          <p:cNvPr id="410639" name="AutoShape 15">
-            <a:extLst>
-              <a:ext uri="{FF2B5EF4-FFF2-40B4-BE49-F238E27FC236}">
-                <a16:creationId xmlns:a16="http://schemas.microsoft.com/office/drawing/2014/main" id="{D7492F72-0FBA-1CB9-1490-EC8BCEBD847F}"/>
-              </a:ext>
-            </a:extLst>
-          </p:cNvPr>
-          <p:cNvSpPr>
-            <a:spLocks/>
-          </p:cNvSpPr>
-          <p:nvPr/>
-        </p:nvSpPr>
-        <p:spPr bwMode="auto">
-          <a:xfrm>
-            <a:off x="1579563" y="3789363"/>
-            <a:ext cx="76200" cy="455612"/>
-          </a:xfrm>
-          <a:prstGeom prst="rightBrace">
-            <a:avLst>
-              <a:gd name="adj1" fmla="val 49826"/>
-              <a:gd name="adj2" fmla="val 50000"/>
-            </a:avLst>
-          </a:prstGeom>
-          <a:solidFill>
-            <a:srgbClr val="FFFFCC">
-              <a:alpha val="50000"/>
-            </a:srgbClr>
-          </a:solidFill>
-          <a:ln w="19050">
-            <a:solidFill>
-              <a:srgbClr val="0033CC"/>
-            </a:solidFill>
-            <a:round/>
-            <a:headEnd/>
-            <a:tailEnd/>
-          </a:ln>
-          <a:effectLst/>
-          <a:extLst>
-            <a:ext uri="{AF507438-7753-43E0-B8FC-AC1667EBCBE1}">
-              <a14:hiddenEffects xmlns:a14="http://schemas.microsoft.com/office/drawing/2010/main">
-                <a:effectLst>
-                  <a:outerShdw dist="35921" dir="2700000" algn="ctr" rotWithShape="0">
-                    <a:schemeClr val="bg2"/>
-                  </a:outerShdw>
-                </a:effectLst>
-              </a14:hiddenEffects>
-            </a:ext>
-          </a:extLst>
-        </p:spPr>
-        <p:txBody>
-          <a:bodyPr wrap="none" anchor="ctr"/>
-          <a:lstStyle/>
-          <a:p>
-            <a:endParaRPr lang="ja-JP" altLang="en-US"/>
-          </a:p>
-        </p:txBody>
-      </p:sp>
-      <p:sp>
-        <p:nvSpPr>
-          <p:cNvPr id="410640" name="Text Box 16">
-            <a:extLst>
-              <a:ext uri="{FF2B5EF4-FFF2-40B4-BE49-F238E27FC236}">
-                <a16:creationId xmlns:a16="http://schemas.microsoft.com/office/drawing/2014/main" id="{2DC961E7-AE8E-9958-E2B9-1C322C3B2C9F}"/>
-              </a:ext>
-            </a:extLst>
-          </p:cNvPr>
-          <p:cNvSpPr txBox="1">
-            <a:spLocks noChangeArrowheads="1"/>
-          </p:cNvSpPr>
-          <p:nvPr/>
-        </p:nvSpPr>
-        <p:spPr bwMode="auto">
-          <a:xfrm>
-            <a:off x="1890713" y="3819525"/>
-            <a:ext cx="982662" cy="517525"/>
-          </a:xfrm>
-          <a:prstGeom prst="rect">
-            <a:avLst/>
-          </a:prstGeom>
-          <a:noFill/>
-          <a:ln>
-            <a:noFill/>
-          </a:ln>
-          <a:effectLst/>
-          <a:extLst>
-            <a:ext uri="{909E8E84-426E-40DD-AFC4-6F175D3DCCD1}">
-              <a14:hiddenFill xmlns:a14="http://schemas.microsoft.com/office/drawing/2010/main">
-                <a:solidFill>
-                  <a:srgbClr val="FFFFCC"/>
-                </a:solidFill>
-              </a14:hiddenFill>
-            </a:ext>
-            <a:ext uri="{91240B29-F687-4F45-9708-019B960494DF}">
-              <a14:hiddenLine xmlns:a14="http://schemas.microsoft.com/office/drawing/2010/main" w="9525">
+          <a:lstStyle>
+            <a:lvl1pPr defTabSz="1063625">
+              <a:defRPr kumimoji="1">
                 <a:solidFill>
                   <a:schemeClr val="tx1"/>
                 </a:solidFill>
-                <a:miter lim="800000"/>
-                <a:headEnd/>
-                <a:tailEnd/>
-              </a14:hiddenLine>
-            </a:ext>
-            <a:ext uri="{AF507438-7753-43E0-B8FC-AC1667EBCBE1}">
-              <a14:hiddenEffects xmlns:a14="http://schemas.microsoft.com/office/drawing/2010/main">
-                <a:effectLst>
-                  <a:outerShdw dist="35921" dir="2700000" algn="ctr" rotWithShape="0">
-                    <a:schemeClr val="bg2"/>
-                  </a:outerShdw>
-                </a:effectLst>
-              </a14:hiddenEffects>
-            </a:ext>
-          </a:extLst>
-        </p:spPr>
-        <p:txBody>
-          <a:bodyPr>
-            <a:spAutoFit/>
-          </a:bodyPr>
-          <a:lstStyle/>
-          <a:p>
-            <a:pPr>
-              <a:spcBef>
-                <a:spcPct val="50000"/>
-              </a:spcBef>
-            </a:pPr>
-            <a:r>
-              <a:rPr lang="en-US" altLang="ja-JP" sz="1400">
-                <a:solidFill>
-                  <a:srgbClr val="0033CC"/>
-                </a:solidFill>
-                <a:latin typeface="Times New Roman" panose="02020603050405020304" pitchFamily="18" charset="0"/>
-              </a:rPr>
-              <a:t>Không công khai</a:t>
-            </a:r>
-          </a:p>
-        </p:txBody>
-      </p:sp>
-      <p:sp>
-        <p:nvSpPr>
-          <p:cNvPr id="410641" name="AutoShape 17">
-            <a:extLst>
-              <a:ext uri="{FF2B5EF4-FFF2-40B4-BE49-F238E27FC236}">
-                <a16:creationId xmlns:a16="http://schemas.microsoft.com/office/drawing/2014/main" id="{FD245707-3DF3-7FB5-5758-B013B0FCC7F1}"/>
-              </a:ext>
-            </a:extLst>
-          </p:cNvPr>
-          <p:cNvSpPr>
-            <a:spLocks/>
-          </p:cNvSpPr>
-          <p:nvPr/>
-        </p:nvSpPr>
-        <p:spPr bwMode="auto">
-          <a:xfrm>
-            <a:off x="2601913" y="4576763"/>
-            <a:ext cx="76200" cy="862012"/>
-          </a:xfrm>
-          <a:prstGeom prst="rightBrace">
-            <a:avLst>
-              <a:gd name="adj1" fmla="val 94271"/>
-              <a:gd name="adj2" fmla="val 50000"/>
-            </a:avLst>
-          </a:prstGeom>
-          <a:solidFill>
-            <a:srgbClr val="FFFFCC">
-              <a:alpha val="50000"/>
-            </a:srgbClr>
-          </a:solidFill>
-          <a:ln w="19050">
-            <a:solidFill>
-              <a:srgbClr val="0033CC"/>
-            </a:solidFill>
-            <a:round/>
-            <a:headEnd/>
-            <a:tailEnd/>
-          </a:ln>
-          <a:effectLst/>
-          <a:extLst>
-            <a:ext uri="{AF507438-7753-43E0-B8FC-AC1667EBCBE1}">
-              <a14:hiddenEffects xmlns:a14="http://schemas.microsoft.com/office/drawing/2010/main">
-                <a:effectLst>
-                  <a:outerShdw dist="35921" dir="2700000" algn="ctr" rotWithShape="0">
-                    <a:schemeClr val="bg2"/>
-                  </a:outerShdw>
-                </a:effectLst>
-              </a14:hiddenEffects>
-            </a:ext>
-          </a:extLst>
-        </p:spPr>
-        <p:txBody>
-          <a:bodyPr wrap="none" anchor="ctr"/>
-          <a:lstStyle/>
-          <a:p>
-            <a:endParaRPr lang="ja-JP" altLang="en-US"/>
-          </a:p>
-        </p:txBody>
-      </p:sp>
-      <p:sp>
-        <p:nvSpPr>
-          <p:cNvPr id="410642" name="Text Box 18">
-            <a:extLst>
-              <a:ext uri="{FF2B5EF4-FFF2-40B4-BE49-F238E27FC236}">
-                <a16:creationId xmlns:a16="http://schemas.microsoft.com/office/drawing/2014/main" id="{A8CC1FF9-E3FF-DCCA-2A17-52AAE4C6DE3C}"/>
-              </a:ext>
-            </a:extLst>
-          </p:cNvPr>
-          <p:cNvSpPr txBox="1">
-            <a:spLocks noChangeArrowheads="1"/>
-          </p:cNvSpPr>
-          <p:nvPr/>
-        </p:nvSpPr>
-        <p:spPr bwMode="auto">
-          <a:xfrm>
-            <a:off x="2833688" y="4835525"/>
-            <a:ext cx="982662" cy="517525"/>
-          </a:xfrm>
-          <a:prstGeom prst="rect">
-            <a:avLst/>
-          </a:prstGeom>
-          <a:noFill/>
-          <a:ln>
-            <a:noFill/>
-          </a:ln>
-          <a:effectLst/>
-          <a:extLst>
-            <a:ext uri="{909E8E84-426E-40DD-AFC4-6F175D3DCCD1}">
-              <a14:hiddenFill xmlns:a14="http://schemas.microsoft.com/office/drawing/2010/main">
-                <a:solidFill>
-                  <a:srgbClr val="FFFFCC"/>
-                </a:solidFill>
-              </a14:hiddenFill>
-            </a:ext>
-            <a:ext uri="{91240B29-F687-4F45-9708-019B960494DF}">
-              <a14:hiddenLine xmlns:a14="http://schemas.microsoft.com/office/drawing/2010/main" w="9525">
+                <a:latin typeface="Arial" panose="020B0604020202020204" pitchFamily="34" charset="0"/>
+                <a:ea typeface="ＭＳ Ｐゴシック" panose="020B0600070205080204" pitchFamily="50" charset="-128"/>
+              </a:defRPr>
+            </a:lvl1pPr>
+            <a:lvl2pPr marL="563563" defTabSz="1063625">
+              <a:defRPr kumimoji="1">
                 <a:solidFill>
                   <a:schemeClr val="tx1"/>
                 </a:solidFill>
-                <a:miter lim="800000"/>
-                <a:headEnd/>
-                <a:tailEnd/>
-              </a14:hiddenLine>
-            </a:ext>
-            <a:ext uri="{AF507438-7753-43E0-B8FC-AC1667EBCBE1}">
-              <a14:hiddenEffects xmlns:a14="http://schemas.microsoft.com/office/drawing/2010/main">
-                <a:effectLst>
-                  <a:outerShdw dist="35921" dir="2700000" algn="ctr" rotWithShape="0">
-                    <a:schemeClr val="bg2"/>
-                  </a:outerShdw>
-                </a:effectLst>
-              </a14:hiddenEffects>
-            </a:ext>
-          </a:extLst>
-        </p:spPr>
-        <p:txBody>
-          <a:bodyPr>
-            <a:spAutoFit/>
-          </a:bodyPr>
-          <a:lstStyle/>
+                <a:latin typeface="Arial" panose="020B0604020202020204" pitchFamily="34" charset="0"/>
+                <a:ea typeface="ＭＳ Ｐゴシック" panose="020B0600070205080204" pitchFamily="50" charset="-128"/>
+              </a:defRPr>
+            </a:lvl2pPr>
+            <a:lvl3pPr marL="1125538" defTabSz="1063625">
+              <a:defRPr kumimoji="1">
+                <a:solidFill>
+                  <a:schemeClr val="tx1"/>
+                </a:solidFill>
+                <a:latin typeface="Arial" panose="020B0604020202020204" pitchFamily="34" charset="0"/>
+                <a:ea typeface="ＭＳ Ｐゴシック" panose="020B0600070205080204" pitchFamily="50" charset="-128"/>
+              </a:defRPr>
+            </a:lvl3pPr>
+            <a:lvl4pPr marL="1689100" defTabSz="1063625">
+              <a:defRPr kumimoji="1">
+                <a:solidFill>
+                  <a:schemeClr val="tx1"/>
+                </a:solidFill>
+                <a:latin typeface="Arial" panose="020B0604020202020204" pitchFamily="34" charset="0"/>
+                <a:ea typeface="ＭＳ Ｐゴシック" panose="020B0600070205080204" pitchFamily="50" charset="-128"/>
+              </a:defRPr>
+            </a:lvl4pPr>
+            <a:lvl5pPr marL="2254250" defTabSz="1063625">
+              <a:defRPr kumimoji="1">
+                <a:solidFill>
+                  <a:schemeClr val="tx1"/>
+                </a:solidFill>
+                <a:latin typeface="Arial" panose="020B0604020202020204" pitchFamily="34" charset="0"/>
+                <a:ea typeface="ＭＳ Ｐゴシック" panose="020B0600070205080204" pitchFamily="50" charset="-128"/>
+              </a:defRPr>
+            </a:lvl5pPr>
+            <a:lvl6pPr marL="2711450" defTabSz="1063625" fontAlgn="base">
+              <a:spcBef>
+                <a:spcPct val="0"/>
+              </a:spcBef>
+              <a:spcAft>
+                <a:spcPct val="0"/>
+              </a:spcAft>
+              <a:defRPr kumimoji="1">
+                <a:solidFill>
+                  <a:schemeClr val="tx1"/>
+                </a:solidFill>
+                <a:latin typeface="Arial" panose="020B0604020202020204" pitchFamily="34" charset="0"/>
+                <a:ea typeface="ＭＳ Ｐゴシック" panose="020B0600070205080204" pitchFamily="50" charset="-128"/>
+              </a:defRPr>
+            </a:lvl6pPr>
+            <a:lvl7pPr marL="3168650" defTabSz="1063625" fontAlgn="base">
+              <a:spcBef>
+                <a:spcPct val="0"/>
+              </a:spcBef>
+              <a:spcAft>
+                <a:spcPct val="0"/>
+              </a:spcAft>
+              <a:defRPr kumimoji="1">
+                <a:solidFill>
+                  <a:schemeClr val="tx1"/>
+                </a:solidFill>
+                <a:latin typeface="Arial" panose="020B0604020202020204" pitchFamily="34" charset="0"/>
+                <a:ea typeface="ＭＳ Ｐゴシック" panose="020B0600070205080204" pitchFamily="50" charset="-128"/>
+              </a:defRPr>
+            </a:lvl7pPr>
+            <a:lvl8pPr marL="3625850" defTabSz="1063625" fontAlgn="base">
+              <a:spcBef>
+                <a:spcPct val="0"/>
+              </a:spcBef>
+              <a:spcAft>
+                <a:spcPct val="0"/>
+              </a:spcAft>
+              <a:defRPr kumimoji="1">
+                <a:solidFill>
+                  <a:schemeClr val="tx1"/>
+                </a:solidFill>
+                <a:latin typeface="Arial" panose="020B0604020202020204" pitchFamily="34" charset="0"/>
+                <a:ea typeface="ＭＳ Ｐゴシック" panose="020B0600070205080204" pitchFamily="50" charset="-128"/>
+              </a:defRPr>
+            </a:lvl8pPr>
+            <a:lvl9pPr marL="4083050" defTabSz="1063625" fontAlgn="base">
+              <a:spcBef>
+                <a:spcPct val="0"/>
+              </a:spcBef>
+              <a:spcAft>
+                <a:spcPct val="0"/>
+              </a:spcAft>
+              <a:defRPr kumimoji="1">
+                <a:solidFill>
+                  <a:schemeClr val="tx1"/>
+                </a:solidFill>
+                <a:latin typeface="Arial" panose="020B0604020202020204" pitchFamily="34" charset="0"/>
+                <a:ea typeface="ＭＳ Ｐゴシック" panose="020B0600070205080204" pitchFamily="50" charset="-128"/>
+              </a:defRPr>
+            </a:lvl9pPr>
+          </a:lstStyle>
           <a:p>
-            <a:pPr>
-              <a:spcBef>
-                <a:spcPct val="50000"/>
-              </a:spcBef>
-            </a:pPr>
-            <a:r>
-              <a:rPr lang="en-US" altLang="ja-JP" sz="1400">
-                <a:solidFill>
-                  <a:srgbClr val="0033CC"/>
-                </a:solidFill>
-                <a:latin typeface="Times New Roman" panose="02020603050405020304" pitchFamily="18" charset="0"/>
-              </a:rPr>
-              <a:t>Không công khai</a:t>
-            </a:r>
+            <a:r>
+              <a:rPr lang="en-US" altLang="ja-JP" sz="4400" b="0" dirty="0" err="1">
+                <a:ea typeface="ヒラギノ明朝 Pro W6" pitchFamily="18" charset="-128"/>
+              </a:rPr>
+              <a:t>Kiến</a:t>
+            </a:r>
+            <a:r>
+              <a:rPr lang="en-US" altLang="ja-JP" sz="4400" b="0" dirty="0">
+                <a:ea typeface="ヒラギノ明朝 Pro W6" pitchFamily="18" charset="-128"/>
+              </a:rPr>
+              <a:t> </a:t>
+            </a:r>
+            <a:r>
+              <a:rPr lang="en-US" altLang="ja-JP" sz="4400" b="0" dirty="0" err="1">
+                <a:ea typeface="ヒラギノ明朝 Pro W6" pitchFamily="18" charset="-128"/>
+              </a:rPr>
+              <a:t>thức</a:t>
+            </a:r>
+            <a:r>
+              <a:rPr lang="en-US" altLang="ja-JP" sz="4400" b="0" dirty="0">
+                <a:ea typeface="ヒラギノ明朝 Pro W6" pitchFamily="18" charset="-128"/>
+              </a:rPr>
+              <a:t> </a:t>
+            </a:r>
+            <a:r>
+              <a:rPr lang="en-US" altLang="ja-JP" sz="4400" b="0" dirty="0" err="1">
+                <a:ea typeface="ヒラギノ明朝 Pro W6" pitchFamily="18" charset="-128"/>
+              </a:rPr>
+              <a:t>cơ</a:t>
+            </a:r>
+            <a:r>
+              <a:rPr lang="en-US" altLang="ja-JP" sz="4400" b="0" dirty="0">
+                <a:ea typeface="ヒラギノ明朝 Pro W6" pitchFamily="18" charset="-128"/>
+              </a:rPr>
+              <a:t> </a:t>
+            </a:r>
+            <a:r>
+              <a:rPr lang="en-US" altLang="ja-JP" sz="4400" b="0" dirty="0" err="1">
+                <a:ea typeface="ヒラギノ明朝 Pro W6" pitchFamily="18" charset="-128"/>
+              </a:rPr>
+              <a:t>bản</a:t>
+            </a:r>
+            <a:r>
+              <a:rPr lang="en-US" altLang="ja-JP" sz="4400" b="0" dirty="0">
+                <a:ea typeface="ヒラギノ明朝 Pro W6" pitchFamily="18" charset="-128"/>
+              </a:rPr>
+              <a:t> </a:t>
+            </a:r>
+            <a:r>
+              <a:rPr lang="en-US" altLang="ja-JP" sz="4400" b="0" dirty="0" err="1">
+                <a:ea typeface="ヒラギノ明朝 Pro W6" pitchFamily="18" charset="-128"/>
+              </a:rPr>
+              <a:t>vê</a:t>
+            </a:r>
+            <a:r>
+              <a:rPr lang="en-US" altLang="ja-JP" sz="4400" b="0" dirty="0">
+                <a:ea typeface="ヒラギノ明朝 Pro W6" pitchFamily="18" charset="-128"/>
+              </a:rPr>
+              <a:t>̀ </a:t>
+            </a:r>
+            <a:r>
+              <a:rPr lang="en-US" altLang="ja-JP" sz="4400" b="0" dirty="0" err="1">
+                <a:ea typeface="ヒラギノ明朝 Pro W6" pitchFamily="18" charset="-128"/>
+              </a:rPr>
+              <a:t>hướng</a:t>
+            </a:r>
+            <a:r>
+              <a:rPr lang="en-US" altLang="ja-JP" sz="4400" b="0" dirty="0">
+                <a:ea typeface="ヒラギノ明朝 Pro W6" pitchFamily="18" charset="-128"/>
+              </a:rPr>
+              <a:t> </a:t>
+            </a:r>
+            <a:r>
+              <a:rPr lang="en-US" altLang="ja-JP" sz="4400" b="0" dirty="0" err="1">
+                <a:ea typeface="ヒラギノ明朝 Pro W6" pitchFamily="18" charset="-128"/>
+              </a:rPr>
+              <a:t>đối</a:t>
+            </a:r>
+            <a:r>
+              <a:rPr lang="en-US" altLang="ja-JP" sz="4400" b="0" dirty="0">
+                <a:ea typeface="ヒラギノ明朝 Pro W6" pitchFamily="18" charset="-128"/>
+              </a:rPr>
+              <a:t> </a:t>
+            </a:r>
+            <a:r>
+              <a:rPr lang="en-US" altLang="ja-JP" sz="4400" b="0" dirty="0" err="1">
+                <a:ea typeface="ヒラギノ明朝 Pro W6" pitchFamily="18" charset="-128"/>
+              </a:rPr>
+              <a:t>tượng</a:t>
+            </a:r>
+            <a:endParaRPr lang="en-US" altLang="ja-JP" sz="4400" b="0" dirty="0">
+              <a:ea typeface="ヒラギノ明朝 Pro W6" pitchFamily="18" charset="-128"/>
+            </a:endParaRPr>
           </a:p>
         </p:txBody>
       </p:sp>
@@ -12794,7 +11050,7 @@
 </p:sld>
 </file>
 
-<file path=ppt/slides/slide11.xml><?xml version="1.0" encoding="utf-8"?>
+<file path=ppt/slides/slide10.xml><?xml version="1.0" encoding="utf-8"?>
 <p:sld xmlns:a="http://schemas.openxmlformats.org/drawingml/2006/main" xmlns:r="http://schemas.openxmlformats.org/officeDocument/2006/relationships" xmlns:p="http://schemas.openxmlformats.org/presentationml/2006/main">
   <p:cSld>
     <p:spTree>
@@ -12835,7 +11091,7 @@
             <a:fld id="{48F65225-CB2F-43E2-8D9D-D9878629FE5C}" type="slidenum">
               <a:rPr lang="en-US" altLang="ja-JP"/>
               <a:pPr/>
-              <a:t>11</a:t>
+              <a:t>10</a:t>
             </a:fld>
             <a:endParaRPr lang="en-US" altLang="ja-JP"/>
           </a:p>
@@ -16859,7 +15115,7 @@
 </p:sld>
 </file>
 
-<file path=ppt/slides/slide12.xml><?xml version="1.0" encoding="utf-8"?>
+<file path=ppt/slides/slide11.xml><?xml version="1.0" encoding="utf-8"?>
 <p:sld xmlns:a="http://schemas.openxmlformats.org/drawingml/2006/main" xmlns:r="http://schemas.openxmlformats.org/officeDocument/2006/relationships" xmlns:p="http://schemas.openxmlformats.org/presentationml/2006/main">
   <p:cSld>
     <p:spTree>
@@ -16900,7 +15156,7 @@
             <a:fld id="{55D4664C-9DAF-411C-98FE-2662F39AD6BA}" type="slidenum">
               <a:rPr lang="en-US" altLang="ja-JP"/>
               <a:pPr/>
-              <a:t>12</a:t>
+              <a:t>11</a:t>
             </a:fld>
             <a:endParaRPr lang="en-US" altLang="ja-JP"/>
           </a:p>
@@ -18298,7 +16554,7 @@
 </p:sld>
 </file>
 
-<file path=ppt/slides/slide13.xml><?xml version="1.0" encoding="utf-8"?>
+<file path=ppt/slides/slide12.xml><?xml version="1.0" encoding="utf-8"?>
 <p:sld xmlns:a="http://schemas.openxmlformats.org/drawingml/2006/main" xmlns:r="http://schemas.openxmlformats.org/officeDocument/2006/relationships" xmlns:p="http://schemas.openxmlformats.org/presentationml/2006/main">
   <p:cSld>
     <p:spTree>
@@ -18339,7 +16595,7 @@
             <a:fld id="{089145EC-50C3-4E08-AB02-FEF3297C12B0}" type="slidenum">
               <a:rPr lang="en-US" altLang="ja-JP"/>
               <a:pPr/>
-              <a:t>13</a:t>
+              <a:t>12</a:t>
             </a:fld>
             <a:endParaRPr lang="en-US" altLang="ja-JP"/>
           </a:p>
@@ -22744,7 +21000,7 @@
 </p:sld>
 </file>
 
-<file path=ppt/slides/slide14.xml><?xml version="1.0" encoding="utf-8"?>
+<file path=ppt/slides/slide13.xml><?xml version="1.0" encoding="utf-8"?>
 <p:sld xmlns:a="http://schemas.openxmlformats.org/drawingml/2006/main" xmlns:r="http://schemas.openxmlformats.org/officeDocument/2006/relationships" xmlns:p="http://schemas.openxmlformats.org/presentationml/2006/main">
   <p:cSld>
     <p:spTree>
@@ -22785,7 +21041,7 @@
             <a:fld id="{641909AA-A78C-4C02-8508-94519798ACA4}" type="slidenum">
               <a:rPr lang="en-US" altLang="ja-JP"/>
               <a:pPr/>
-              <a:t>14</a:t>
+              <a:t>13</a:t>
             </a:fld>
             <a:endParaRPr lang="en-US" altLang="ja-JP"/>
           </a:p>
@@ -24750,494 +23006,6 @@
       </p:grpSpPr>
       <p:sp>
         <p:nvSpPr>
-          <p:cNvPr id="2" name="Slide Number Placeholder 1">
-            <a:extLst>
-              <a:ext uri="{FF2B5EF4-FFF2-40B4-BE49-F238E27FC236}">
-                <a16:creationId xmlns:a16="http://schemas.microsoft.com/office/drawing/2014/main" id="{D4DDB92D-1849-2485-3BE9-2219BAA8C89C}"/>
-              </a:ext>
-            </a:extLst>
-          </p:cNvPr>
-          <p:cNvSpPr>
-            <a:spLocks noGrp="1"/>
-          </p:cNvSpPr>
-          <p:nvPr>
-            <p:ph type="sldNum" sz="quarter" idx="10"/>
-          </p:nvPr>
-        </p:nvSpPr>
-        <p:spPr bwMode="auto">
-          <a:xfrm>
-            <a:off x="7616825" y="6381750"/>
-            <a:ext cx="2133600" cy="476250"/>
-          </a:xfrm>
-          <a:prstGeom prst="rect">
-            <a:avLst/>
-          </a:prstGeom>
-          <a:noFill/>
-          <a:ln>
-            <a:noFill/>
-          </a:ln>
-          <a:effectLst/>
-          <a:extLst>
-            <a:ext uri="{909E8E84-426E-40DD-AFC4-6F175D3DCCD1}">
-              <a14:hiddenFill xmlns:a14="http://schemas.microsoft.com/office/drawing/2010/main">
-                <a:solidFill>
-                  <a:schemeClr val="accent1"/>
-                </a:solidFill>
-              </a14:hiddenFill>
-            </a:ext>
-            <a:ext uri="{91240B29-F687-4F45-9708-019B960494DF}">
-              <a14:hiddenLine xmlns:a14="http://schemas.microsoft.com/office/drawing/2010/main" w="9525">
-                <a:solidFill>
-                  <a:schemeClr val="tx1"/>
-                </a:solidFill>
-                <a:miter lim="800000"/>
-                <a:headEnd/>
-                <a:tailEnd/>
-              </a14:hiddenLine>
-            </a:ext>
-            <a:ext uri="{AF507438-7753-43E0-B8FC-AC1667EBCBE1}">
-              <a14:hiddenEffects xmlns:a14="http://schemas.microsoft.com/office/drawing/2010/main">
-                <a:effectLst>
-                  <a:outerShdw dist="35921" dir="2700000" algn="ctr" rotWithShape="0">
-                    <a:schemeClr val="bg2"/>
-                  </a:outerShdw>
-                </a:effectLst>
-              </a14:hiddenEffects>
-            </a:ext>
-          </a:extLst>
-        </p:spPr>
-        <p:txBody>
-          <a:bodyPr vert="horz" wrap="square" lIns="91440" tIns="45720" rIns="91440" bIns="45720" numCol="1" anchor="t" anchorCtr="0" compatLnSpc="1">
-            <a:prstTxWarp prst="textNoShape">
-              <a:avLst/>
-            </a:prstTxWarp>
-          </a:bodyPr>
-          <a:lstStyle>
-            <a:defPPr>
-              <a:defRPr lang="ja-JP"/>
-            </a:defPPr>
-            <a:lvl1pPr algn="r" rtl="0" fontAlgn="base">
-              <a:spcBef>
-                <a:spcPct val="0"/>
-              </a:spcBef>
-              <a:spcAft>
-                <a:spcPct val="0"/>
-              </a:spcAft>
-              <a:defRPr kumimoji="1" sz="1400" b="0" kern="1200">
-                <a:solidFill>
-                  <a:schemeClr val="tx1"/>
-                </a:solidFill>
-                <a:latin typeface="Arial" panose="020B0604020202020204" pitchFamily="34" charset="0"/>
-                <a:ea typeface="+mj-ea"/>
-                <a:cs typeface="+mn-cs"/>
-              </a:defRPr>
-            </a:lvl1pPr>
-            <a:lvl2pPr marL="457200" algn="l" rtl="0" fontAlgn="base">
-              <a:spcBef>
-                <a:spcPct val="0"/>
-              </a:spcBef>
-              <a:spcAft>
-                <a:spcPct val="0"/>
-              </a:spcAft>
-              <a:defRPr kumimoji="1" sz="1000" b="1" kern="1200">
-                <a:solidFill>
-                  <a:schemeClr val="tx1"/>
-                </a:solidFill>
-                <a:latin typeface="Arial" panose="020B0604020202020204" pitchFamily="34" charset="0"/>
-                <a:ea typeface="MS UI Gothic" panose="020B0600070205080204" pitchFamily="50" charset="-128"/>
-                <a:cs typeface="+mn-cs"/>
-              </a:defRPr>
-            </a:lvl2pPr>
-            <a:lvl3pPr marL="914400" algn="l" rtl="0" fontAlgn="base">
-              <a:spcBef>
-                <a:spcPct val="0"/>
-              </a:spcBef>
-              <a:spcAft>
-                <a:spcPct val="0"/>
-              </a:spcAft>
-              <a:defRPr kumimoji="1" sz="1000" b="1" kern="1200">
-                <a:solidFill>
-                  <a:schemeClr val="tx1"/>
-                </a:solidFill>
-                <a:latin typeface="Arial" panose="020B0604020202020204" pitchFamily="34" charset="0"/>
-                <a:ea typeface="MS UI Gothic" panose="020B0600070205080204" pitchFamily="50" charset="-128"/>
-                <a:cs typeface="+mn-cs"/>
-              </a:defRPr>
-            </a:lvl3pPr>
-            <a:lvl4pPr marL="1371600" algn="l" rtl="0" fontAlgn="base">
-              <a:spcBef>
-                <a:spcPct val="0"/>
-              </a:spcBef>
-              <a:spcAft>
-                <a:spcPct val="0"/>
-              </a:spcAft>
-              <a:defRPr kumimoji="1" sz="1000" b="1" kern="1200">
-                <a:solidFill>
-                  <a:schemeClr val="tx1"/>
-                </a:solidFill>
-                <a:latin typeface="Arial" panose="020B0604020202020204" pitchFamily="34" charset="0"/>
-                <a:ea typeface="MS UI Gothic" panose="020B0600070205080204" pitchFamily="50" charset="-128"/>
-                <a:cs typeface="+mn-cs"/>
-              </a:defRPr>
-            </a:lvl4pPr>
-            <a:lvl5pPr marL="1828800" algn="l" rtl="0" fontAlgn="base">
-              <a:spcBef>
-                <a:spcPct val="0"/>
-              </a:spcBef>
-              <a:spcAft>
-                <a:spcPct val="0"/>
-              </a:spcAft>
-              <a:defRPr kumimoji="1" sz="1000" b="1" kern="1200">
-                <a:solidFill>
-                  <a:schemeClr val="tx1"/>
-                </a:solidFill>
-                <a:latin typeface="Arial" panose="020B0604020202020204" pitchFamily="34" charset="0"/>
-                <a:ea typeface="MS UI Gothic" panose="020B0600070205080204" pitchFamily="50" charset="-128"/>
-                <a:cs typeface="+mn-cs"/>
-              </a:defRPr>
-            </a:lvl5pPr>
-            <a:lvl6pPr marL="2286000" algn="l" defTabSz="914400" rtl="0" eaLnBrk="1" latinLnBrk="0" hangingPunct="1">
-              <a:defRPr kumimoji="1" sz="1000" b="1" kern="1200">
-                <a:solidFill>
-                  <a:schemeClr val="tx1"/>
-                </a:solidFill>
-                <a:latin typeface="Arial" panose="020B0604020202020204" pitchFamily="34" charset="0"/>
-                <a:ea typeface="MS UI Gothic" panose="020B0600070205080204" pitchFamily="50" charset="-128"/>
-                <a:cs typeface="+mn-cs"/>
-              </a:defRPr>
-            </a:lvl6pPr>
-            <a:lvl7pPr marL="2743200" algn="l" defTabSz="914400" rtl="0" eaLnBrk="1" latinLnBrk="0" hangingPunct="1">
-              <a:defRPr kumimoji="1" sz="1000" b="1" kern="1200">
-                <a:solidFill>
-                  <a:schemeClr val="tx1"/>
-                </a:solidFill>
-                <a:latin typeface="Arial" panose="020B0604020202020204" pitchFamily="34" charset="0"/>
-                <a:ea typeface="MS UI Gothic" panose="020B0600070205080204" pitchFamily="50" charset="-128"/>
-                <a:cs typeface="+mn-cs"/>
-              </a:defRPr>
-            </a:lvl7pPr>
-            <a:lvl8pPr marL="3200400" algn="l" defTabSz="914400" rtl="0" eaLnBrk="1" latinLnBrk="0" hangingPunct="1">
-              <a:defRPr kumimoji="1" sz="1000" b="1" kern="1200">
-                <a:solidFill>
-                  <a:schemeClr val="tx1"/>
-                </a:solidFill>
-                <a:latin typeface="Arial" panose="020B0604020202020204" pitchFamily="34" charset="0"/>
-                <a:ea typeface="MS UI Gothic" panose="020B0600070205080204" pitchFamily="50" charset="-128"/>
-                <a:cs typeface="+mn-cs"/>
-              </a:defRPr>
-            </a:lvl8pPr>
-            <a:lvl9pPr marL="3657600" algn="l" defTabSz="914400" rtl="0" eaLnBrk="1" latinLnBrk="0" hangingPunct="1">
-              <a:defRPr kumimoji="1" sz="1000" b="1" kern="1200">
-                <a:solidFill>
-                  <a:schemeClr val="tx1"/>
-                </a:solidFill>
-                <a:latin typeface="Arial" panose="020B0604020202020204" pitchFamily="34" charset="0"/>
-                <a:ea typeface="MS UI Gothic" panose="020B0600070205080204" pitchFamily="50" charset="-128"/>
-                <a:cs typeface="+mn-cs"/>
-              </a:defRPr>
-            </a:lvl9pPr>
-          </a:lstStyle>
-          <a:p>
-            <a:fld id="{684E9161-E0E9-488C-B6B9-5BDC7F1BCDEC}" type="slidenum">
-              <a:rPr lang="en-US" altLang="ja-JP" smtClean="0"/>
-              <a:pPr/>
-              <a:t>2</a:t>
-            </a:fld>
-            <a:endParaRPr lang="en-US" altLang="ja-JP"/>
-          </a:p>
-        </p:txBody>
-      </p:sp>
-      <p:sp>
-        <p:nvSpPr>
-          <p:cNvPr id="256003" name="Text Box 3">
-            <a:extLst>
-              <a:ext uri="{FF2B5EF4-FFF2-40B4-BE49-F238E27FC236}">
-                <a16:creationId xmlns:a16="http://schemas.microsoft.com/office/drawing/2014/main" id="{CC2A8A9C-E656-031F-58F5-5F6CB8C6BE7E}"/>
-              </a:ext>
-            </a:extLst>
-          </p:cNvPr>
-          <p:cNvSpPr txBox="1">
-            <a:spLocks noChangeArrowheads="1"/>
-          </p:cNvSpPr>
-          <p:nvPr/>
-        </p:nvSpPr>
-        <p:spPr bwMode="auto">
-          <a:xfrm>
-            <a:off x="228600" y="2209800"/>
-            <a:ext cx="9758941" cy="790852"/>
-          </a:xfrm>
-          <a:prstGeom prst="rect">
-            <a:avLst/>
-          </a:prstGeom>
-          <a:noFill/>
-          <a:ln>
-            <a:noFill/>
-          </a:ln>
-          <a:effectLst/>
-          <a:extLst>
-            <a:ext uri="{909E8E84-426E-40DD-AFC4-6F175D3DCCD1}">
-              <a14:hiddenFill xmlns:a14="http://schemas.microsoft.com/office/drawing/2010/main">
-                <a:solidFill>
-                  <a:schemeClr val="accent1"/>
-                </a:solidFill>
-              </a14:hiddenFill>
-            </a:ext>
-            <a:ext uri="{91240B29-F687-4F45-9708-019B960494DF}">
-              <a14:hiddenLine xmlns:a14="http://schemas.microsoft.com/office/drawing/2010/main" w="25400">
-                <a:solidFill>
-                  <a:schemeClr val="tx1"/>
-                </a:solidFill>
-                <a:miter lim="800000"/>
-                <a:headEnd/>
-                <a:tailEnd/>
-              </a14:hiddenLine>
-            </a:ext>
-            <a:ext uri="{AF507438-7753-43E0-B8FC-AC1667EBCBE1}">
-              <a14:hiddenEffects xmlns:a14="http://schemas.microsoft.com/office/drawing/2010/main">
-                <a:effectLst>
-                  <a:outerShdw dist="35921" dir="2700000" algn="ctr" rotWithShape="0">
-                    <a:schemeClr val="bg2"/>
-                  </a:outerShdw>
-                </a:effectLst>
-              </a14:hiddenEffects>
-            </a:ext>
-          </a:extLst>
-        </p:spPr>
-        <p:txBody>
-          <a:bodyPr wrap="none" lIns="112643" tIns="56322" rIns="112643" bIns="56322">
-            <a:spAutoFit/>
-          </a:bodyPr>
-          <a:lstStyle>
-            <a:lvl1pPr defTabSz="1063625">
-              <a:defRPr kumimoji="1">
-                <a:solidFill>
-                  <a:schemeClr val="tx1"/>
-                </a:solidFill>
-                <a:latin typeface="Arial" panose="020B0604020202020204" pitchFamily="34" charset="0"/>
-                <a:ea typeface="ＭＳ Ｐゴシック" panose="020B0600070205080204" pitchFamily="50" charset="-128"/>
-              </a:defRPr>
-            </a:lvl1pPr>
-            <a:lvl2pPr marL="563563" defTabSz="1063625">
-              <a:defRPr kumimoji="1">
-                <a:solidFill>
-                  <a:schemeClr val="tx1"/>
-                </a:solidFill>
-                <a:latin typeface="Arial" panose="020B0604020202020204" pitchFamily="34" charset="0"/>
-                <a:ea typeface="ＭＳ Ｐゴシック" panose="020B0600070205080204" pitchFamily="50" charset="-128"/>
-              </a:defRPr>
-            </a:lvl2pPr>
-            <a:lvl3pPr marL="1125538" defTabSz="1063625">
-              <a:defRPr kumimoji="1">
-                <a:solidFill>
-                  <a:schemeClr val="tx1"/>
-                </a:solidFill>
-                <a:latin typeface="Arial" panose="020B0604020202020204" pitchFamily="34" charset="0"/>
-                <a:ea typeface="ＭＳ Ｐゴシック" panose="020B0600070205080204" pitchFamily="50" charset="-128"/>
-              </a:defRPr>
-            </a:lvl3pPr>
-            <a:lvl4pPr marL="1689100" defTabSz="1063625">
-              <a:defRPr kumimoji="1">
-                <a:solidFill>
-                  <a:schemeClr val="tx1"/>
-                </a:solidFill>
-                <a:latin typeface="Arial" panose="020B0604020202020204" pitchFamily="34" charset="0"/>
-                <a:ea typeface="ＭＳ Ｐゴシック" panose="020B0600070205080204" pitchFamily="50" charset="-128"/>
-              </a:defRPr>
-            </a:lvl4pPr>
-            <a:lvl5pPr marL="2254250" defTabSz="1063625">
-              <a:defRPr kumimoji="1">
-                <a:solidFill>
-                  <a:schemeClr val="tx1"/>
-                </a:solidFill>
-                <a:latin typeface="Arial" panose="020B0604020202020204" pitchFamily="34" charset="0"/>
-                <a:ea typeface="ＭＳ Ｐゴシック" panose="020B0600070205080204" pitchFamily="50" charset="-128"/>
-              </a:defRPr>
-            </a:lvl5pPr>
-            <a:lvl6pPr marL="2711450" defTabSz="1063625" fontAlgn="base">
-              <a:spcBef>
-                <a:spcPct val="0"/>
-              </a:spcBef>
-              <a:spcAft>
-                <a:spcPct val="0"/>
-              </a:spcAft>
-              <a:defRPr kumimoji="1">
-                <a:solidFill>
-                  <a:schemeClr val="tx1"/>
-                </a:solidFill>
-                <a:latin typeface="Arial" panose="020B0604020202020204" pitchFamily="34" charset="0"/>
-                <a:ea typeface="ＭＳ Ｐゴシック" panose="020B0600070205080204" pitchFamily="50" charset="-128"/>
-              </a:defRPr>
-            </a:lvl6pPr>
-            <a:lvl7pPr marL="3168650" defTabSz="1063625" fontAlgn="base">
-              <a:spcBef>
-                <a:spcPct val="0"/>
-              </a:spcBef>
-              <a:spcAft>
-                <a:spcPct val="0"/>
-              </a:spcAft>
-              <a:defRPr kumimoji="1">
-                <a:solidFill>
-                  <a:schemeClr val="tx1"/>
-                </a:solidFill>
-                <a:latin typeface="Arial" panose="020B0604020202020204" pitchFamily="34" charset="0"/>
-                <a:ea typeface="ＭＳ Ｐゴシック" panose="020B0600070205080204" pitchFamily="50" charset="-128"/>
-              </a:defRPr>
-            </a:lvl7pPr>
-            <a:lvl8pPr marL="3625850" defTabSz="1063625" fontAlgn="base">
-              <a:spcBef>
-                <a:spcPct val="0"/>
-              </a:spcBef>
-              <a:spcAft>
-                <a:spcPct val="0"/>
-              </a:spcAft>
-              <a:defRPr kumimoji="1">
-                <a:solidFill>
-                  <a:schemeClr val="tx1"/>
-                </a:solidFill>
-                <a:latin typeface="Arial" panose="020B0604020202020204" pitchFamily="34" charset="0"/>
-                <a:ea typeface="ＭＳ Ｐゴシック" panose="020B0600070205080204" pitchFamily="50" charset="-128"/>
-              </a:defRPr>
-            </a:lvl8pPr>
-            <a:lvl9pPr marL="4083050" defTabSz="1063625" fontAlgn="base">
-              <a:spcBef>
-                <a:spcPct val="0"/>
-              </a:spcBef>
-              <a:spcAft>
-                <a:spcPct val="0"/>
-              </a:spcAft>
-              <a:defRPr kumimoji="1">
-                <a:solidFill>
-                  <a:schemeClr val="tx1"/>
-                </a:solidFill>
-                <a:latin typeface="Arial" panose="020B0604020202020204" pitchFamily="34" charset="0"/>
-                <a:ea typeface="ＭＳ Ｐゴシック" panose="020B0600070205080204" pitchFamily="50" charset="-128"/>
-              </a:defRPr>
-            </a:lvl9pPr>
-          </a:lstStyle>
-          <a:p>
-            <a:r>
-              <a:rPr lang="en-US" altLang="ja-JP" sz="4400" b="0" dirty="0" err="1">
-                <a:ea typeface="ヒラギノ明朝 Pro W6" pitchFamily="18" charset="-128"/>
-              </a:rPr>
-              <a:t>Kiến</a:t>
-            </a:r>
-            <a:r>
-              <a:rPr lang="en-US" altLang="ja-JP" sz="4400" b="0" dirty="0">
-                <a:ea typeface="ヒラギノ明朝 Pro W6" pitchFamily="18" charset="-128"/>
-              </a:rPr>
-              <a:t> </a:t>
-            </a:r>
-            <a:r>
-              <a:rPr lang="en-US" altLang="ja-JP" sz="4400" b="0" dirty="0" err="1">
-                <a:ea typeface="ヒラギノ明朝 Pro W6" pitchFamily="18" charset="-128"/>
-              </a:rPr>
-              <a:t>thức</a:t>
-            </a:r>
-            <a:r>
-              <a:rPr lang="en-US" altLang="ja-JP" sz="4400" b="0" dirty="0">
-                <a:ea typeface="ヒラギノ明朝 Pro W6" pitchFamily="18" charset="-128"/>
-              </a:rPr>
-              <a:t> </a:t>
-            </a:r>
-            <a:r>
-              <a:rPr lang="en-US" altLang="ja-JP" sz="4400" b="0" dirty="0" err="1">
-                <a:ea typeface="ヒラギノ明朝 Pro W6" pitchFamily="18" charset="-128"/>
-              </a:rPr>
-              <a:t>cơ</a:t>
-            </a:r>
-            <a:r>
-              <a:rPr lang="en-US" altLang="ja-JP" sz="4400" b="0" dirty="0">
-                <a:ea typeface="ヒラギノ明朝 Pro W6" pitchFamily="18" charset="-128"/>
-              </a:rPr>
-              <a:t> </a:t>
-            </a:r>
-            <a:r>
-              <a:rPr lang="en-US" altLang="ja-JP" sz="4400" b="0" dirty="0" err="1">
-                <a:ea typeface="ヒラギノ明朝 Pro W6" pitchFamily="18" charset="-128"/>
-              </a:rPr>
-              <a:t>bản</a:t>
-            </a:r>
-            <a:r>
-              <a:rPr lang="en-US" altLang="ja-JP" sz="4400" b="0" dirty="0">
-                <a:ea typeface="ヒラギノ明朝 Pro W6" pitchFamily="18" charset="-128"/>
-              </a:rPr>
-              <a:t> </a:t>
-            </a:r>
-            <a:r>
-              <a:rPr lang="en-US" altLang="ja-JP" sz="4400" b="0" dirty="0" err="1">
-                <a:ea typeface="ヒラギノ明朝 Pro W6" pitchFamily="18" charset="-128"/>
-              </a:rPr>
-              <a:t>vê</a:t>
-            </a:r>
-            <a:r>
-              <a:rPr lang="en-US" altLang="ja-JP" sz="4400" b="0" dirty="0">
-                <a:ea typeface="ヒラギノ明朝 Pro W6" pitchFamily="18" charset="-128"/>
-              </a:rPr>
-              <a:t>̀ </a:t>
-            </a:r>
-            <a:r>
-              <a:rPr lang="en-US" altLang="ja-JP" sz="4400" b="0" dirty="0" err="1">
-                <a:ea typeface="ヒラギノ明朝 Pro W6" pitchFamily="18" charset="-128"/>
-              </a:rPr>
-              <a:t>hướng</a:t>
-            </a:r>
-            <a:r>
-              <a:rPr lang="en-US" altLang="ja-JP" sz="4400" b="0" dirty="0">
-                <a:ea typeface="ヒラギノ明朝 Pro W6" pitchFamily="18" charset="-128"/>
-              </a:rPr>
-              <a:t> </a:t>
-            </a:r>
-            <a:r>
-              <a:rPr lang="en-US" altLang="ja-JP" sz="4400" b="0" dirty="0" err="1">
-                <a:ea typeface="ヒラギノ明朝 Pro W6" pitchFamily="18" charset="-128"/>
-              </a:rPr>
-              <a:t>đối</a:t>
-            </a:r>
-            <a:r>
-              <a:rPr lang="en-US" altLang="ja-JP" sz="4400" b="0" dirty="0">
-                <a:ea typeface="ヒラギノ明朝 Pro W6" pitchFamily="18" charset="-128"/>
-              </a:rPr>
-              <a:t> </a:t>
-            </a:r>
-            <a:r>
-              <a:rPr lang="en-US" altLang="ja-JP" sz="4400" b="0" dirty="0" err="1">
-                <a:ea typeface="ヒラギノ明朝 Pro W6" pitchFamily="18" charset="-128"/>
-              </a:rPr>
-              <a:t>tượng</a:t>
-            </a:r>
-            <a:endParaRPr lang="en-US" altLang="ja-JP" sz="4400" b="0" dirty="0">
-              <a:ea typeface="ヒラギノ明朝 Pro W6" pitchFamily="18" charset="-128"/>
-            </a:endParaRPr>
-          </a:p>
-        </p:txBody>
-      </p:sp>
-    </p:spTree>
-  </p:cSld>
-  <p:clrMapOvr>
-    <a:masterClrMapping/>
-  </p:clrMapOvr>
-</p:sld>
-</file>
-
-<file path=ppt/slides/slide3.xml><?xml version="1.0" encoding="utf-8"?>
-<p:sld xmlns:a="http://schemas.openxmlformats.org/drawingml/2006/main" xmlns:r="http://schemas.openxmlformats.org/officeDocument/2006/relationships" xmlns:p="http://schemas.openxmlformats.org/presentationml/2006/main">
-  <p:cSld>
-    <p:spTree>
-      <p:nvGrpSpPr>
-        <p:cNvPr id="1" name=""/>
-        <p:cNvGrpSpPr/>
-        <p:nvPr/>
-      </p:nvGrpSpPr>
-      <p:grpSpPr>
-        <a:xfrm>
-          <a:off x="0" y="0"/>
-          <a:ext cx="0" cy="0"/>
-          <a:chOff x="0" y="0"/>
-          <a:chExt cx="0" cy="0"/>
-        </a:xfrm>
-      </p:grpSpPr>
-      <p:sp>
-        <p:nvSpPr>
           <p:cNvPr id="2" name="Slide Number Placeholder 4">
             <a:extLst>
               <a:ext uri="{FF2B5EF4-FFF2-40B4-BE49-F238E27FC236}">
@@ -25260,7 +23028,7 @@
             <a:fld id="{72D246DB-9C58-46D2-A468-4E071B91F820}" type="slidenum">
               <a:rPr lang="en-US" altLang="ja-JP"/>
               <a:pPr/>
-              <a:t>3</a:t>
+              <a:t>2</a:t>
             </a:fld>
             <a:endParaRPr lang="en-US" altLang="ja-JP"/>
           </a:p>
@@ -29107,7 +26875,7 @@
 </p:sld>
 </file>
 
-<file path=ppt/slides/slide4.xml><?xml version="1.0" encoding="utf-8"?>
+<file path=ppt/slides/slide3.xml><?xml version="1.0" encoding="utf-8"?>
 <p:sld xmlns:a="http://schemas.openxmlformats.org/drawingml/2006/main" xmlns:r="http://schemas.openxmlformats.org/officeDocument/2006/relationships" xmlns:p="http://schemas.openxmlformats.org/presentationml/2006/main">
   <p:cSld>
     <p:spTree>
@@ -29148,7 +26916,7 @@
             <a:fld id="{D44ED889-E7D9-4EAF-A04E-63DC708B93E7}" type="slidenum">
               <a:rPr lang="en-US" altLang="ja-JP"/>
               <a:pPr/>
-              <a:t>4</a:t>
+              <a:t>3</a:t>
             </a:fld>
             <a:endParaRPr lang="en-US" altLang="ja-JP"/>
           </a:p>
@@ -31046,7 +28814,7 @@
 </p:sld>
 </file>
 
-<file path=ppt/slides/slide5.xml><?xml version="1.0" encoding="utf-8"?>
+<file path=ppt/slides/slide4.xml><?xml version="1.0" encoding="utf-8"?>
 <p:sld xmlns:a="http://schemas.openxmlformats.org/drawingml/2006/main" xmlns:r="http://schemas.openxmlformats.org/officeDocument/2006/relationships" xmlns:p="http://schemas.openxmlformats.org/presentationml/2006/main">
   <p:cSld>
     <p:spTree>
@@ -31087,7 +28855,7 @@
             <a:fld id="{DA5D4009-5B34-419F-814C-CDBE4E9F79FC}" type="slidenum">
               <a:rPr lang="en-US" altLang="ja-JP"/>
               <a:pPr/>
-              <a:t>5</a:t>
+              <a:t>4</a:t>
             </a:fld>
             <a:endParaRPr lang="en-US" altLang="ja-JP"/>
           </a:p>
@@ -35087,7 +32855,7 @@
 </p:sld>
 </file>
 
-<file path=ppt/slides/slide6.xml><?xml version="1.0" encoding="utf-8"?>
+<file path=ppt/slides/slide5.xml><?xml version="1.0" encoding="utf-8"?>
 <p:sld xmlns:a="http://schemas.openxmlformats.org/drawingml/2006/main" xmlns:r="http://schemas.openxmlformats.org/officeDocument/2006/relationships" xmlns:p="http://schemas.openxmlformats.org/presentationml/2006/main">
   <p:cSld>
     <p:spTree>
@@ -35128,7 +32896,7 @@
             <a:fld id="{80183D93-745F-4E99-B0A4-C6C18211DC08}" type="slidenum">
               <a:rPr lang="en-US" altLang="ja-JP"/>
               <a:pPr/>
-              <a:t>6</a:t>
+              <a:t>5</a:t>
             </a:fld>
             <a:endParaRPr lang="en-US" altLang="ja-JP"/>
           </a:p>
@@ -39385,7 +37153,7 @@
 </p:sld>
 </file>
 
-<file path=ppt/slides/slide7.xml><?xml version="1.0" encoding="utf-8"?>
+<file path=ppt/slides/slide6.xml><?xml version="1.0" encoding="utf-8"?>
 <p:sld xmlns:a="http://schemas.openxmlformats.org/drawingml/2006/main" xmlns:r="http://schemas.openxmlformats.org/officeDocument/2006/relationships" xmlns:p="http://schemas.openxmlformats.org/presentationml/2006/main">
   <p:cSld>
     <p:spTree>
@@ -39426,7 +37194,7 @@
             <a:fld id="{4EFB44DC-9DCD-41C5-916E-4A863C3B042E}" type="slidenum">
               <a:rPr lang="en-US" altLang="ja-JP"/>
               <a:pPr/>
-              <a:t>7</a:t>
+              <a:t>6</a:t>
             </a:fld>
             <a:endParaRPr lang="en-US" altLang="ja-JP"/>
           </a:p>
@@ -43345,7 +41113,7 @@
 </p:sld>
 </file>
 
-<file path=ppt/slides/slide8.xml><?xml version="1.0" encoding="utf-8"?>
+<file path=ppt/slides/slide7.xml><?xml version="1.0" encoding="utf-8"?>
 <p:sld xmlns:a="http://schemas.openxmlformats.org/drawingml/2006/main" xmlns:r="http://schemas.openxmlformats.org/officeDocument/2006/relationships" xmlns:p="http://schemas.openxmlformats.org/presentationml/2006/main">
   <p:cSld>
     <p:spTree>
@@ -43386,7 +41154,7 @@
             <a:fld id="{ECF7413C-3B78-4259-99D4-B4DB04C5581A}" type="slidenum">
               <a:rPr lang="en-US" altLang="ja-JP"/>
               <a:pPr/>
-              <a:t>8</a:t>
+              <a:t>7</a:t>
             </a:fld>
             <a:endParaRPr lang="en-US" altLang="ja-JP"/>
           </a:p>
@@ -47864,7 +45632,7 @@
 </p:sld>
 </file>
 
-<file path=ppt/slides/slide9.xml><?xml version="1.0" encoding="utf-8"?>
+<file path=ppt/slides/slide8.xml><?xml version="1.0" encoding="utf-8"?>
 <p:sld xmlns:a="http://schemas.openxmlformats.org/drawingml/2006/main" xmlns:r="http://schemas.openxmlformats.org/officeDocument/2006/relationships" xmlns:p="http://schemas.openxmlformats.org/presentationml/2006/main">
   <p:cSld>
     <p:spTree>
@@ -47905,7 +45673,7 @@
             <a:fld id="{2E40CF28-65F4-4054-BCF4-F76E7FF2D291}" type="slidenum">
               <a:rPr lang="en-US" altLang="ja-JP"/>
               <a:pPr/>
-              <a:t>9</a:t>
+              <a:t>8</a:t>
             </a:fld>
             <a:endParaRPr lang="en-US" altLang="ja-JP"/>
           </a:p>
@@ -49504,6 +47272,2048 @@
           </p:txBody>
         </p:sp>
       </p:grpSp>
+    </p:spTree>
+  </p:cSld>
+  <p:clrMapOvr>
+    <a:masterClrMapping/>
+  </p:clrMapOvr>
+</p:sld>
+</file>
+
+<file path=ppt/slides/slide9.xml><?xml version="1.0" encoding="utf-8"?>
+<p:sld xmlns:a="http://schemas.openxmlformats.org/drawingml/2006/main" xmlns:r="http://schemas.openxmlformats.org/officeDocument/2006/relationships" xmlns:p="http://schemas.openxmlformats.org/presentationml/2006/main">
+  <p:cSld>
+    <p:spTree>
+      <p:nvGrpSpPr>
+        <p:cNvPr id="1" name=""/>
+        <p:cNvGrpSpPr/>
+        <p:nvPr/>
+      </p:nvGrpSpPr>
+      <p:grpSpPr>
+        <a:xfrm>
+          <a:off x="0" y="0"/>
+          <a:ext cx="0" cy="0"/>
+          <a:chOff x="0" y="0"/>
+          <a:chExt cx="0" cy="0"/>
+        </a:xfrm>
+      </p:grpSpPr>
+      <p:sp>
+        <p:nvSpPr>
+          <p:cNvPr id="2" name="Slide Number Placeholder 4">
+            <a:extLst>
+              <a:ext uri="{FF2B5EF4-FFF2-40B4-BE49-F238E27FC236}">
+                <a16:creationId xmlns:a16="http://schemas.microsoft.com/office/drawing/2014/main" id="{0AEDBFFC-2F70-EE7C-B23E-1CA4F60DDC77}"/>
+              </a:ext>
+            </a:extLst>
+          </p:cNvPr>
+          <p:cNvSpPr>
+            <a:spLocks noGrp="1"/>
+          </p:cNvSpPr>
+          <p:nvPr>
+            <p:ph type="sldNum" sz="quarter" idx="10"/>
+          </p:nvPr>
+        </p:nvSpPr>
+        <p:spPr/>
+        <p:txBody>
+          <a:bodyPr/>
+          <a:lstStyle/>
+          <a:p>
+            <a:fld id="{8AD9CD99-F4B0-478A-A37C-6C89EFA4C990}" type="slidenum">
+              <a:rPr lang="en-US" altLang="ja-JP"/>
+              <a:pPr/>
+              <a:t>9</a:t>
+            </a:fld>
+            <a:endParaRPr lang="en-US" altLang="ja-JP"/>
+          </a:p>
+        </p:txBody>
+      </p:sp>
+      <p:sp>
+        <p:nvSpPr>
+          <p:cNvPr id="410644" name="Rectangle 20">
+            <a:extLst>
+              <a:ext uri="{FF2B5EF4-FFF2-40B4-BE49-F238E27FC236}">
+                <a16:creationId xmlns:a16="http://schemas.microsoft.com/office/drawing/2014/main" id="{F4EB0D99-9C45-3D4C-679F-FF7D799872D6}"/>
+              </a:ext>
+            </a:extLst>
+          </p:cNvPr>
+          <p:cNvSpPr>
+            <a:spLocks noChangeArrowheads="1"/>
+          </p:cNvSpPr>
+          <p:nvPr/>
+        </p:nvSpPr>
+        <p:spPr bwMode="auto">
+          <a:xfrm>
+            <a:off x="344488" y="2127250"/>
+            <a:ext cx="9091612" cy="4130675"/>
+          </a:xfrm>
+          <a:prstGeom prst="rect">
+            <a:avLst/>
+          </a:prstGeom>
+          <a:solidFill>
+            <a:srgbClr val="DDDDDD">
+              <a:alpha val="25000"/>
+            </a:srgbClr>
+          </a:solidFill>
+          <a:ln w="9525" algn="ctr">
+            <a:solidFill>
+              <a:schemeClr val="tx1"/>
+            </a:solidFill>
+            <a:miter lim="800000"/>
+            <a:headEnd/>
+            <a:tailEnd/>
+          </a:ln>
+          <a:effectLst/>
+          <a:extLst>
+            <a:ext uri="{AF507438-7753-43E0-B8FC-AC1667EBCBE1}">
+              <a14:hiddenEffects xmlns:a14="http://schemas.microsoft.com/office/drawing/2010/main">
+                <a:effectLst>
+                  <a:outerShdw dist="35921" dir="2700000" algn="ctr" rotWithShape="0">
+                    <a:schemeClr val="bg2"/>
+                  </a:outerShdw>
+                </a:effectLst>
+              </a14:hiddenEffects>
+            </a:ext>
+          </a:extLst>
+        </p:spPr>
+        <p:txBody>
+          <a:bodyPr wrap="none" anchor="ctr"/>
+          <a:lstStyle/>
+          <a:p>
+            <a:endParaRPr lang="ja-JP" altLang="en-US"/>
+          </a:p>
+        </p:txBody>
+      </p:sp>
+      <p:sp>
+        <p:nvSpPr>
+          <p:cNvPr id="410626" name="Rectangle 2">
+            <a:extLst>
+              <a:ext uri="{FF2B5EF4-FFF2-40B4-BE49-F238E27FC236}">
+                <a16:creationId xmlns:a16="http://schemas.microsoft.com/office/drawing/2014/main" id="{30A45C1E-470F-3D27-7517-1FA3A36ED0FA}"/>
+              </a:ext>
+            </a:extLst>
+          </p:cNvPr>
+          <p:cNvSpPr>
+            <a:spLocks noGrp="1" noChangeArrowheads="1"/>
+          </p:cNvSpPr>
+          <p:nvPr>
+            <p:ph type="title"/>
+          </p:nvPr>
+        </p:nvSpPr>
+        <p:spPr>
+          <a:xfrm>
+            <a:off x="355600" y="284956"/>
+            <a:ext cx="9217025" cy="490537"/>
+          </a:xfrm>
+        </p:spPr>
+        <p:txBody>
+          <a:bodyPr>
+            <a:normAutofit fontScale="90000"/>
+          </a:bodyPr>
+          <a:lstStyle/>
+          <a:p>
+            <a:r>
+              <a:rPr lang="en-US" altLang="ja-JP" dirty="0" err="1">
+                <a:latin typeface="Arial" panose="020B0604020202020204" pitchFamily="34" charset="0"/>
+                <a:ea typeface="MS UI Gothic" panose="020B0600070205080204" pitchFamily="50" charset="-128"/>
+              </a:rPr>
+              <a:t>Đóng</a:t>
+            </a:r>
+            <a:r>
+              <a:rPr lang="en-US" altLang="ja-JP" dirty="0">
+                <a:latin typeface="Arial" panose="020B0604020202020204" pitchFamily="34" charset="0"/>
+                <a:ea typeface="MS UI Gothic" panose="020B0600070205080204" pitchFamily="50" charset="-128"/>
+              </a:rPr>
+              <a:t> </a:t>
+            </a:r>
+            <a:r>
+              <a:rPr lang="en-US" altLang="ja-JP" dirty="0" err="1">
+                <a:latin typeface="Arial" panose="020B0604020202020204" pitchFamily="34" charset="0"/>
+                <a:ea typeface="MS UI Gothic" panose="020B0600070205080204" pitchFamily="50" charset="-128"/>
+              </a:rPr>
+              <a:t>gói</a:t>
+            </a:r>
+            <a:r>
+              <a:rPr lang="en-US" altLang="ja-JP" dirty="0">
+                <a:latin typeface="Arial" panose="020B0604020202020204" pitchFamily="34" charset="0"/>
+                <a:ea typeface="MS UI Gothic" panose="020B0600070205080204" pitchFamily="50" charset="-128"/>
+              </a:rPr>
+              <a:t>, </a:t>
+            </a:r>
+            <a:r>
+              <a:rPr lang="en-US" altLang="ja-JP" dirty="0" err="1">
+                <a:latin typeface="Arial" panose="020B0604020202020204" pitchFamily="34" charset="0"/>
+                <a:ea typeface="MS UI Gothic" panose="020B0600070205080204" pitchFamily="50" charset="-128"/>
+              </a:rPr>
+              <a:t>giấu</a:t>
+            </a:r>
+            <a:r>
+              <a:rPr lang="en-US" altLang="ja-JP" dirty="0">
+                <a:latin typeface="Arial" panose="020B0604020202020204" pitchFamily="34" charset="0"/>
+                <a:ea typeface="MS UI Gothic" panose="020B0600070205080204" pitchFamily="50" charset="-128"/>
+              </a:rPr>
+              <a:t> </a:t>
+            </a:r>
+            <a:r>
+              <a:rPr lang="en-US" altLang="ja-JP" dirty="0" err="1">
+                <a:latin typeface="Arial" panose="020B0604020202020204" pitchFamily="34" charset="0"/>
+                <a:ea typeface="MS UI Gothic" panose="020B0600070205080204" pitchFamily="50" charset="-128"/>
+              </a:rPr>
+              <a:t>thông</a:t>
+            </a:r>
+            <a:r>
+              <a:rPr lang="en-US" altLang="ja-JP" dirty="0">
+                <a:latin typeface="Arial" panose="020B0604020202020204" pitchFamily="34" charset="0"/>
+                <a:ea typeface="MS UI Gothic" panose="020B0600070205080204" pitchFamily="50" charset="-128"/>
+              </a:rPr>
+              <a:t> tin, </a:t>
+            </a:r>
+            <a:r>
+              <a:rPr lang="en-US" altLang="ja-JP" dirty="0" err="1">
+                <a:latin typeface="Arial" panose="020B0604020202020204" pitchFamily="34" charset="0"/>
+                <a:ea typeface="MS UI Gothic" panose="020B0600070205080204" pitchFamily="50" charset="-128"/>
+              </a:rPr>
+              <a:t>gửi</a:t>
+            </a:r>
+            <a:r>
+              <a:rPr lang="en-US" altLang="ja-JP" dirty="0">
+                <a:latin typeface="Arial" panose="020B0604020202020204" pitchFamily="34" charset="0"/>
+                <a:ea typeface="MS UI Gothic" panose="020B0600070205080204" pitchFamily="50" charset="-128"/>
+              </a:rPr>
+              <a:t> message (2)</a:t>
+            </a:r>
+          </a:p>
+        </p:txBody>
+      </p:sp>
+      <p:sp>
+        <p:nvSpPr>
+          <p:cNvPr id="410627" name="Rectangle 3">
+            <a:extLst>
+              <a:ext uri="{FF2B5EF4-FFF2-40B4-BE49-F238E27FC236}">
+                <a16:creationId xmlns:a16="http://schemas.microsoft.com/office/drawing/2014/main" id="{808FBBA6-99D7-C691-1231-C9E234AEEE4F}"/>
+              </a:ext>
+            </a:extLst>
+          </p:cNvPr>
+          <p:cNvSpPr>
+            <a:spLocks noChangeArrowheads="1"/>
+          </p:cNvSpPr>
+          <p:nvPr/>
+        </p:nvSpPr>
+        <p:spPr bwMode="auto">
+          <a:xfrm>
+            <a:off x="-979488" y="2136775"/>
+            <a:ext cx="9906001" cy="0"/>
+          </a:xfrm>
+          <a:prstGeom prst="rect">
+            <a:avLst/>
+          </a:prstGeom>
+          <a:noFill/>
+          <a:ln>
+            <a:noFill/>
+          </a:ln>
+          <a:effectLst/>
+          <a:extLst>
+            <a:ext uri="{909E8E84-426E-40DD-AFC4-6F175D3DCCD1}">
+              <a14:hiddenFill xmlns:a14="http://schemas.microsoft.com/office/drawing/2010/main">
+                <a:solidFill>
+                  <a:srgbClr val="99CCFF">
+                    <a:alpha val="50000"/>
+                  </a:srgbClr>
+                </a:solidFill>
+              </a14:hiddenFill>
+            </a:ext>
+            <a:ext uri="{91240B29-F687-4F45-9708-019B960494DF}">
+              <a14:hiddenLine xmlns:a14="http://schemas.microsoft.com/office/drawing/2010/main" w="9525" algn="ctr">
+                <a:solidFill>
+                  <a:schemeClr val="tx1"/>
+                </a:solidFill>
+                <a:miter lim="800000"/>
+                <a:headEnd/>
+                <a:tailEnd/>
+              </a14:hiddenLine>
+            </a:ext>
+            <a:ext uri="{AF507438-7753-43E0-B8FC-AC1667EBCBE1}">
+              <a14:hiddenEffects xmlns:a14="http://schemas.microsoft.com/office/drawing/2010/main">
+                <a:effectLst>
+                  <a:outerShdw dist="35921" dir="2700000" algn="ctr" rotWithShape="0">
+                    <a:schemeClr val="bg2"/>
+                  </a:outerShdw>
+                </a:effectLst>
+              </a14:hiddenEffects>
+            </a:ext>
+          </a:extLst>
+        </p:spPr>
+        <p:txBody>
+          <a:bodyPr wrap="none" anchor="ctr">
+            <a:spAutoFit/>
+          </a:bodyPr>
+          <a:lstStyle/>
+          <a:p>
+            <a:endParaRPr lang="ja-JP" altLang="en-US"/>
+          </a:p>
+        </p:txBody>
+      </p:sp>
+      <p:sp>
+        <p:nvSpPr>
+          <p:cNvPr id="410630" name="Rectangle 6">
+            <a:extLst>
+              <a:ext uri="{FF2B5EF4-FFF2-40B4-BE49-F238E27FC236}">
+                <a16:creationId xmlns:a16="http://schemas.microsoft.com/office/drawing/2014/main" id="{DCE07477-D132-3181-70E6-3930FE3F7F9F}"/>
+              </a:ext>
+            </a:extLst>
+          </p:cNvPr>
+          <p:cNvSpPr>
+            <a:spLocks noChangeArrowheads="1"/>
+          </p:cNvSpPr>
+          <p:nvPr/>
+        </p:nvSpPr>
+        <p:spPr bwMode="auto">
+          <a:xfrm>
+            <a:off x="344488" y="717550"/>
+            <a:ext cx="8899525" cy="585788"/>
+          </a:xfrm>
+          <a:prstGeom prst="rect">
+            <a:avLst/>
+          </a:prstGeom>
+          <a:noFill/>
+          <a:ln>
+            <a:noFill/>
+          </a:ln>
+          <a:effectLst/>
+          <a:extLst>
+            <a:ext uri="{909E8E84-426E-40DD-AFC4-6F175D3DCCD1}">
+              <a14:hiddenFill xmlns:a14="http://schemas.microsoft.com/office/drawing/2010/main">
+                <a:solidFill>
+                  <a:schemeClr val="accent1"/>
+                </a:solidFill>
+              </a14:hiddenFill>
+            </a:ext>
+            <a:ext uri="{91240B29-F687-4F45-9708-019B960494DF}">
+              <a14:hiddenLine xmlns:a14="http://schemas.microsoft.com/office/drawing/2010/main" w="9525">
+                <a:solidFill>
+                  <a:schemeClr val="tx1"/>
+                </a:solidFill>
+                <a:miter lim="800000"/>
+                <a:headEnd/>
+                <a:tailEnd/>
+              </a14:hiddenLine>
+            </a:ext>
+            <a:ext uri="{AF507438-7753-43E0-B8FC-AC1667EBCBE1}">
+              <a14:hiddenEffects xmlns:a14="http://schemas.microsoft.com/office/drawing/2010/main">
+                <a:effectLst>
+                  <a:outerShdw dist="35921" dir="2700000" algn="ctr" rotWithShape="0">
+                    <a:schemeClr val="bg2"/>
+                  </a:outerShdw>
+                </a:effectLst>
+              </a14:hiddenEffects>
+            </a:ext>
+          </a:extLst>
+        </p:spPr>
+        <p:txBody>
+          <a:bodyPr/>
+          <a:lstStyle>
+            <a:lvl1pPr marL="269875" indent="-269875">
+              <a:spcBef>
+                <a:spcPct val="10000"/>
+              </a:spcBef>
+              <a:buFont typeface="Wingdings" panose="05000000000000000000" pitchFamily="2" charset="2"/>
+              <a:buChar char="n"/>
+              <a:defRPr kumimoji="1">
+                <a:solidFill>
+                  <a:schemeClr val="tx1"/>
+                </a:solidFill>
+                <a:latin typeface="MS UI Gothic" panose="020B0600070205080204" pitchFamily="50" charset="-128"/>
+                <a:ea typeface="MS UI Gothic" panose="020B0600070205080204" pitchFamily="50" charset="-128"/>
+              </a:defRPr>
+            </a:lvl1pPr>
+            <a:lvl2pPr marL="449263">
+              <a:spcBef>
+                <a:spcPct val="10000"/>
+              </a:spcBef>
+              <a:buFont typeface="Wingdings" panose="05000000000000000000" pitchFamily="2" charset="2"/>
+              <a:defRPr kumimoji="1">
+                <a:solidFill>
+                  <a:schemeClr val="tx1"/>
+                </a:solidFill>
+                <a:latin typeface="MS UI Gothic" panose="020B0600070205080204" pitchFamily="50" charset="-128"/>
+                <a:ea typeface="MS UI Gothic" panose="020B0600070205080204" pitchFamily="50" charset="-128"/>
+              </a:defRPr>
+            </a:lvl2pPr>
+            <a:lvl3pPr marL="893763">
+              <a:spcBef>
+                <a:spcPct val="10000"/>
+              </a:spcBef>
+              <a:defRPr kumimoji="1">
+                <a:solidFill>
+                  <a:schemeClr val="tx1"/>
+                </a:solidFill>
+                <a:latin typeface="MS UI Gothic" panose="020B0600070205080204" pitchFamily="50" charset="-128"/>
+                <a:ea typeface="MS UI Gothic" panose="020B0600070205080204" pitchFamily="50" charset="-128"/>
+              </a:defRPr>
+            </a:lvl3pPr>
+            <a:lvl4pPr marL="1339850">
+              <a:spcBef>
+                <a:spcPct val="10000"/>
+              </a:spcBef>
+              <a:buFont typeface="Wingdings" panose="05000000000000000000" pitchFamily="2" charset="2"/>
+              <a:defRPr kumimoji="1">
+                <a:solidFill>
+                  <a:schemeClr val="tx1"/>
+                </a:solidFill>
+                <a:latin typeface="MS UI Gothic" panose="020B0600070205080204" pitchFamily="50" charset="-128"/>
+                <a:ea typeface="MS UI Gothic" panose="020B0600070205080204" pitchFamily="50" charset="-128"/>
+              </a:defRPr>
+            </a:lvl4pPr>
+            <a:lvl5pPr marL="1747838">
+              <a:spcBef>
+                <a:spcPct val="10000"/>
+              </a:spcBef>
+              <a:defRPr kumimoji="1">
+                <a:solidFill>
+                  <a:schemeClr val="tx1"/>
+                </a:solidFill>
+                <a:latin typeface="MS UI Gothic" panose="020B0600070205080204" pitchFamily="50" charset="-128"/>
+                <a:ea typeface="MS UI Gothic" panose="020B0600070205080204" pitchFamily="50" charset="-128"/>
+              </a:defRPr>
+            </a:lvl5pPr>
+            <a:lvl6pPr marL="2205038" fontAlgn="base">
+              <a:spcBef>
+                <a:spcPct val="10000"/>
+              </a:spcBef>
+              <a:spcAft>
+                <a:spcPct val="0"/>
+              </a:spcAft>
+              <a:defRPr kumimoji="1">
+                <a:solidFill>
+                  <a:schemeClr val="tx1"/>
+                </a:solidFill>
+                <a:latin typeface="MS UI Gothic" panose="020B0600070205080204" pitchFamily="50" charset="-128"/>
+                <a:ea typeface="MS UI Gothic" panose="020B0600070205080204" pitchFamily="50" charset="-128"/>
+              </a:defRPr>
+            </a:lvl6pPr>
+            <a:lvl7pPr marL="2662238" fontAlgn="base">
+              <a:spcBef>
+                <a:spcPct val="10000"/>
+              </a:spcBef>
+              <a:spcAft>
+                <a:spcPct val="0"/>
+              </a:spcAft>
+              <a:defRPr kumimoji="1">
+                <a:solidFill>
+                  <a:schemeClr val="tx1"/>
+                </a:solidFill>
+                <a:latin typeface="MS UI Gothic" panose="020B0600070205080204" pitchFamily="50" charset="-128"/>
+                <a:ea typeface="MS UI Gothic" panose="020B0600070205080204" pitchFamily="50" charset="-128"/>
+              </a:defRPr>
+            </a:lvl7pPr>
+            <a:lvl8pPr marL="3119438" fontAlgn="base">
+              <a:spcBef>
+                <a:spcPct val="10000"/>
+              </a:spcBef>
+              <a:spcAft>
+                <a:spcPct val="0"/>
+              </a:spcAft>
+              <a:defRPr kumimoji="1">
+                <a:solidFill>
+                  <a:schemeClr val="tx1"/>
+                </a:solidFill>
+                <a:latin typeface="MS UI Gothic" panose="020B0600070205080204" pitchFamily="50" charset="-128"/>
+                <a:ea typeface="MS UI Gothic" panose="020B0600070205080204" pitchFamily="50" charset="-128"/>
+              </a:defRPr>
+            </a:lvl8pPr>
+            <a:lvl9pPr marL="3576638" fontAlgn="base">
+              <a:spcBef>
+                <a:spcPct val="10000"/>
+              </a:spcBef>
+              <a:spcAft>
+                <a:spcPct val="0"/>
+              </a:spcAft>
+              <a:defRPr kumimoji="1">
+                <a:solidFill>
+                  <a:schemeClr val="tx1"/>
+                </a:solidFill>
+                <a:latin typeface="MS UI Gothic" panose="020B0600070205080204" pitchFamily="50" charset="-128"/>
+                <a:ea typeface="MS UI Gothic" panose="020B0600070205080204" pitchFamily="50" charset="-128"/>
+              </a:defRPr>
+            </a:lvl9pPr>
+          </a:lstStyle>
+          <a:p>
+            <a:r>
+              <a:rPr lang="en-US" altLang="ja-JP" sz="2400" b="0">
+                <a:latin typeface="Arial" panose="020B0604020202020204" pitchFamily="34" charset="0"/>
+              </a:rPr>
+              <a:t>Giấu thông tin</a:t>
+            </a:r>
+          </a:p>
+          <a:p>
+            <a:pPr lvl="1"/>
+            <a:endParaRPr lang="en-US" altLang="ja-JP" sz="2400" b="0">
+              <a:latin typeface="Arial" panose="020B0604020202020204" pitchFamily="34" charset="0"/>
+            </a:endParaRPr>
+          </a:p>
+          <a:p>
+            <a:pPr lvl="1"/>
+            <a:endParaRPr lang="en-US" altLang="ja-JP" sz="2400" b="0">
+              <a:latin typeface="Arial" panose="020B0604020202020204" pitchFamily="34" charset="0"/>
+            </a:endParaRPr>
+          </a:p>
+        </p:txBody>
+      </p:sp>
+      <p:sp>
+        <p:nvSpPr>
+          <p:cNvPr id="410631" name="Rectangle 7">
+            <a:extLst>
+              <a:ext uri="{FF2B5EF4-FFF2-40B4-BE49-F238E27FC236}">
+                <a16:creationId xmlns:a16="http://schemas.microsoft.com/office/drawing/2014/main" id="{F19F0CC8-1D37-8702-FF06-32DC5A1A2021}"/>
+              </a:ext>
+            </a:extLst>
+          </p:cNvPr>
+          <p:cNvSpPr>
+            <a:spLocks noChangeArrowheads="1"/>
+          </p:cNvSpPr>
+          <p:nvPr/>
+        </p:nvSpPr>
+        <p:spPr bwMode="auto">
+          <a:xfrm>
+            <a:off x="355600" y="1260475"/>
+            <a:ext cx="9099550" cy="581025"/>
+          </a:xfrm>
+          <a:prstGeom prst="rect">
+            <a:avLst/>
+          </a:prstGeom>
+          <a:solidFill>
+            <a:srgbClr val="FFFFCC"/>
+          </a:solidFill>
+          <a:ln w="12700">
+            <a:solidFill>
+              <a:schemeClr val="tx1"/>
+            </a:solidFill>
+            <a:miter lim="800000"/>
+            <a:headEnd/>
+            <a:tailEnd/>
+          </a:ln>
+          <a:effectLst/>
+          <a:extLst>
+            <a:ext uri="{AF507438-7753-43E0-B8FC-AC1667EBCBE1}">
+              <a14:hiddenEffects xmlns:a14="http://schemas.microsoft.com/office/drawing/2010/main">
+                <a:effectLst>
+                  <a:outerShdw dist="35921" dir="2700000" algn="ctr" rotWithShape="0">
+                    <a:schemeClr val="bg2"/>
+                  </a:outerShdw>
+                </a:effectLst>
+              </a14:hiddenEffects>
+            </a:ext>
+          </a:extLst>
+        </p:spPr>
+        <p:txBody>
+          <a:bodyPr/>
+          <a:lstStyle>
+            <a:lvl1pPr marL="269875" indent="-269875">
+              <a:spcBef>
+                <a:spcPct val="10000"/>
+              </a:spcBef>
+              <a:buFont typeface="Wingdings" panose="05000000000000000000" pitchFamily="2" charset="2"/>
+              <a:buChar char="n"/>
+              <a:defRPr kumimoji="1">
+                <a:solidFill>
+                  <a:schemeClr val="tx1"/>
+                </a:solidFill>
+                <a:latin typeface="MS UI Gothic" panose="020B0600070205080204" pitchFamily="50" charset="-128"/>
+                <a:ea typeface="MS UI Gothic" panose="020B0600070205080204" pitchFamily="50" charset="-128"/>
+              </a:defRPr>
+            </a:lvl1pPr>
+            <a:lvl2pPr marL="449263">
+              <a:spcBef>
+                <a:spcPct val="10000"/>
+              </a:spcBef>
+              <a:buFont typeface="Wingdings" panose="05000000000000000000" pitchFamily="2" charset="2"/>
+              <a:defRPr kumimoji="1">
+                <a:solidFill>
+                  <a:schemeClr val="tx1"/>
+                </a:solidFill>
+                <a:latin typeface="MS UI Gothic" panose="020B0600070205080204" pitchFamily="50" charset="-128"/>
+                <a:ea typeface="MS UI Gothic" panose="020B0600070205080204" pitchFamily="50" charset="-128"/>
+              </a:defRPr>
+            </a:lvl2pPr>
+            <a:lvl3pPr marL="893763">
+              <a:spcBef>
+                <a:spcPct val="10000"/>
+              </a:spcBef>
+              <a:defRPr kumimoji="1">
+                <a:solidFill>
+                  <a:schemeClr val="tx1"/>
+                </a:solidFill>
+                <a:latin typeface="MS UI Gothic" panose="020B0600070205080204" pitchFamily="50" charset="-128"/>
+                <a:ea typeface="MS UI Gothic" panose="020B0600070205080204" pitchFamily="50" charset="-128"/>
+              </a:defRPr>
+            </a:lvl3pPr>
+            <a:lvl4pPr marL="1339850">
+              <a:spcBef>
+                <a:spcPct val="10000"/>
+              </a:spcBef>
+              <a:buFont typeface="Wingdings" panose="05000000000000000000" pitchFamily="2" charset="2"/>
+              <a:defRPr kumimoji="1">
+                <a:solidFill>
+                  <a:schemeClr val="tx1"/>
+                </a:solidFill>
+                <a:latin typeface="MS UI Gothic" panose="020B0600070205080204" pitchFamily="50" charset="-128"/>
+                <a:ea typeface="MS UI Gothic" panose="020B0600070205080204" pitchFamily="50" charset="-128"/>
+              </a:defRPr>
+            </a:lvl4pPr>
+            <a:lvl5pPr marL="1747838">
+              <a:spcBef>
+                <a:spcPct val="10000"/>
+              </a:spcBef>
+              <a:defRPr kumimoji="1">
+                <a:solidFill>
+                  <a:schemeClr val="tx1"/>
+                </a:solidFill>
+                <a:latin typeface="MS UI Gothic" panose="020B0600070205080204" pitchFamily="50" charset="-128"/>
+                <a:ea typeface="MS UI Gothic" panose="020B0600070205080204" pitchFamily="50" charset="-128"/>
+              </a:defRPr>
+            </a:lvl5pPr>
+            <a:lvl6pPr marL="2205038" fontAlgn="base">
+              <a:spcBef>
+                <a:spcPct val="10000"/>
+              </a:spcBef>
+              <a:spcAft>
+                <a:spcPct val="0"/>
+              </a:spcAft>
+              <a:defRPr kumimoji="1">
+                <a:solidFill>
+                  <a:schemeClr val="tx1"/>
+                </a:solidFill>
+                <a:latin typeface="MS UI Gothic" panose="020B0600070205080204" pitchFamily="50" charset="-128"/>
+                <a:ea typeface="MS UI Gothic" panose="020B0600070205080204" pitchFamily="50" charset="-128"/>
+              </a:defRPr>
+            </a:lvl6pPr>
+            <a:lvl7pPr marL="2662238" fontAlgn="base">
+              <a:spcBef>
+                <a:spcPct val="10000"/>
+              </a:spcBef>
+              <a:spcAft>
+                <a:spcPct val="0"/>
+              </a:spcAft>
+              <a:defRPr kumimoji="1">
+                <a:solidFill>
+                  <a:schemeClr val="tx1"/>
+                </a:solidFill>
+                <a:latin typeface="MS UI Gothic" panose="020B0600070205080204" pitchFamily="50" charset="-128"/>
+                <a:ea typeface="MS UI Gothic" panose="020B0600070205080204" pitchFamily="50" charset="-128"/>
+              </a:defRPr>
+            </a:lvl7pPr>
+            <a:lvl8pPr marL="3119438" fontAlgn="base">
+              <a:spcBef>
+                <a:spcPct val="10000"/>
+              </a:spcBef>
+              <a:spcAft>
+                <a:spcPct val="0"/>
+              </a:spcAft>
+              <a:defRPr kumimoji="1">
+                <a:solidFill>
+                  <a:schemeClr val="tx1"/>
+                </a:solidFill>
+                <a:latin typeface="MS UI Gothic" panose="020B0600070205080204" pitchFamily="50" charset="-128"/>
+                <a:ea typeface="MS UI Gothic" panose="020B0600070205080204" pitchFamily="50" charset="-128"/>
+              </a:defRPr>
+            </a:lvl8pPr>
+            <a:lvl9pPr marL="3576638" fontAlgn="base">
+              <a:spcBef>
+                <a:spcPct val="10000"/>
+              </a:spcBef>
+              <a:spcAft>
+                <a:spcPct val="0"/>
+              </a:spcAft>
+              <a:defRPr kumimoji="1">
+                <a:solidFill>
+                  <a:schemeClr val="tx1"/>
+                </a:solidFill>
+                <a:latin typeface="MS UI Gothic" panose="020B0600070205080204" pitchFamily="50" charset="-128"/>
+                <a:ea typeface="MS UI Gothic" panose="020B0600070205080204" pitchFamily="50" charset="-128"/>
+              </a:defRPr>
+            </a:lvl9pPr>
+          </a:lstStyle>
+          <a:p>
+            <a:pPr>
+              <a:buFont typeface="Wingdings" panose="05000000000000000000" pitchFamily="2" charset="2"/>
+              <a:buNone/>
+            </a:pPr>
+            <a:r>
+              <a:rPr lang="en-US" altLang="ja-JP" sz="1700">
+                <a:latin typeface="Arial" panose="020B0604020202020204" pitchFamily="34" charset="0"/>
+              </a:rPr>
+              <a:t>Là việc giấu từ bên ngoài những thông tin chi tiết của đối tượng (cấu tạo và trạng thái bên trong) .</a:t>
+            </a:r>
+          </a:p>
+        </p:txBody>
+      </p:sp>
+      <p:sp>
+        <p:nvSpPr>
+          <p:cNvPr id="410637" name="AutoShape 13">
+            <a:extLst>
+              <a:ext uri="{FF2B5EF4-FFF2-40B4-BE49-F238E27FC236}">
+                <a16:creationId xmlns:a16="http://schemas.microsoft.com/office/drawing/2014/main" id="{AB145755-0227-7DDD-18A7-A5F0819C9C96}"/>
+              </a:ext>
+            </a:extLst>
+          </p:cNvPr>
+          <p:cNvSpPr>
+            <a:spLocks noChangeArrowheads="1"/>
+          </p:cNvSpPr>
+          <p:nvPr/>
+        </p:nvSpPr>
+        <p:spPr bwMode="auto">
+          <a:xfrm>
+            <a:off x="4864100" y="3079750"/>
+            <a:ext cx="4313238" cy="2476500"/>
+          </a:xfrm>
+          <a:prstGeom prst="wedgeRoundRectCallout">
+            <a:avLst>
+              <a:gd name="adj1" fmla="val -70870"/>
+              <a:gd name="adj2" fmla="val 3333"/>
+              <a:gd name="adj3" fmla="val 16667"/>
+            </a:avLst>
+          </a:prstGeom>
+          <a:solidFill>
+            <a:srgbClr val="CCFFFF"/>
+          </a:solidFill>
+          <a:ln w="12700">
+            <a:solidFill>
+              <a:schemeClr val="tx1"/>
+            </a:solidFill>
+            <a:miter lim="800000"/>
+            <a:headEnd/>
+            <a:tailEnd/>
+          </a:ln>
+          <a:effectLst/>
+          <a:extLst>
+            <a:ext uri="{AF507438-7753-43E0-B8FC-AC1667EBCBE1}">
+              <a14:hiddenEffects xmlns:a14="http://schemas.microsoft.com/office/drawing/2010/main">
+                <a:effectLst>
+                  <a:outerShdw dist="57238" dir="2021404" algn="ctr" rotWithShape="0">
+                    <a:srgbClr val="000000"/>
+                  </a:outerShdw>
+                </a:effectLst>
+              </a14:hiddenEffects>
+            </a:ext>
+          </a:extLst>
+        </p:spPr>
+        <p:txBody>
+          <a:bodyPr lIns="9525" tIns="19050" rIns="9525" bIns="18000" anchor="ctr"/>
+          <a:lstStyle/>
+          <a:p>
+            <a:r>
+              <a:rPr lang="en-US" altLang="ja-JP" sz="1600" b="0" dirty="0">
+                <a:latin typeface="+mj-lt"/>
+                <a:cs typeface="Times New Roman" panose="02020603050405020304" pitchFamily="18" charset="0"/>
+              </a:rPr>
+              <a:t>●</a:t>
+            </a:r>
+            <a:r>
+              <a:rPr lang="en-US" altLang="ja-JP" sz="1600" b="0" dirty="0" err="1">
+                <a:latin typeface="+mj-lt"/>
+                <a:cs typeface="Times New Roman" panose="02020603050405020304" pitchFamily="18" charset="0"/>
+              </a:rPr>
+              <a:t>Giấu</a:t>
+            </a:r>
+            <a:r>
+              <a:rPr lang="en-US" altLang="ja-JP" sz="1600" b="0" dirty="0">
+                <a:latin typeface="+mj-lt"/>
+                <a:cs typeface="Times New Roman" panose="02020603050405020304" pitchFamily="18" charset="0"/>
+              </a:rPr>
+              <a:t> </a:t>
+            </a:r>
+            <a:r>
+              <a:rPr lang="en-US" altLang="ja-JP" sz="1600" b="0" dirty="0" err="1">
+                <a:latin typeface="+mj-lt"/>
+                <a:cs typeface="Times New Roman" panose="02020603050405020304" pitchFamily="18" charset="0"/>
+              </a:rPr>
+              <a:t>thông</a:t>
+            </a:r>
+            <a:r>
+              <a:rPr lang="en-US" altLang="ja-JP" sz="1600" b="0" dirty="0">
+                <a:latin typeface="+mj-lt"/>
+                <a:cs typeface="Times New Roman" panose="02020603050405020304" pitchFamily="18" charset="0"/>
+              </a:rPr>
+              <a:t> tin </a:t>
+            </a:r>
+            <a:r>
+              <a:rPr lang="en-US" altLang="ja-JP" sz="1600" b="0" dirty="0" err="1">
+                <a:latin typeface="+mj-lt"/>
+                <a:cs typeface="Times New Roman" panose="02020603050405020304" pitchFamily="18" charset="0"/>
+              </a:rPr>
+              <a:t>và</a:t>
+            </a:r>
+            <a:r>
+              <a:rPr lang="en-US" altLang="ja-JP" sz="1600" b="0" dirty="0">
+                <a:latin typeface="+mj-lt"/>
+                <a:cs typeface="Times New Roman" panose="02020603050405020304" pitchFamily="18" charset="0"/>
+              </a:rPr>
+              <a:t> </a:t>
+            </a:r>
+            <a:r>
+              <a:rPr lang="en-US" altLang="ja-JP" sz="1600" b="0" dirty="0" err="1">
+                <a:latin typeface="+mj-lt"/>
+                <a:cs typeface="Times New Roman" panose="02020603050405020304" pitchFamily="18" charset="0"/>
+              </a:rPr>
+              <a:t>thao</a:t>
+            </a:r>
+            <a:r>
+              <a:rPr lang="en-US" altLang="ja-JP" sz="1600" b="0" dirty="0">
+                <a:latin typeface="+mj-lt"/>
+                <a:cs typeface="Times New Roman" panose="02020603050405020304" pitchFamily="18" charset="0"/>
+              </a:rPr>
+              <a:t> </a:t>
+            </a:r>
+            <a:r>
+              <a:rPr lang="en-US" altLang="ja-JP" sz="1600" b="0" dirty="0" err="1">
+                <a:latin typeface="+mj-lt"/>
+                <a:cs typeface="Times New Roman" panose="02020603050405020304" pitchFamily="18" charset="0"/>
+              </a:rPr>
+              <a:t>tác</a:t>
+            </a:r>
+            <a:r>
+              <a:rPr lang="en-US" altLang="ja-JP" sz="1600" b="0" dirty="0">
+                <a:latin typeface="+mj-lt"/>
+                <a:cs typeface="Times New Roman" panose="02020603050405020304" pitchFamily="18" charset="0"/>
+              </a:rPr>
+              <a:t>/</a:t>
+            </a:r>
+            <a:r>
+              <a:rPr lang="en-US" altLang="ja-JP" sz="1600" b="0" dirty="0" err="1">
+                <a:latin typeface="+mj-lt"/>
+                <a:cs typeface="Times New Roman" panose="02020603050405020304" pitchFamily="18" charset="0"/>
+              </a:rPr>
+              <a:t>thuộc</a:t>
+            </a:r>
+            <a:r>
+              <a:rPr lang="en-US" altLang="ja-JP" sz="1600" b="0" dirty="0">
+                <a:latin typeface="+mj-lt"/>
+                <a:cs typeface="Times New Roman" panose="02020603050405020304" pitchFamily="18" charset="0"/>
+              </a:rPr>
+              <a:t> </a:t>
+            </a:r>
+            <a:r>
+              <a:rPr lang="en-US" altLang="ja-JP" sz="1600" b="0" dirty="0" err="1">
+                <a:latin typeface="+mj-lt"/>
+                <a:cs typeface="Times New Roman" panose="02020603050405020304" pitchFamily="18" charset="0"/>
+              </a:rPr>
+              <a:t>tính</a:t>
+            </a:r>
+            <a:endParaRPr lang="en-US" altLang="ja-JP" sz="1600" b="0" dirty="0">
+              <a:latin typeface="+mj-lt"/>
+              <a:cs typeface="Times New Roman" panose="02020603050405020304" pitchFamily="18" charset="0"/>
+            </a:endParaRPr>
+          </a:p>
+          <a:p>
+            <a:endParaRPr lang="en-US" altLang="ja-JP" sz="1600" b="0" dirty="0">
+              <a:latin typeface="+mj-lt"/>
+              <a:cs typeface="Times New Roman" panose="02020603050405020304" pitchFamily="18" charset="0"/>
+            </a:endParaRPr>
+          </a:p>
+          <a:p>
+            <a:r>
+              <a:rPr lang="ja-JP" altLang="en-US" sz="1600" b="0" dirty="0">
+                <a:latin typeface="+mj-lt"/>
+                <a:cs typeface="Times New Roman" panose="02020603050405020304" pitchFamily="18" charset="0"/>
+              </a:rPr>
+              <a:t>・「</a:t>
+            </a:r>
+            <a:r>
+              <a:rPr lang="en-US" altLang="ja-JP" sz="1600" b="0" dirty="0" err="1">
+                <a:latin typeface="+mj-lt"/>
+                <a:cs typeface="Times New Roman" panose="02020603050405020304" pitchFamily="18" charset="0"/>
+              </a:rPr>
+              <a:t>Thuộc</a:t>
+            </a:r>
+            <a:r>
+              <a:rPr lang="en-US" altLang="ja-JP" sz="1600" b="0" dirty="0">
+                <a:latin typeface="+mj-lt"/>
+                <a:cs typeface="Times New Roman" panose="02020603050405020304" pitchFamily="18" charset="0"/>
+              </a:rPr>
+              <a:t> </a:t>
+            </a:r>
+            <a:r>
+              <a:rPr lang="en-US" altLang="ja-JP" sz="1600" b="0" dirty="0" err="1">
+                <a:latin typeface="+mj-lt"/>
+                <a:cs typeface="Times New Roman" panose="02020603050405020304" pitchFamily="18" charset="0"/>
+              </a:rPr>
+              <a:t>tính</a:t>
+            </a:r>
+            <a:r>
+              <a:rPr lang="ja-JP" altLang="en-US" sz="1600" b="0" dirty="0">
+                <a:latin typeface="+mj-lt"/>
+                <a:cs typeface="Times New Roman" panose="02020603050405020304" pitchFamily="18" charset="0"/>
+              </a:rPr>
+              <a:t>」：</a:t>
+            </a:r>
+            <a:r>
+              <a:rPr lang="en-US" altLang="ja-JP" sz="1600" b="0" dirty="0" err="1">
+                <a:latin typeface="+mj-lt"/>
+                <a:cs typeface="Times New Roman" panose="02020603050405020304" pitchFamily="18" charset="0"/>
+              </a:rPr>
+              <a:t>Không</a:t>
+            </a:r>
+            <a:r>
+              <a:rPr lang="en-US" altLang="ja-JP" sz="1600" b="0" dirty="0">
+                <a:latin typeface="+mj-lt"/>
+                <a:cs typeface="Times New Roman" panose="02020603050405020304" pitchFamily="18" charset="0"/>
+              </a:rPr>
+              <a:t> </a:t>
+            </a:r>
+            <a:r>
+              <a:rPr lang="en-US" altLang="ja-JP" sz="1600" b="0" dirty="0" err="1">
+                <a:latin typeface="+mj-lt"/>
+                <a:cs typeface="Times New Roman" panose="02020603050405020304" pitchFamily="18" charset="0"/>
+              </a:rPr>
+              <a:t>công</a:t>
+            </a:r>
+            <a:r>
+              <a:rPr lang="en-US" altLang="ja-JP" sz="1600" b="0" dirty="0">
+                <a:latin typeface="+mj-lt"/>
+                <a:cs typeface="Times New Roman" panose="02020603050405020304" pitchFamily="18" charset="0"/>
+              </a:rPr>
+              <a:t> </a:t>
+            </a:r>
+            <a:r>
+              <a:rPr lang="en-US" altLang="ja-JP" sz="1600" b="0" dirty="0" err="1">
+                <a:latin typeface="+mj-lt"/>
+                <a:cs typeface="Times New Roman" panose="02020603050405020304" pitchFamily="18" charset="0"/>
+              </a:rPr>
+              <a:t>khai</a:t>
+            </a:r>
+            <a:r>
+              <a:rPr lang="en-US" altLang="ja-JP" sz="1600" b="0" dirty="0">
+                <a:latin typeface="+mj-lt"/>
+                <a:cs typeface="Times New Roman" panose="02020603050405020304" pitchFamily="18" charset="0"/>
+              </a:rPr>
+              <a:t> </a:t>
+            </a:r>
+            <a:r>
+              <a:rPr lang="en-US" altLang="ja-JP" sz="1600" b="0" dirty="0" err="1">
+                <a:latin typeface="+mj-lt"/>
+                <a:cs typeface="Times New Roman" panose="02020603050405020304" pitchFamily="18" charset="0"/>
+              </a:rPr>
+              <a:t>ra</a:t>
+            </a:r>
+            <a:r>
+              <a:rPr lang="en-US" altLang="ja-JP" sz="1600" b="0" dirty="0">
+                <a:latin typeface="+mj-lt"/>
+                <a:cs typeface="Times New Roman" panose="02020603050405020304" pitchFamily="18" charset="0"/>
+              </a:rPr>
+              <a:t> </a:t>
+            </a:r>
+            <a:r>
+              <a:rPr lang="en-US" altLang="ja-JP" sz="1600" b="0" dirty="0" err="1">
+                <a:latin typeface="+mj-lt"/>
+                <a:cs typeface="Times New Roman" panose="02020603050405020304" pitchFamily="18" charset="0"/>
+              </a:rPr>
+              <a:t>ngoài</a:t>
+            </a:r>
+            <a:endParaRPr lang="en-US" altLang="ja-JP" sz="1600" b="0" dirty="0">
+              <a:latin typeface="+mj-lt"/>
+              <a:cs typeface="Times New Roman" panose="02020603050405020304" pitchFamily="18" charset="0"/>
+            </a:endParaRPr>
+          </a:p>
+          <a:p>
+            <a:r>
+              <a:rPr lang="ja-JP" altLang="en-US" sz="1600" b="0" dirty="0">
+                <a:latin typeface="+mj-lt"/>
+                <a:cs typeface="Times New Roman" panose="02020603050405020304" pitchFamily="18" charset="0"/>
+              </a:rPr>
+              <a:t>　（</a:t>
+            </a:r>
+            <a:r>
+              <a:rPr lang="en-US" altLang="ja-JP" sz="1600" b="0" dirty="0" err="1">
+                <a:latin typeface="+mj-lt"/>
+                <a:cs typeface="Times New Roman" panose="02020603050405020304" pitchFamily="18" charset="0"/>
+              </a:rPr>
+              <a:t>không</a:t>
+            </a:r>
+            <a:r>
+              <a:rPr lang="en-US" altLang="ja-JP" sz="1600" b="0" dirty="0">
+                <a:latin typeface="+mj-lt"/>
+                <a:cs typeface="Times New Roman" panose="02020603050405020304" pitchFamily="18" charset="0"/>
+              </a:rPr>
+              <a:t> </a:t>
+            </a:r>
+            <a:r>
+              <a:rPr lang="en-US" altLang="ja-JP" sz="1600" b="0" dirty="0" err="1">
+                <a:latin typeface="+mj-lt"/>
+                <a:cs typeface="Times New Roman" panose="02020603050405020304" pitchFamily="18" charset="0"/>
+              </a:rPr>
+              <a:t>thể</a:t>
+            </a:r>
+            <a:r>
+              <a:rPr lang="en-US" altLang="ja-JP" sz="1600" b="0" dirty="0">
+                <a:latin typeface="+mj-lt"/>
+                <a:cs typeface="Times New Roman" panose="02020603050405020304" pitchFamily="18" charset="0"/>
+              </a:rPr>
+              <a:t> </a:t>
+            </a:r>
+            <a:r>
+              <a:rPr lang="en-US" altLang="ja-JP" sz="1600" b="0" dirty="0" err="1">
+                <a:latin typeface="+mj-lt"/>
+                <a:cs typeface="Times New Roman" panose="02020603050405020304" pitchFamily="18" charset="0"/>
+              </a:rPr>
+              <a:t>sử</a:t>
+            </a:r>
+            <a:r>
+              <a:rPr lang="en-US" altLang="ja-JP" sz="1600" b="0" dirty="0">
+                <a:latin typeface="+mj-lt"/>
+                <a:cs typeface="Times New Roman" panose="02020603050405020304" pitchFamily="18" charset="0"/>
+              </a:rPr>
+              <a:t> </a:t>
+            </a:r>
+            <a:r>
+              <a:rPr lang="en-US" altLang="ja-JP" sz="1600" b="0" dirty="0" err="1">
+                <a:latin typeface="+mj-lt"/>
+                <a:cs typeface="Times New Roman" panose="02020603050405020304" pitchFamily="18" charset="0"/>
+              </a:rPr>
+              <a:t>dụng</a:t>
+            </a:r>
+            <a:r>
+              <a:rPr lang="en-US" altLang="ja-JP" sz="1600" b="0" dirty="0">
+                <a:latin typeface="+mj-lt"/>
+                <a:cs typeface="Times New Roman" panose="02020603050405020304" pitchFamily="18" charset="0"/>
+              </a:rPr>
+              <a:t> </a:t>
+            </a:r>
+            <a:r>
+              <a:rPr lang="en-US" altLang="ja-JP" sz="1600" b="0" dirty="0" err="1">
+                <a:latin typeface="+mj-lt"/>
+                <a:cs typeface="Times New Roman" panose="02020603050405020304" pitchFamily="18" charset="0"/>
+              </a:rPr>
+              <a:t>trực</a:t>
+            </a:r>
+            <a:r>
+              <a:rPr lang="en-US" altLang="ja-JP" sz="1600" b="0" dirty="0">
+                <a:latin typeface="+mj-lt"/>
+                <a:cs typeface="Times New Roman" panose="02020603050405020304" pitchFamily="18" charset="0"/>
+              </a:rPr>
+              <a:t> </a:t>
+            </a:r>
+            <a:r>
+              <a:rPr lang="en-US" altLang="ja-JP" sz="1600" b="0" dirty="0" err="1">
+                <a:latin typeface="+mj-lt"/>
+                <a:cs typeface="Times New Roman" panose="02020603050405020304" pitchFamily="18" charset="0"/>
+              </a:rPr>
+              <a:t>tiếp</a:t>
+            </a:r>
+            <a:r>
+              <a:rPr lang="en-US" altLang="ja-JP" sz="1600" b="0" dirty="0">
+                <a:latin typeface="+mj-lt"/>
+                <a:cs typeface="Times New Roman" panose="02020603050405020304" pitchFamily="18" charset="0"/>
+              </a:rPr>
+              <a:t> </a:t>
+            </a:r>
+            <a:r>
+              <a:rPr lang="en-US" altLang="ja-JP" sz="1600" b="0" dirty="0" err="1">
+                <a:latin typeface="+mj-lt"/>
+                <a:cs typeface="Times New Roman" panose="02020603050405020304" pitchFamily="18" charset="0"/>
+              </a:rPr>
+              <a:t>từ</a:t>
+            </a:r>
+            <a:r>
+              <a:rPr lang="en-US" altLang="ja-JP" sz="1600" b="0" dirty="0">
+                <a:latin typeface="+mj-lt"/>
+                <a:cs typeface="Times New Roman" panose="02020603050405020304" pitchFamily="18" charset="0"/>
+              </a:rPr>
+              <a:t> </a:t>
+            </a:r>
+            <a:r>
+              <a:rPr lang="en-US" altLang="ja-JP" sz="1600" b="0" dirty="0" err="1">
+                <a:latin typeface="+mj-lt"/>
+                <a:cs typeface="Times New Roman" panose="02020603050405020304" pitchFamily="18" charset="0"/>
+              </a:rPr>
+              <a:t>bên</a:t>
+            </a:r>
+            <a:r>
+              <a:rPr lang="en-US" altLang="ja-JP" sz="1600" b="0" dirty="0">
+                <a:latin typeface="+mj-lt"/>
+                <a:cs typeface="Times New Roman" panose="02020603050405020304" pitchFamily="18" charset="0"/>
+              </a:rPr>
+              <a:t> </a:t>
+            </a:r>
+            <a:r>
+              <a:rPr lang="en-US" altLang="ja-JP" sz="1600" b="0" dirty="0" err="1">
+                <a:latin typeface="+mj-lt"/>
+                <a:cs typeface="Times New Roman" panose="02020603050405020304" pitchFamily="18" charset="0"/>
+              </a:rPr>
+              <a:t>ngoài</a:t>
+            </a:r>
+            <a:r>
+              <a:rPr lang="ja-JP" altLang="en-US" sz="1600" b="0" dirty="0">
+                <a:latin typeface="+mj-lt"/>
+                <a:cs typeface="Times New Roman" panose="02020603050405020304" pitchFamily="18" charset="0"/>
+              </a:rPr>
+              <a:t>）</a:t>
+            </a:r>
+          </a:p>
+          <a:p>
+            <a:endParaRPr lang="ja-JP" altLang="en-US" sz="1600" b="0" dirty="0">
+              <a:latin typeface="+mj-lt"/>
+              <a:cs typeface="Times New Roman" panose="02020603050405020304" pitchFamily="18" charset="0"/>
+            </a:endParaRPr>
+          </a:p>
+          <a:p>
+            <a:r>
+              <a:rPr lang="ja-JP" altLang="en-US" sz="1600" b="0" dirty="0">
+                <a:latin typeface="+mj-lt"/>
+                <a:cs typeface="Times New Roman" panose="02020603050405020304" pitchFamily="18" charset="0"/>
+              </a:rPr>
+              <a:t>・「</a:t>
+            </a:r>
+            <a:r>
+              <a:rPr lang="en-US" altLang="ja-JP" sz="1600" b="0" dirty="0">
+                <a:latin typeface="+mj-lt"/>
+                <a:cs typeface="Times New Roman" panose="02020603050405020304" pitchFamily="18" charset="0"/>
+              </a:rPr>
+              <a:t>Thao </a:t>
+            </a:r>
+            <a:r>
+              <a:rPr lang="en-US" altLang="ja-JP" sz="1600" b="0" dirty="0" err="1">
+                <a:latin typeface="+mj-lt"/>
+                <a:cs typeface="Times New Roman" panose="02020603050405020304" pitchFamily="18" charset="0"/>
+              </a:rPr>
+              <a:t>tác</a:t>
+            </a:r>
+            <a:r>
+              <a:rPr lang="ja-JP" altLang="en-US" sz="1600" b="0" dirty="0">
+                <a:latin typeface="+mj-lt"/>
+                <a:cs typeface="Times New Roman" panose="02020603050405020304" pitchFamily="18" charset="0"/>
+              </a:rPr>
+              <a:t>」：</a:t>
+            </a:r>
+            <a:r>
+              <a:rPr lang="en-US" altLang="ja-JP" sz="1600" b="0" dirty="0">
+                <a:latin typeface="+mj-lt"/>
+                <a:cs typeface="Times New Roman" panose="02020603050405020304" pitchFamily="18" charset="0"/>
+              </a:rPr>
+              <a:t>Công </a:t>
+            </a:r>
+            <a:r>
+              <a:rPr lang="en-US" altLang="ja-JP" sz="1600" b="0" dirty="0" err="1">
+                <a:latin typeface="+mj-lt"/>
+                <a:cs typeface="Times New Roman" panose="02020603050405020304" pitchFamily="18" charset="0"/>
+              </a:rPr>
+              <a:t>khai</a:t>
+            </a:r>
+            <a:r>
+              <a:rPr lang="en-US" altLang="ja-JP" sz="1600" b="0" dirty="0">
+                <a:latin typeface="+mj-lt"/>
+                <a:cs typeface="Times New Roman" panose="02020603050405020304" pitchFamily="18" charset="0"/>
+              </a:rPr>
+              <a:t> </a:t>
+            </a:r>
+            <a:r>
+              <a:rPr lang="en-US" altLang="ja-JP" sz="1600" b="0" dirty="0" err="1">
+                <a:latin typeface="+mj-lt"/>
+                <a:cs typeface="Times New Roman" panose="02020603050405020304" pitchFamily="18" charset="0"/>
+              </a:rPr>
+              <a:t>ra</a:t>
+            </a:r>
+            <a:r>
+              <a:rPr lang="en-US" altLang="ja-JP" sz="1600" b="0" dirty="0">
+                <a:latin typeface="+mj-lt"/>
+                <a:cs typeface="Times New Roman" panose="02020603050405020304" pitchFamily="18" charset="0"/>
+              </a:rPr>
+              <a:t> </a:t>
+            </a:r>
+            <a:r>
+              <a:rPr lang="en-US" altLang="ja-JP" sz="1600" b="0" dirty="0" err="1">
+                <a:latin typeface="+mj-lt"/>
+                <a:cs typeface="Times New Roman" panose="02020603050405020304" pitchFamily="18" charset="0"/>
+              </a:rPr>
+              <a:t>bên</a:t>
+            </a:r>
+            <a:r>
+              <a:rPr lang="en-US" altLang="ja-JP" sz="1600" b="0" dirty="0">
+                <a:latin typeface="+mj-lt"/>
+                <a:cs typeface="Times New Roman" panose="02020603050405020304" pitchFamily="18" charset="0"/>
+              </a:rPr>
+              <a:t> </a:t>
+            </a:r>
+            <a:r>
+              <a:rPr lang="en-US" altLang="ja-JP" sz="1600" b="0" dirty="0" err="1">
+                <a:latin typeface="+mj-lt"/>
+                <a:cs typeface="Times New Roman" panose="02020603050405020304" pitchFamily="18" charset="0"/>
+              </a:rPr>
+              <a:t>ngoài</a:t>
+            </a:r>
+            <a:endParaRPr lang="en-US" altLang="ja-JP" sz="1600" b="0" dirty="0">
+              <a:latin typeface="+mj-lt"/>
+              <a:cs typeface="Times New Roman" panose="02020603050405020304" pitchFamily="18" charset="0"/>
+            </a:endParaRPr>
+          </a:p>
+          <a:p>
+            <a:r>
+              <a:rPr lang="ja-JP" altLang="en-US" sz="900" b="0" dirty="0">
+                <a:latin typeface="+mj-lt"/>
+                <a:cs typeface="Times New Roman" panose="02020603050405020304" pitchFamily="18" charset="0"/>
+              </a:rPr>
+              <a:t>　</a:t>
+            </a:r>
+            <a:r>
+              <a:rPr lang="ja-JP" altLang="en-US" sz="1600" b="0" dirty="0">
+                <a:latin typeface="+mj-lt"/>
+                <a:cs typeface="Times New Roman" panose="02020603050405020304" pitchFamily="18" charset="0"/>
+              </a:rPr>
+              <a:t>（</a:t>
+            </a:r>
+            <a:r>
+              <a:rPr lang="en-US" altLang="ja-JP" sz="1600" b="0" dirty="0" err="1">
+                <a:latin typeface="+mj-lt"/>
+                <a:cs typeface="Times New Roman" panose="02020603050405020304" pitchFamily="18" charset="0"/>
+              </a:rPr>
+              <a:t>Tạo</a:t>
+            </a:r>
+            <a:r>
+              <a:rPr lang="en-US" altLang="ja-JP" sz="1600" b="0" dirty="0">
+                <a:latin typeface="+mj-lt"/>
+                <a:cs typeface="Times New Roman" panose="02020603050405020304" pitchFamily="18" charset="0"/>
+              </a:rPr>
+              <a:t> </a:t>
+            </a:r>
+            <a:r>
+              <a:rPr lang="en-US" altLang="ja-JP" sz="1600" b="0" dirty="0" err="1">
+                <a:latin typeface="+mj-lt"/>
+                <a:cs typeface="Times New Roman" panose="02020603050405020304" pitchFamily="18" charset="0"/>
+              </a:rPr>
+              <a:t>các</a:t>
+            </a:r>
+            <a:r>
+              <a:rPr lang="en-US" altLang="ja-JP" sz="1600" b="0" dirty="0">
+                <a:latin typeface="+mj-lt"/>
+                <a:cs typeface="Times New Roman" panose="02020603050405020304" pitchFamily="18" charset="0"/>
+              </a:rPr>
+              <a:t> </a:t>
+            </a:r>
+            <a:r>
+              <a:rPr lang="en-US" altLang="ja-JP" sz="1600" b="0" dirty="0" err="1">
+                <a:latin typeface="+mj-lt"/>
+                <a:cs typeface="Times New Roman" panose="02020603050405020304" pitchFamily="18" charset="0"/>
+              </a:rPr>
+              <a:t>thao</a:t>
+            </a:r>
+            <a:r>
+              <a:rPr lang="en-US" altLang="ja-JP" sz="1600" b="0" dirty="0">
+                <a:latin typeface="+mj-lt"/>
+                <a:cs typeface="Times New Roman" panose="02020603050405020304" pitchFamily="18" charset="0"/>
+              </a:rPr>
+              <a:t> </a:t>
+            </a:r>
+            <a:r>
+              <a:rPr lang="en-US" altLang="ja-JP" sz="1600" b="0" dirty="0" err="1">
+                <a:latin typeface="+mj-lt"/>
+                <a:cs typeface="Times New Roman" panose="02020603050405020304" pitchFamily="18" charset="0"/>
+              </a:rPr>
+              <a:t>tác</a:t>
+            </a:r>
+            <a:r>
+              <a:rPr lang="en-US" altLang="ja-JP" sz="1600" b="0" dirty="0">
+                <a:latin typeface="+mj-lt"/>
+                <a:cs typeface="Times New Roman" panose="02020603050405020304" pitchFamily="18" charset="0"/>
+              </a:rPr>
+              <a:t> </a:t>
+            </a:r>
+            <a:r>
+              <a:rPr lang="en-US" altLang="ja-JP" sz="1600" b="0" dirty="0" err="1">
+                <a:latin typeface="+mj-lt"/>
+                <a:cs typeface="Times New Roman" panose="02020603050405020304" pitchFamily="18" charset="0"/>
+              </a:rPr>
+              <a:t>để</a:t>
+            </a:r>
+            <a:r>
+              <a:rPr lang="en-US" altLang="ja-JP" sz="1600" b="0" dirty="0">
+                <a:latin typeface="+mj-lt"/>
+                <a:cs typeface="Times New Roman" panose="02020603050405020304" pitchFamily="18" charset="0"/>
+              </a:rPr>
+              <a:t> get/set </a:t>
+            </a:r>
+            <a:r>
+              <a:rPr lang="en-US" altLang="ja-JP" sz="1600" b="0" dirty="0" err="1">
+                <a:latin typeface="+mj-lt"/>
+                <a:cs typeface="Times New Roman" panose="02020603050405020304" pitchFamily="18" charset="0"/>
+              </a:rPr>
+              <a:t>giá</a:t>
+            </a:r>
+            <a:r>
+              <a:rPr lang="en-US" altLang="ja-JP" sz="1600" b="0" dirty="0">
+                <a:latin typeface="+mj-lt"/>
+                <a:cs typeface="Times New Roman" panose="02020603050405020304" pitchFamily="18" charset="0"/>
+              </a:rPr>
+              <a:t> </a:t>
+            </a:r>
+            <a:r>
+              <a:rPr lang="en-US" altLang="ja-JP" sz="1600" b="0" dirty="0" err="1">
+                <a:latin typeface="+mj-lt"/>
+                <a:cs typeface="Times New Roman" panose="02020603050405020304" pitchFamily="18" charset="0"/>
+              </a:rPr>
+              <a:t>trị</a:t>
+            </a:r>
+            <a:r>
+              <a:rPr lang="en-US" altLang="ja-JP" sz="1600" b="0" dirty="0">
+                <a:latin typeface="+mj-lt"/>
+                <a:cs typeface="Times New Roman" panose="02020603050405020304" pitchFamily="18" charset="0"/>
+              </a:rPr>
+              <a:t> </a:t>
+            </a:r>
+            <a:r>
+              <a:rPr lang="en-US" altLang="ja-JP" sz="1600" b="0" dirty="0" err="1">
+                <a:latin typeface="+mj-lt"/>
+                <a:cs typeface="Times New Roman" panose="02020603050405020304" pitchFamily="18" charset="0"/>
+              </a:rPr>
+              <a:t>thuộc</a:t>
+            </a:r>
+            <a:r>
+              <a:rPr lang="en-US" altLang="ja-JP" sz="1600" b="0" dirty="0">
+                <a:latin typeface="+mj-lt"/>
+                <a:cs typeface="Times New Roman" panose="02020603050405020304" pitchFamily="18" charset="0"/>
+              </a:rPr>
+              <a:t> </a:t>
+            </a:r>
+            <a:r>
+              <a:rPr lang="en-US" altLang="ja-JP" sz="1600" b="0" dirty="0" err="1">
+                <a:latin typeface="+mj-lt"/>
+                <a:cs typeface="Times New Roman" panose="02020603050405020304" pitchFamily="18" charset="0"/>
+              </a:rPr>
+              <a:t>tính</a:t>
+            </a:r>
+            <a:r>
+              <a:rPr lang="en-US" altLang="ja-JP" sz="1600" b="0" dirty="0">
+                <a:latin typeface="+mj-lt"/>
+                <a:cs typeface="Times New Roman" panose="02020603050405020304" pitchFamily="18" charset="0"/>
+              </a:rPr>
+              <a:t>, </a:t>
+            </a:r>
+            <a:r>
+              <a:rPr lang="en-US" altLang="ja-JP" sz="1600" b="0" dirty="0" err="1">
+                <a:latin typeface="+mj-lt"/>
+                <a:cs typeface="Times New Roman" panose="02020603050405020304" pitchFamily="18" charset="0"/>
+              </a:rPr>
+              <a:t>công</a:t>
+            </a:r>
+            <a:r>
+              <a:rPr lang="en-US" altLang="ja-JP" sz="1600" b="0" dirty="0">
+                <a:latin typeface="+mj-lt"/>
+                <a:cs typeface="Times New Roman" panose="02020603050405020304" pitchFamily="18" charset="0"/>
+              </a:rPr>
+              <a:t> </a:t>
+            </a:r>
+            <a:r>
+              <a:rPr lang="en-US" altLang="ja-JP" sz="1600" b="0" dirty="0" err="1">
+                <a:latin typeface="+mj-lt"/>
+                <a:cs typeface="Times New Roman" panose="02020603050405020304" pitchFamily="18" charset="0"/>
+              </a:rPr>
+              <a:t>khai</a:t>
+            </a:r>
+            <a:r>
+              <a:rPr lang="en-US" altLang="ja-JP" sz="1600" b="0" dirty="0">
+                <a:latin typeface="+mj-lt"/>
+                <a:cs typeface="Times New Roman" panose="02020603050405020304" pitchFamily="18" charset="0"/>
+              </a:rPr>
+              <a:t> </a:t>
+            </a:r>
+            <a:r>
+              <a:rPr lang="en-US" altLang="ja-JP" sz="1600" b="0" dirty="0" err="1">
+                <a:latin typeface="+mj-lt"/>
+                <a:cs typeface="Times New Roman" panose="02020603050405020304" pitchFamily="18" charset="0"/>
+              </a:rPr>
+              <a:t>ra</a:t>
+            </a:r>
+            <a:r>
+              <a:rPr lang="en-US" altLang="ja-JP" sz="1600" b="0" dirty="0">
+                <a:latin typeface="+mj-lt"/>
+                <a:cs typeface="Times New Roman" panose="02020603050405020304" pitchFamily="18" charset="0"/>
+              </a:rPr>
+              <a:t> </a:t>
+            </a:r>
+            <a:r>
+              <a:rPr lang="en-US" altLang="ja-JP" sz="1600" b="0" dirty="0" err="1">
+                <a:latin typeface="+mj-lt"/>
+                <a:cs typeface="Times New Roman" panose="02020603050405020304" pitchFamily="18" charset="0"/>
+              </a:rPr>
+              <a:t>bên</a:t>
+            </a:r>
+            <a:r>
+              <a:rPr lang="en-US" altLang="ja-JP" sz="1600" b="0" dirty="0">
+                <a:latin typeface="+mj-lt"/>
+                <a:cs typeface="Times New Roman" panose="02020603050405020304" pitchFamily="18" charset="0"/>
+              </a:rPr>
+              <a:t> </a:t>
+            </a:r>
+            <a:r>
+              <a:rPr lang="en-US" altLang="ja-JP" sz="1600" b="0" dirty="0" err="1">
+                <a:latin typeface="+mj-lt"/>
+                <a:cs typeface="Times New Roman" panose="02020603050405020304" pitchFamily="18" charset="0"/>
+              </a:rPr>
+              <a:t>ngoài</a:t>
+            </a:r>
+            <a:r>
+              <a:rPr lang="en-US" altLang="ja-JP" sz="1600" b="0" dirty="0">
+                <a:latin typeface="+mj-lt"/>
+                <a:cs typeface="Times New Roman" panose="02020603050405020304" pitchFamily="18" charset="0"/>
+              </a:rPr>
+              <a:t> </a:t>
+            </a:r>
+            <a:r>
+              <a:rPr lang="en-US" altLang="ja-JP" sz="1600" b="0" dirty="0" err="1">
+                <a:latin typeface="+mj-lt"/>
+                <a:cs typeface="Times New Roman" panose="02020603050405020304" pitchFamily="18" charset="0"/>
+              </a:rPr>
+              <a:t>nếu</a:t>
+            </a:r>
+            <a:r>
+              <a:rPr lang="en-US" altLang="ja-JP" sz="1600" b="0" dirty="0">
+                <a:latin typeface="+mj-lt"/>
+                <a:cs typeface="Times New Roman" panose="02020603050405020304" pitchFamily="18" charset="0"/>
+              </a:rPr>
+              <a:t> </a:t>
+            </a:r>
+            <a:r>
+              <a:rPr lang="en-US" altLang="ja-JP" sz="1600" b="0" dirty="0" err="1">
+                <a:latin typeface="+mj-lt"/>
+                <a:cs typeface="Times New Roman" panose="02020603050405020304" pitchFamily="18" charset="0"/>
+              </a:rPr>
+              <a:t>cần</a:t>
+            </a:r>
+            <a:r>
+              <a:rPr lang="ja-JP" altLang="en-US" sz="1600" b="0" dirty="0">
+                <a:latin typeface="+mj-lt"/>
+                <a:cs typeface="Times New Roman" panose="02020603050405020304" pitchFamily="18" charset="0"/>
+              </a:rPr>
+              <a:t>）</a:t>
+            </a:r>
+          </a:p>
+        </p:txBody>
+      </p:sp>
+      <p:sp>
+        <p:nvSpPr>
+          <p:cNvPr id="410645" name="Rectangle 21">
+            <a:extLst>
+              <a:ext uri="{FF2B5EF4-FFF2-40B4-BE49-F238E27FC236}">
+                <a16:creationId xmlns:a16="http://schemas.microsoft.com/office/drawing/2014/main" id="{DC091EFD-C64A-C2AA-AFF6-520A3FFBB74A}"/>
+              </a:ext>
+            </a:extLst>
+          </p:cNvPr>
+          <p:cNvSpPr>
+            <a:spLocks noChangeArrowheads="1"/>
+          </p:cNvSpPr>
+          <p:nvPr/>
+        </p:nvSpPr>
+        <p:spPr bwMode="auto">
+          <a:xfrm>
+            <a:off x="1212850" y="2468563"/>
+            <a:ext cx="2246313" cy="400752"/>
+          </a:xfrm>
+          <a:prstGeom prst="rect">
+            <a:avLst/>
+          </a:prstGeom>
+          <a:noFill/>
+          <a:ln>
+            <a:noFill/>
+          </a:ln>
+          <a:effectLst/>
+          <a:extLst>
+            <a:ext uri="{909E8E84-426E-40DD-AFC4-6F175D3DCCD1}">
+              <a14:hiddenFill xmlns:a14="http://schemas.microsoft.com/office/drawing/2010/main">
+                <a:solidFill>
+                  <a:schemeClr val="accent1"/>
+                </a:solidFill>
+              </a14:hiddenFill>
+            </a:ext>
+            <a:ext uri="{91240B29-F687-4F45-9708-019B960494DF}">
+              <a14:hiddenLine xmlns:a14="http://schemas.microsoft.com/office/drawing/2010/main" w="9525">
+                <a:solidFill>
+                  <a:schemeClr val="tx1"/>
+                </a:solidFill>
+                <a:miter lim="800000"/>
+                <a:headEnd/>
+                <a:tailEnd/>
+              </a14:hiddenLine>
+            </a:ext>
+            <a:ext uri="{AF507438-7753-43E0-B8FC-AC1667EBCBE1}">
+              <a14:hiddenEffects xmlns:a14="http://schemas.microsoft.com/office/drawing/2010/main">
+                <a:effectLst>
+                  <a:outerShdw dist="35921" dir="2700000" algn="ctr" rotWithShape="0">
+                    <a:schemeClr val="bg2"/>
+                  </a:outerShdw>
+                </a:effectLst>
+              </a14:hiddenEffects>
+            </a:ext>
+          </a:extLst>
+        </p:spPr>
+        <p:txBody>
+          <a:bodyPr lIns="92075" tIns="46038" rIns="92075" bIns="46038">
+            <a:spAutoFit/>
+          </a:bodyPr>
+          <a:lstStyle/>
+          <a:p>
+            <a:pPr algn="ctr" eaLnBrk="0" hangingPunct="0"/>
+            <a:r>
+              <a:rPr lang="en-US" altLang="ja-JP" sz="2000" dirty="0">
+                <a:latin typeface="+mj-lt"/>
+              </a:rPr>
+              <a:t>【Class </a:t>
+            </a:r>
+            <a:r>
+              <a:rPr lang="en-US" altLang="ja-JP" sz="2000" dirty="0" err="1">
+                <a:latin typeface="+mj-lt"/>
+              </a:rPr>
+              <a:t>người</a:t>
+            </a:r>
+            <a:r>
+              <a:rPr lang="en-US" altLang="ja-JP" sz="2000" dirty="0">
+                <a:latin typeface="+mj-lt"/>
+              </a:rPr>
+              <a:t>】</a:t>
+            </a:r>
+          </a:p>
+        </p:txBody>
+      </p:sp>
+      <p:grpSp>
+        <p:nvGrpSpPr>
+          <p:cNvPr id="410646" name="Group 22">
+            <a:extLst>
+              <a:ext uri="{FF2B5EF4-FFF2-40B4-BE49-F238E27FC236}">
+                <a16:creationId xmlns:a16="http://schemas.microsoft.com/office/drawing/2014/main" id="{22135AD0-DF71-6E57-4F34-29A7B785E093}"/>
+              </a:ext>
+            </a:extLst>
+          </p:cNvPr>
+          <p:cNvGrpSpPr>
+            <a:grpSpLocks/>
+          </p:cNvGrpSpPr>
+          <p:nvPr/>
+        </p:nvGrpSpPr>
+        <p:grpSpPr bwMode="auto">
+          <a:xfrm>
+            <a:off x="838200" y="3130550"/>
+            <a:ext cx="2874963" cy="2409825"/>
+            <a:chOff x="640" y="4949"/>
+            <a:chExt cx="859" cy="879"/>
+          </a:xfrm>
+        </p:grpSpPr>
+        <p:sp>
+          <p:nvSpPr>
+            <p:cNvPr id="410647" name="Rectangle 23">
+              <a:extLst>
+                <a:ext uri="{FF2B5EF4-FFF2-40B4-BE49-F238E27FC236}">
+                  <a16:creationId xmlns:a16="http://schemas.microsoft.com/office/drawing/2014/main" id="{FD0B2AF3-D6D3-1535-AD11-B1F2DC774141}"/>
+                </a:ext>
+              </a:extLst>
+            </p:cNvPr>
+            <p:cNvSpPr>
+              <a:spLocks noChangeArrowheads="1"/>
+            </p:cNvSpPr>
+            <p:nvPr/>
+          </p:nvSpPr>
+          <p:spPr bwMode="auto">
+            <a:xfrm>
+              <a:off x="640" y="4949"/>
+              <a:ext cx="859" cy="164"/>
+            </a:xfrm>
+            <a:prstGeom prst="rect">
+              <a:avLst/>
+            </a:prstGeom>
+            <a:solidFill>
+              <a:srgbClr val="FFFFCC"/>
+            </a:solidFill>
+            <a:ln w="9525">
+              <a:solidFill>
+                <a:schemeClr val="tx1"/>
+              </a:solidFill>
+              <a:miter lim="800000"/>
+              <a:headEnd/>
+              <a:tailEnd/>
+            </a:ln>
+            <a:effectLst/>
+            <a:extLst>
+              <a:ext uri="{AF507438-7753-43E0-B8FC-AC1667EBCBE1}">
+                <a14:hiddenEffects xmlns:a14="http://schemas.microsoft.com/office/drawing/2010/main">
+                  <a:effectLst>
+                    <a:outerShdw dist="35921" dir="2700000" algn="ctr" rotWithShape="0">
+                      <a:schemeClr val="bg2"/>
+                    </a:outerShdw>
+                  </a:effectLst>
+                </a14:hiddenEffects>
+              </a:ext>
+            </a:extLst>
+          </p:spPr>
+          <p:txBody>
+            <a:bodyPr wrap="none" anchor="ctr"/>
+            <a:lstStyle/>
+            <a:p>
+              <a:pPr algn="ctr"/>
+              <a:r>
+                <a:rPr lang="en-US" altLang="ja-JP" sz="1800"/>
+                <a:t>Người</a:t>
+              </a:r>
+            </a:p>
+          </p:txBody>
+        </p:sp>
+        <p:sp>
+          <p:nvSpPr>
+            <p:cNvPr id="410648" name="Rectangle 24">
+              <a:extLst>
+                <a:ext uri="{FF2B5EF4-FFF2-40B4-BE49-F238E27FC236}">
+                  <a16:creationId xmlns:a16="http://schemas.microsoft.com/office/drawing/2014/main" id="{7AB04A0B-03D6-4A15-D1FE-BD3CFC9F22DC}"/>
+                </a:ext>
+              </a:extLst>
+            </p:cNvPr>
+            <p:cNvSpPr>
+              <a:spLocks noChangeArrowheads="1"/>
+            </p:cNvSpPr>
+            <p:nvPr/>
+          </p:nvSpPr>
+          <p:spPr bwMode="auto">
+            <a:xfrm>
+              <a:off x="640" y="5113"/>
+              <a:ext cx="859" cy="306"/>
+            </a:xfrm>
+            <a:prstGeom prst="rect">
+              <a:avLst/>
+            </a:prstGeom>
+            <a:solidFill>
+              <a:srgbClr val="FFFFCC"/>
+            </a:solidFill>
+            <a:ln w="9525">
+              <a:solidFill>
+                <a:schemeClr val="tx1"/>
+              </a:solidFill>
+              <a:miter lim="800000"/>
+              <a:headEnd/>
+              <a:tailEnd/>
+            </a:ln>
+            <a:effectLst/>
+            <a:extLst>
+              <a:ext uri="{AF507438-7753-43E0-B8FC-AC1667EBCBE1}">
+                <a14:hiddenEffects xmlns:a14="http://schemas.microsoft.com/office/drawing/2010/main">
+                  <a:effectLst>
+                    <a:outerShdw dist="35921" dir="2700000" algn="ctr" rotWithShape="0">
+                      <a:schemeClr val="bg2"/>
+                    </a:outerShdw>
+                  </a:effectLst>
+                </a14:hiddenEffects>
+              </a:ext>
+            </a:extLst>
+          </p:spPr>
+          <p:txBody>
+            <a:bodyPr wrap="none" anchor="ctr"/>
+            <a:lstStyle/>
+            <a:p>
+              <a:r>
+                <a:rPr lang="en-US" altLang="ja-JP" sz="1800" b="0" dirty="0" err="1">
+                  <a:latin typeface="+mj-lt"/>
+                </a:rPr>
+                <a:t>Tên</a:t>
+              </a:r>
+              <a:endParaRPr lang="en-US" altLang="ja-JP" sz="1800" b="0" dirty="0">
+                <a:latin typeface="+mj-lt"/>
+              </a:endParaRPr>
+            </a:p>
+            <a:p>
+              <a:r>
+                <a:rPr lang="en-US" altLang="ja-JP" sz="1800" b="0" dirty="0" err="1">
+                  <a:latin typeface="+mj-lt"/>
+                </a:rPr>
+                <a:t>Tuổi</a:t>
+              </a:r>
+              <a:endParaRPr lang="en-US" altLang="ja-JP" sz="1800" b="0" dirty="0">
+                <a:latin typeface="+mj-lt"/>
+              </a:endParaRPr>
+            </a:p>
+          </p:txBody>
+        </p:sp>
+        <p:sp>
+          <p:nvSpPr>
+            <p:cNvPr id="410649" name="Rectangle 25">
+              <a:extLst>
+                <a:ext uri="{FF2B5EF4-FFF2-40B4-BE49-F238E27FC236}">
+                  <a16:creationId xmlns:a16="http://schemas.microsoft.com/office/drawing/2014/main" id="{40ECCB98-4A16-DF4A-D8DC-713B7945B7A6}"/>
+                </a:ext>
+              </a:extLst>
+            </p:cNvPr>
+            <p:cNvSpPr>
+              <a:spLocks noChangeArrowheads="1"/>
+            </p:cNvSpPr>
+            <p:nvPr/>
+          </p:nvSpPr>
+          <p:spPr bwMode="auto">
+            <a:xfrm>
+              <a:off x="640" y="5421"/>
+              <a:ext cx="859" cy="407"/>
+            </a:xfrm>
+            <a:prstGeom prst="rect">
+              <a:avLst/>
+            </a:prstGeom>
+            <a:solidFill>
+              <a:srgbClr val="FFFFCC"/>
+            </a:solidFill>
+            <a:ln w="9525">
+              <a:solidFill>
+                <a:schemeClr val="tx1"/>
+              </a:solidFill>
+              <a:miter lim="800000"/>
+              <a:headEnd/>
+              <a:tailEnd/>
+            </a:ln>
+            <a:effectLst/>
+            <a:extLst>
+              <a:ext uri="{AF507438-7753-43E0-B8FC-AC1667EBCBE1}">
+                <a14:hiddenEffects xmlns:a14="http://schemas.microsoft.com/office/drawing/2010/main">
+                  <a:effectLst>
+                    <a:outerShdw dist="35921" dir="2700000" algn="ctr" rotWithShape="0">
+                      <a:schemeClr val="bg2"/>
+                    </a:outerShdw>
+                  </a:effectLst>
+                </a14:hiddenEffects>
+              </a:ext>
+            </a:extLst>
+          </p:spPr>
+          <p:txBody>
+            <a:bodyPr wrap="none" anchor="ctr"/>
+            <a:lstStyle/>
+            <a:p>
+              <a:r>
+                <a:rPr lang="en-US" altLang="ja-JP" sz="1800" b="0" dirty="0" err="1">
+                  <a:latin typeface="+mj-lt"/>
+                </a:rPr>
+                <a:t>Lấy</a:t>
+              </a:r>
+              <a:r>
+                <a:rPr lang="en-US" altLang="ja-JP" sz="1800" b="0" dirty="0">
+                  <a:latin typeface="+mj-lt"/>
+                </a:rPr>
+                <a:t> </a:t>
+              </a:r>
+              <a:r>
+                <a:rPr lang="en-US" altLang="ja-JP" sz="1800" b="0" dirty="0" err="1">
+                  <a:latin typeface="+mj-lt"/>
+                </a:rPr>
+                <a:t>tên</a:t>
+              </a:r>
+              <a:endParaRPr lang="en-US" altLang="ja-JP" sz="1800" b="0" dirty="0">
+                <a:latin typeface="+mj-lt"/>
+              </a:endParaRPr>
+            </a:p>
+            <a:p>
+              <a:r>
+                <a:rPr lang="en-US" altLang="ja-JP" sz="1800" b="0" dirty="0" err="1">
+                  <a:latin typeface="+mj-lt"/>
+                </a:rPr>
+                <a:t>Lấy</a:t>
+              </a:r>
+              <a:r>
+                <a:rPr lang="en-US" altLang="ja-JP" sz="1800" b="0" dirty="0">
+                  <a:latin typeface="+mj-lt"/>
+                </a:rPr>
+                <a:t> </a:t>
+              </a:r>
+              <a:r>
+                <a:rPr lang="en-US" altLang="ja-JP" sz="1800" b="0" dirty="0" err="1">
+                  <a:latin typeface="+mj-lt"/>
+                </a:rPr>
+                <a:t>tuổi</a:t>
+              </a:r>
+              <a:endParaRPr lang="en-US" altLang="ja-JP" sz="1800" b="0" dirty="0">
+                <a:latin typeface="+mj-lt"/>
+              </a:endParaRPr>
+            </a:p>
+            <a:p>
+              <a:r>
+                <a:rPr lang="en-US" altLang="ja-JP" sz="1800" b="0" dirty="0">
+                  <a:latin typeface="+mj-lt"/>
+                </a:rPr>
+                <a:t>Set </a:t>
+              </a:r>
+              <a:r>
+                <a:rPr lang="en-US" altLang="ja-JP" sz="1800" b="0" dirty="0" err="1">
+                  <a:latin typeface="+mj-lt"/>
+                </a:rPr>
+                <a:t>tuổi</a:t>
+              </a:r>
+              <a:endParaRPr lang="en-US" altLang="ja-JP" sz="1800" b="0" dirty="0">
+                <a:latin typeface="+mj-lt"/>
+              </a:endParaRPr>
+            </a:p>
+          </p:txBody>
+        </p:sp>
+      </p:grpSp>
+      <p:sp>
+        <p:nvSpPr>
+          <p:cNvPr id="410639" name="AutoShape 15">
+            <a:extLst>
+              <a:ext uri="{FF2B5EF4-FFF2-40B4-BE49-F238E27FC236}">
+                <a16:creationId xmlns:a16="http://schemas.microsoft.com/office/drawing/2014/main" id="{D7492F72-0FBA-1CB9-1490-EC8BCEBD847F}"/>
+              </a:ext>
+            </a:extLst>
+          </p:cNvPr>
+          <p:cNvSpPr>
+            <a:spLocks/>
+          </p:cNvSpPr>
+          <p:nvPr/>
+        </p:nvSpPr>
+        <p:spPr bwMode="auto">
+          <a:xfrm>
+            <a:off x="1579563" y="3789363"/>
+            <a:ext cx="76200" cy="455612"/>
+          </a:xfrm>
+          <a:prstGeom prst="rightBrace">
+            <a:avLst>
+              <a:gd name="adj1" fmla="val 49826"/>
+              <a:gd name="adj2" fmla="val 50000"/>
+            </a:avLst>
+          </a:prstGeom>
+          <a:solidFill>
+            <a:srgbClr val="FFFFCC">
+              <a:alpha val="50000"/>
+            </a:srgbClr>
+          </a:solidFill>
+          <a:ln w="19050">
+            <a:solidFill>
+              <a:srgbClr val="0033CC"/>
+            </a:solidFill>
+            <a:round/>
+            <a:headEnd/>
+            <a:tailEnd/>
+          </a:ln>
+          <a:effectLst/>
+          <a:extLst>
+            <a:ext uri="{AF507438-7753-43E0-B8FC-AC1667EBCBE1}">
+              <a14:hiddenEffects xmlns:a14="http://schemas.microsoft.com/office/drawing/2010/main">
+                <a:effectLst>
+                  <a:outerShdw dist="35921" dir="2700000" algn="ctr" rotWithShape="0">
+                    <a:schemeClr val="bg2"/>
+                  </a:outerShdw>
+                </a:effectLst>
+              </a14:hiddenEffects>
+            </a:ext>
+          </a:extLst>
+        </p:spPr>
+        <p:txBody>
+          <a:bodyPr wrap="none" anchor="ctr"/>
+          <a:lstStyle/>
+          <a:p>
+            <a:endParaRPr lang="ja-JP" altLang="en-US"/>
+          </a:p>
+        </p:txBody>
+      </p:sp>
+      <p:sp>
+        <p:nvSpPr>
+          <p:cNvPr id="410640" name="Text Box 16">
+            <a:extLst>
+              <a:ext uri="{FF2B5EF4-FFF2-40B4-BE49-F238E27FC236}">
+                <a16:creationId xmlns:a16="http://schemas.microsoft.com/office/drawing/2014/main" id="{2DC961E7-AE8E-9958-E2B9-1C322C3B2C9F}"/>
+              </a:ext>
+            </a:extLst>
+          </p:cNvPr>
+          <p:cNvSpPr txBox="1">
+            <a:spLocks noChangeArrowheads="1"/>
+          </p:cNvSpPr>
+          <p:nvPr/>
+        </p:nvSpPr>
+        <p:spPr bwMode="auto">
+          <a:xfrm>
+            <a:off x="1890713" y="3819525"/>
+            <a:ext cx="982662" cy="517525"/>
+          </a:xfrm>
+          <a:prstGeom prst="rect">
+            <a:avLst/>
+          </a:prstGeom>
+          <a:noFill/>
+          <a:ln>
+            <a:noFill/>
+          </a:ln>
+          <a:effectLst/>
+          <a:extLst>
+            <a:ext uri="{909E8E84-426E-40DD-AFC4-6F175D3DCCD1}">
+              <a14:hiddenFill xmlns:a14="http://schemas.microsoft.com/office/drawing/2010/main">
+                <a:solidFill>
+                  <a:srgbClr val="FFFFCC"/>
+                </a:solidFill>
+              </a14:hiddenFill>
+            </a:ext>
+            <a:ext uri="{91240B29-F687-4F45-9708-019B960494DF}">
+              <a14:hiddenLine xmlns:a14="http://schemas.microsoft.com/office/drawing/2010/main" w="9525">
+                <a:solidFill>
+                  <a:schemeClr val="tx1"/>
+                </a:solidFill>
+                <a:miter lim="800000"/>
+                <a:headEnd/>
+                <a:tailEnd/>
+              </a14:hiddenLine>
+            </a:ext>
+            <a:ext uri="{AF507438-7753-43E0-B8FC-AC1667EBCBE1}">
+              <a14:hiddenEffects xmlns:a14="http://schemas.microsoft.com/office/drawing/2010/main">
+                <a:effectLst>
+                  <a:outerShdw dist="35921" dir="2700000" algn="ctr" rotWithShape="0">
+                    <a:schemeClr val="bg2"/>
+                  </a:outerShdw>
+                </a:effectLst>
+              </a14:hiddenEffects>
+            </a:ext>
+          </a:extLst>
+        </p:spPr>
+        <p:txBody>
+          <a:bodyPr>
+            <a:spAutoFit/>
+          </a:bodyPr>
+          <a:lstStyle/>
+          <a:p>
+            <a:pPr>
+              <a:spcBef>
+                <a:spcPct val="50000"/>
+              </a:spcBef>
+            </a:pPr>
+            <a:r>
+              <a:rPr lang="en-US" altLang="ja-JP" sz="1400">
+                <a:solidFill>
+                  <a:srgbClr val="0033CC"/>
+                </a:solidFill>
+                <a:latin typeface="Times New Roman" panose="02020603050405020304" pitchFamily="18" charset="0"/>
+              </a:rPr>
+              <a:t>Không công khai</a:t>
+            </a:r>
+          </a:p>
+        </p:txBody>
+      </p:sp>
+      <p:sp>
+        <p:nvSpPr>
+          <p:cNvPr id="410641" name="AutoShape 17">
+            <a:extLst>
+              <a:ext uri="{FF2B5EF4-FFF2-40B4-BE49-F238E27FC236}">
+                <a16:creationId xmlns:a16="http://schemas.microsoft.com/office/drawing/2014/main" id="{FD245707-3DF3-7FB5-5758-B013B0FCC7F1}"/>
+              </a:ext>
+            </a:extLst>
+          </p:cNvPr>
+          <p:cNvSpPr>
+            <a:spLocks/>
+          </p:cNvSpPr>
+          <p:nvPr/>
+        </p:nvSpPr>
+        <p:spPr bwMode="auto">
+          <a:xfrm>
+            <a:off x="2601913" y="4576763"/>
+            <a:ext cx="76200" cy="862012"/>
+          </a:xfrm>
+          <a:prstGeom prst="rightBrace">
+            <a:avLst>
+              <a:gd name="adj1" fmla="val 94271"/>
+              <a:gd name="adj2" fmla="val 50000"/>
+            </a:avLst>
+          </a:prstGeom>
+          <a:solidFill>
+            <a:srgbClr val="FFFFCC">
+              <a:alpha val="50000"/>
+            </a:srgbClr>
+          </a:solidFill>
+          <a:ln w="19050">
+            <a:solidFill>
+              <a:srgbClr val="0033CC"/>
+            </a:solidFill>
+            <a:round/>
+            <a:headEnd/>
+            <a:tailEnd/>
+          </a:ln>
+          <a:effectLst/>
+          <a:extLst>
+            <a:ext uri="{AF507438-7753-43E0-B8FC-AC1667EBCBE1}">
+              <a14:hiddenEffects xmlns:a14="http://schemas.microsoft.com/office/drawing/2010/main">
+                <a:effectLst>
+                  <a:outerShdw dist="35921" dir="2700000" algn="ctr" rotWithShape="0">
+                    <a:schemeClr val="bg2"/>
+                  </a:outerShdw>
+                </a:effectLst>
+              </a14:hiddenEffects>
+            </a:ext>
+          </a:extLst>
+        </p:spPr>
+        <p:txBody>
+          <a:bodyPr wrap="none" anchor="ctr"/>
+          <a:lstStyle/>
+          <a:p>
+            <a:endParaRPr lang="ja-JP" altLang="en-US"/>
+          </a:p>
+        </p:txBody>
+      </p:sp>
+      <p:sp>
+        <p:nvSpPr>
+          <p:cNvPr id="410642" name="Text Box 18">
+            <a:extLst>
+              <a:ext uri="{FF2B5EF4-FFF2-40B4-BE49-F238E27FC236}">
+                <a16:creationId xmlns:a16="http://schemas.microsoft.com/office/drawing/2014/main" id="{A8CC1FF9-E3FF-DCCA-2A17-52AAE4C6DE3C}"/>
+              </a:ext>
+            </a:extLst>
+          </p:cNvPr>
+          <p:cNvSpPr txBox="1">
+            <a:spLocks noChangeArrowheads="1"/>
+          </p:cNvSpPr>
+          <p:nvPr/>
+        </p:nvSpPr>
+        <p:spPr bwMode="auto">
+          <a:xfrm>
+            <a:off x="2833688" y="4835525"/>
+            <a:ext cx="982662" cy="517525"/>
+          </a:xfrm>
+          <a:prstGeom prst="rect">
+            <a:avLst/>
+          </a:prstGeom>
+          <a:noFill/>
+          <a:ln>
+            <a:noFill/>
+          </a:ln>
+          <a:effectLst/>
+          <a:extLst>
+            <a:ext uri="{909E8E84-426E-40DD-AFC4-6F175D3DCCD1}">
+              <a14:hiddenFill xmlns:a14="http://schemas.microsoft.com/office/drawing/2010/main">
+                <a:solidFill>
+                  <a:srgbClr val="FFFFCC"/>
+                </a:solidFill>
+              </a14:hiddenFill>
+            </a:ext>
+            <a:ext uri="{91240B29-F687-4F45-9708-019B960494DF}">
+              <a14:hiddenLine xmlns:a14="http://schemas.microsoft.com/office/drawing/2010/main" w="9525">
+                <a:solidFill>
+                  <a:schemeClr val="tx1"/>
+                </a:solidFill>
+                <a:miter lim="800000"/>
+                <a:headEnd/>
+                <a:tailEnd/>
+              </a14:hiddenLine>
+            </a:ext>
+            <a:ext uri="{AF507438-7753-43E0-B8FC-AC1667EBCBE1}">
+              <a14:hiddenEffects xmlns:a14="http://schemas.microsoft.com/office/drawing/2010/main">
+                <a:effectLst>
+                  <a:outerShdw dist="35921" dir="2700000" algn="ctr" rotWithShape="0">
+                    <a:schemeClr val="bg2"/>
+                  </a:outerShdw>
+                </a:effectLst>
+              </a14:hiddenEffects>
+            </a:ext>
+          </a:extLst>
+        </p:spPr>
+        <p:txBody>
+          <a:bodyPr>
+            <a:spAutoFit/>
+          </a:bodyPr>
+          <a:lstStyle/>
+          <a:p>
+            <a:pPr>
+              <a:spcBef>
+                <a:spcPct val="50000"/>
+              </a:spcBef>
+            </a:pPr>
+            <a:r>
+              <a:rPr lang="en-US" altLang="ja-JP" sz="1400">
+                <a:solidFill>
+                  <a:srgbClr val="0033CC"/>
+                </a:solidFill>
+                <a:latin typeface="Times New Roman" panose="02020603050405020304" pitchFamily="18" charset="0"/>
+              </a:rPr>
+              <a:t>Không công khai</a:t>
+            </a:r>
+          </a:p>
+        </p:txBody>
+      </p:sp>
     </p:spTree>
   </p:cSld>
   <p:clrMapOvr>
